--- a/slides/CSC270-Lecture-32-Course-Review.pptx
+++ b/slides/CSC270-Lecture-32-Course-Review.pptx
@@ -13,11 +13,16 @@
     <p:sldId id="261" r:id="rId7"/>
     <p:sldId id="262" r:id="rId8"/>
     <p:sldId id="263" r:id="rId9"/>
+    <p:sldId id="270" r:id="rId21"/>
     <p:sldId id="264" r:id="rId10"/>
+    <p:sldId id="271" r:id="rId22"/>
     <p:sldId id="265" r:id="rId11"/>
     <p:sldId id="266" r:id="rId12"/>
     <p:sldId id="267" r:id="rId13"/>
+    <p:sldId id="272" r:id="rId23"/>
     <p:sldId id="268" r:id="rId14"/>
+    <p:sldId id="273" r:id="rId24"/>
+    <p:sldId id="274" r:id="rId25"/>
     <p:sldId id="269" r:id="rId15"/>
   </p:sldIdLst>
   <p:notesMasterIdLst>
@@ -2123,7 +2128,7 @@
               <a:buNone/>
             </a:pPr>
             <a:r>
-              <a:rPr lang="en-US" sz="1400" b="1" spc="200" kern="0" dirty="0">
+              <a:rPr lang="en-US" sz="2000" b="1" spc="200" kern="0" dirty="0">
                 <a:solidFill>
                   <a:srgbClr val="2FE6C4"/>
                 </a:solidFill>
@@ -2133,7 +2138,7 @@
               </a:rPr>
               <a:t>CSC270 · DATABASE SYSTEMS · LECTURE 32</a:t>
             </a:r>
-            <a:endParaRPr lang="en-US" sz="1400" dirty="0"/>
+            <a:endParaRPr lang="en-US" sz="2000" dirty="0"/>
           </a:p>
         </p:txBody>
       </p:sp>
@@ -2162,7 +2167,7 @@
               <a:buNone/>
             </a:pPr>
             <a:r>
-              <a:rPr lang="en-US" sz="1400" dirty="0">
+              <a:rPr lang="en-US" sz="1800" dirty="0">
                 <a:solidFill>
                   <a:srgbClr val="8A939B"/>
                 </a:solidFill>
@@ -2172,7 +2177,7 @@
               </a:rPr>
               <a:t>Course Review · Capstone</a:t>
             </a:r>
-            <a:endParaRPr lang="en-US" sz="1400" dirty="0"/>
+            <a:endParaRPr lang="en-US" sz="1800" dirty="0"/>
           </a:p>
         </p:txBody>
       </p:sp>
@@ -2240,7 +2245,7 @@
               <a:buNone/>
             </a:pPr>
             <a:r>
-              <a:rPr lang="en-US" sz="1600" dirty="0">
+              <a:rPr lang="en-US" sz="1800" dirty="0">
                 <a:solidFill>
                   <a:srgbClr val="8A939B"/>
                 </a:solidFill>
@@ -2250,7 +2255,7 @@
               </a:rPr>
               <a:t>A tour of all 8 units, following one running example — a university's Student/Course enrollment data — through every stage a real system takes it.</a:t>
             </a:r>
-            <a:endParaRPr lang="en-US" sz="1600" dirty="0"/>
+            <a:endParaRPr lang="en-US" sz="1800" dirty="0"/>
           </a:p>
         </p:txBody>
       </p:sp>
@@ -2279,7 +2284,7 @@
               <a:buNone/>
             </a:pPr>
             <a:r>
-              <a:rPr lang="en-US" sz="1000" u="sng" dirty="0">
+              <a:rPr lang="en-US" sz="1200" u="sng" dirty="0">
                 <a:solidFill>
                   <a:srgbClr val="8A939B"/>
                 </a:solidFill>
@@ -2300,7 +2305,7 @@
               <a:buNone/>
             </a:pPr>
             <a:r>
-              <a:rPr lang="en-US" sz="1000" dirty="0">
+              <a:rPr lang="en-US" sz="1200" dirty="0">
                 <a:solidFill>
                   <a:srgbClr val="8A939B"/>
                 </a:solidFill>
@@ -2310,7 +2315,7 @@
               </a:rPr>
               <a:t>  ·  1</a:t>
             </a:r>
-            <a:endParaRPr lang="en-US" sz="1000" dirty="0"/>
+            <a:endParaRPr lang="en-US" sz="1200" dirty="0"/>
           </a:p>
         </p:txBody>
       </p:sp>
@@ -2449,7 +2454,7 @@
               <a:buNone/>
             </a:pPr>
             <a:r>
-              <a:rPr lang="en-US" sz="1000" u="sng" dirty="0">
+              <a:rPr lang="en-US" sz="1200" u="sng" dirty="0">
                 <a:solidFill>
                   <a:srgbClr val="8A939B"/>
                 </a:solidFill>
@@ -2470,7 +2475,7 @@
               <a:buNone/>
             </a:pPr>
             <a:r>
-              <a:rPr lang="en-US" sz="1000" dirty="0">
+              <a:rPr lang="en-US" sz="1200" dirty="0">
                 <a:solidFill>
                   <a:srgbClr val="8A939B"/>
                 </a:solidFill>
@@ -2478,9 +2483,9 @@
                 <a:ea typeface="Calibri" pitchFamily="34" charset="-122"/>
                 <a:cs typeface="Calibri" pitchFamily="34" charset="-120"/>
               </a:rPr>
-              <a:t>  ·  10</a:t>
-            </a:r>
-            <a:endParaRPr lang="en-US" sz="1000" dirty="0"/>
+              <a:t>  ·  12</a:t>
+            </a:r>
+            <a:endParaRPr lang="en-US" sz="1200" dirty="0"/>
           </a:p>
         </p:txBody>
       </p:sp>
@@ -2493,7 +2498,7 @@
         <p:spPr>
           <a:xfrm>
             <a:off x="548640" y="1371600"/>
-            <a:ext cx="5394960" cy="2651760"/>
+            <a:ext cx="4480560" cy="2834640"/>
           </a:xfrm>
           <a:prstGeom prst="rect">
             <a:avLst/>
@@ -2512,7 +2517,7 @@
               <a:buNone/>
             </a:pPr>
             <a:r>
-              <a:rPr lang="en-US" sz="1350" dirty="0">
+              <a:rPr lang="en-US" sz="1800" dirty="0">
                 <a:solidFill>
                   <a:srgbClr val="1F2429"/>
                 </a:solidFill>
@@ -2522,7 +2527,7 @@
               </a:rPr>
               <a:t>Stepping outside the relational model. A document database like MongoDB would happily store a student's enrollments denormalized, embedded directly inside the student's own document — the opposite instinct from Unit 5 — because MongoDB's strength is reading one student's entire profile in a single lookup, without a join.</a:t>
             </a:r>
-            <a:endParaRPr lang="en-US" sz="1350" dirty="0"/>
+            <a:endParaRPr lang="en-US" sz="1800" dirty="0"/>
           </a:p>
         </p:txBody>
       </p:sp>
@@ -2534,8 +2539,8 @@
         </p:nvSpPr>
         <p:spPr>
           <a:xfrm>
-            <a:off x="548640" y="4114800"/>
-            <a:ext cx="5394960" cy="1463040"/>
+            <a:off x="548640" y="4480560"/>
+            <a:ext cx="4480560" cy="1463040"/>
           </a:xfrm>
           <a:prstGeom prst="roundRect">
             <a:avLst>
@@ -2556,8 +2561,8 @@
         </p:nvSpPr>
         <p:spPr>
           <a:xfrm>
-            <a:off x="777240" y="4251960"/>
-            <a:ext cx="4937760" cy="1188720"/>
+            <a:off x="731520" y="4617720"/>
+            <a:ext cx="4114800" cy="1188720"/>
           </a:xfrm>
           <a:prstGeom prst="rect">
             <a:avLst/>
@@ -2576,7 +2581,7 @@
               <a:buNone/>
             </a:pPr>
             <a:r>
-              <a:rPr lang="en-US" sz="1250" i="1" dirty="0">
+              <a:rPr lang="en-US" sz="1800" i="1" dirty="0">
                 <a:solidFill>
                   <a:srgbClr val="1F2429"/>
                 </a:solidFill>
@@ -2586,7 +2591,7 @@
               </a:rPr>
               <a:t>Neither choice is universally “correct” — each is the right tool for a different access pattern.</a:t>
             </a:r>
-            <a:endParaRPr lang="en-US" sz="1250" dirty="0"/>
+            <a:endParaRPr lang="en-US" sz="1800" dirty="0"/>
           </a:p>
         </p:txBody>
       </p:sp>
@@ -2598,8 +2603,8 @@
         </p:nvSpPr>
         <p:spPr>
           <a:xfrm>
-            <a:off x="6263640" y="1371600"/>
-            <a:ext cx="5349240" cy="4206240"/>
+            <a:off x="5303520" y="1280160"/>
+            <a:ext cx="6309360" cy="5029200"/>
           </a:xfrm>
           <a:prstGeom prst="roundRect">
             <a:avLst>
@@ -2620,8 +2625,8 @@
         </p:nvSpPr>
         <p:spPr>
           <a:xfrm>
-            <a:off x="6537960" y="1600200"/>
-            <a:ext cx="4800600" cy="274320"/>
+            <a:off x="5577840" y="1417320"/>
+            <a:ext cx="5760720" cy="274320"/>
           </a:xfrm>
           <a:prstGeom prst="rect">
             <a:avLst/>
@@ -2637,7 +2642,7 @@
               <a:buNone/>
             </a:pPr>
             <a:r>
-              <a:rPr lang="en-US" sz="1050" b="1" spc="100" kern="0" dirty="0">
+              <a:rPr lang="en-US" sz="1800" b="1" spc="100" kern="0" dirty="0">
                 <a:solidFill>
                   <a:srgbClr val="2FE6C4"/>
                 </a:solidFill>
@@ -2647,7 +2652,7 @@
               </a:rPr>
               <a:t>students COLLECTION — ONE EMBEDDED DOCUMENT</a:t>
             </a:r>
-            <a:endParaRPr lang="en-US" sz="1050" dirty="0"/>
+            <a:endParaRPr lang="en-US" sz="1800" dirty="0"/>
           </a:p>
         </p:txBody>
       </p:sp>
@@ -2659,8 +2664,8 @@
         </p:nvSpPr>
         <p:spPr>
           <a:xfrm>
-            <a:off x="6537960" y="2011680"/>
-            <a:ext cx="4800600" cy="3337560"/>
+            <a:off x="5577840" y="1920240"/>
+            <a:ext cx="5760720" cy="4343400"/>
           </a:xfrm>
           <a:prstGeom prst="rect">
             <a:avLst/>
@@ -2679,7 +2684,7 @@
               <a:buNone/>
             </a:pPr>
             <a:r>
-              <a:rPr lang="en-US" sz="1150" dirty="0">
+              <a:rPr lang="en-US" sz="1800" dirty="0">
                 <a:solidFill>
                   <a:srgbClr val="FFFFFF"/>
                 </a:solidFill>
@@ -2689,7 +2694,7 @@
               </a:rPr>
               <a:t>{</a:t>
             </a:r>
-            <a:endParaRPr lang="en-US" sz="1150" dirty="0"/>
+            <a:endParaRPr lang="en-US" sz="1800" dirty="0"/>
           </a:p>
           <a:p>
             <a:pPr indent="0" marL="0">
@@ -2699,7 +2704,7 @@
               <a:buNone/>
             </a:pPr>
             <a:r>
-              <a:rPr lang="en-US" sz="1150" dirty="0">
+              <a:rPr lang="en-US" sz="1800" dirty="0">
                 <a:solidFill>
                   <a:srgbClr val="FFFFFF"/>
                 </a:solidFill>
@@ -2709,7 +2714,7 @@
               </a:rPr>
               <a:t>  "_id": "S001",</a:t>
             </a:r>
-            <a:endParaRPr lang="en-US" sz="1150" dirty="0"/>
+            <a:endParaRPr lang="en-US" sz="1800" dirty="0"/>
           </a:p>
           <a:p>
             <a:pPr indent="0" marL="0">
@@ -2719,7 +2724,7 @@
               <a:buNone/>
             </a:pPr>
             <a:r>
-              <a:rPr lang="en-US" sz="1150" dirty="0">
+              <a:rPr lang="en-US" sz="1800" dirty="0">
                 <a:solidFill>
                   <a:srgbClr val="FFFFFF"/>
                 </a:solidFill>
@@ -2729,7 +2734,7 @@
               </a:rPr>
               <a:t>  "name": "Amina Raza",</a:t>
             </a:r>
-            <a:endParaRPr lang="en-US" sz="1150" dirty="0"/>
+            <a:endParaRPr lang="en-US" sz="1800" dirty="0"/>
           </a:p>
           <a:p>
             <a:pPr indent="0" marL="0">
@@ -2739,7 +2744,7 @@
               <a:buNone/>
             </a:pPr>
             <a:r>
-              <a:rPr lang="en-US" sz="1150" dirty="0">
+              <a:rPr lang="en-US" sz="1800" dirty="0">
                 <a:solidFill>
                   <a:srgbClr val="FFFFFF"/>
                 </a:solidFill>
@@ -2749,7 +2754,7 @@
               </a:rPr>
               <a:t>  "major": "Computer Science",</a:t>
             </a:r>
-            <a:endParaRPr lang="en-US" sz="1150" dirty="0"/>
+            <a:endParaRPr lang="en-US" sz="1800" dirty="0"/>
           </a:p>
           <a:p>
             <a:pPr indent="0" marL="0">
@@ -2759,7 +2764,7 @@
               <a:buNone/>
             </a:pPr>
             <a:r>
-              <a:rPr lang="en-US" sz="1150" dirty="0">
+              <a:rPr lang="en-US" sz="1800" dirty="0">
                 <a:solidFill>
                   <a:srgbClr val="FFFFFF"/>
                 </a:solidFill>
@@ -2769,7 +2774,7 @@
               </a:rPr>
               <a:t>  "enrollments": [</a:t>
             </a:r>
-            <a:endParaRPr lang="en-US" sz="1150" dirty="0"/>
+            <a:endParaRPr lang="en-US" sz="1800" dirty="0"/>
           </a:p>
           <a:p>
             <a:pPr indent="0" marL="0">
@@ -2779,7 +2784,7 @@
               <a:buNone/>
             </a:pPr>
             <a:r>
-              <a:rPr lang="en-US" sz="1150" dirty="0">
+              <a:rPr lang="en-US" sz="1800" dirty="0">
                 <a:solidFill>
                   <a:srgbClr val="FFFFFF"/>
                 </a:solidFill>
@@ -2789,7 +2794,7 @@
               </a:rPr>
               <a:t>    { "courseId": "CS270",</a:t>
             </a:r>
-            <a:endParaRPr lang="en-US" sz="1150" dirty="0"/>
+            <a:endParaRPr lang="en-US" sz="1800" dirty="0"/>
           </a:p>
           <a:p>
             <a:pPr indent="0" marL="0">
@@ -2799,7 +2804,7 @@
               <a:buNone/>
             </a:pPr>
             <a:r>
-              <a:rPr lang="en-US" sz="1150" dirty="0">
+              <a:rPr lang="en-US" sz="1800" dirty="0">
                 <a:solidFill>
                   <a:srgbClr val="FFFFFF"/>
                 </a:solidFill>
@@ -2809,7 +2814,7 @@
               </a:rPr>
               <a:t>      "title": "Database Systems",</a:t>
             </a:r>
-            <a:endParaRPr lang="en-US" sz="1150" dirty="0"/>
+            <a:endParaRPr lang="en-US" sz="1800" dirty="0"/>
           </a:p>
           <a:p>
             <a:pPr indent="0" marL="0">
@@ -2819,7 +2824,7 @@
               <a:buNone/>
             </a:pPr>
             <a:r>
-              <a:rPr lang="en-US" sz="1150" dirty="0">
+              <a:rPr lang="en-US" sz="1800" dirty="0">
                 <a:solidFill>
                   <a:srgbClr val="FFFFFF"/>
                 </a:solidFill>
@@ -2829,7 +2834,7 @@
               </a:rPr>
               <a:t>      "grade": "A" },</a:t>
             </a:r>
-            <a:endParaRPr lang="en-US" sz="1150" dirty="0"/>
+            <a:endParaRPr lang="en-US" sz="1800" dirty="0"/>
           </a:p>
           <a:p>
             <a:pPr indent="0" marL="0">
@@ -2839,7 +2844,7 @@
               <a:buNone/>
             </a:pPr>
             <a:r>
-              <a:rPr lang="en-US" sz="1150" dirty="0">
+              <a:rPr lang="en-US" sz="1800" dirty="0">
                 <a:solidFill>
                   <a:srgbClr val="FFFFFF"/>
                 </a:solidFill>
@@ -2849,7 +2854,7 @@
               </a:rPr>
               <a:t>    { "courseId": "CS211",</a:t>
             </a:r>
-            <a:endParaRPr lang="en-US" sz="1150" dirty="0"/>
+            <a:endParaRPr lang="en-US" sz="1800" dirty="0"/>
           </a:p>
           <a:p>
             <a:pPr indent="0" marL="0">
@@ -2859,7 +2864,7 @@
               <a:buNone/>
             </a:pPr>
             <a:r>
-              <a:rPr lang="en-US" sz="1150" dirty="0">
+              <a:rPr lang="en-US" sz="1800" dirty="0">
                 <a:solidFill>
                   <a:srgbClr val="FFFFFF"/>
                 </a:solidFill>
@@ -2869,7 +2874,7 @@
               </a:rPr>
               <a:t>      "title": "Algorithms",</a:t>
             </a:r>
-            <a:endParaRPr lang="en-US" sz="1150" dirty="0"/>
+            <a:endParaRPr lang="en-US" sz="1800" dirty="0"/>
           </a:p>
           <a:p>
             <a:pPr indent="0" marL="0">
@@ -2879,7 +2884,7 @@
               <a:buNone/>
             </a:pPr>
             <a:r>
-              <a:rPr lang="en-US" sz="1150" dirty="0">
+              <a:rPr lang="en-US" sz="1800" dirty="0">
                 <a:solidFill>
                   <a:srgbClr val="FFFFFF"/>
                 </a:solidFill>
@@ -2889,7 +2894,7 @@
               </a:rPr>
               <a:t>      "grade": "B+" }</a:t>
             </a:r>
-            <a:endParaRPr lang="en-US" sz="1150" dirty="0"/>
+            <a:endParaRPr lang="en-US" sz="1800" dirty="0"/>
           </a:p>
           <a:p>
             <a:pPr indent="0" marL="0">
@@ -2899,7 +2904,7 @@
               <a:buNone/>
             </a:pPr>
             <a:r>
-              <a:rPr lang="en-US" sz="1150" dirty="0">
+              <a:rPr lang="en-US" sz="1800" dirty="0">
                 <a:solidFill>
                   <a:srgbClr val="FFFFFF"/>
                 </a:solidFill>
@@ -2909,7 +2914,7 @@
               </a:rPr>
               <a:t>  ]</a:t>
             </a:r>
-            <a:endParaRPr lang="en-US" sz="1150" dirty="0"/>
+            <a:endParaRPr lang="en-US" sz="1800" dirty="0"/>
           </a:p>
           <a:p>
             <a:pPr indent="0" marL="0">
@@ -2919,7 +2924,7 @@
               <a:buNone/>
             </a:pPr>
             <a:r>
-              <a:rPr lang="en-US" sz="1150" dirty="0">
+              <a:rPr lang="en-US" sz="1800" dirty="0">
                 <a:solidFill>
                   <a:srgbClr val="FFFFFF"/>
                 </a:solidFill>
@@ -2929,7 +2934,7 @@
               </a:rPr>
               <a:t>}</a:t>
             </a:r>
-            <a:endParaRPr lang="en-US" sz="1150" dirty="0"/>
+            <a:endParaRPr lang="en-US" sz="1800" dirty="0"/>
           </a:p>
         </p:txBody>
       </p:sp>
@@ -3068,7 +3073,7 @@
               <a:buNone/>
             </a:pPr>
             <a:r>
-              <a:rPr lang="en-US" sz="1000" u="sng" dirty="0">
+              <a:rPr lang="en-US" sz="1200" u="sng" dirty="0">
                 <a:solidFill>
                   <a:srgbClr val="8A939B"/>
                 </a:solidFill>
@@ -3089,7 +3094,7 @@
               <a:buNone/>
             </a:pPr>
             <a:r>
-              <a:rPr lang="en-US" sz="1000" dirty="0">
+              <a:rPr lang="en-US" sz="1200" dirty="0">
                 <a:solidFill>
                   <a:srgbClr val="8A939B"/>
                 </a:solidFill>
@@ -3097,9 +3102,9 @@
                 <a:ea typeface="Calibri" pitchFamily="34" charset="-122"/>
                 <a:cs typeface="Calibri" pitchFamily="34" charset="-120"/>
               </a:rPr>
-              <a:t>  ·  11</a:t>
-            </a:r>
-            <a:endParaRPr lang="en-US" sz="1000" dirty="0"/>
+              <a:t>  ·  13</a:t>
+            </a:r>
+            <a:endParaRPr lang="en-US" sz="1200" dirty="0"/>
           </a:p>
         </p:txBody>
       </p:sp>
@@ -3131,7 +3136,7 @@
               <a:buNone/>
             </a:pPr>
             <a:r>
-              <a:rPr lang="en-US" sz="1450" dirty="0">
+              <a:rPr lang="en-US" sz="1800" dirty="0">
                 <a:solidFill>
                   <a:srgbClr val="1F2429"/>
                 </a:solidFill>
@@ -3141,7 +3146,7 @@
               </a:rPr>
               <a:t>Wrapping the whole thing in safety guarantees. Enrolling a student is, underneath, at least two writes — insert the Enrollment row and decrement Course.seatsAvailable — and both must succeed or neither should.</a:t>
             </a:r>
-            <a:endParaRPr lang="en-US" sz="1450" dirty="0"/>
+            <a:endParaRPr lang="en-US" sz="1800" dirty="0"/>
           </a:p>
         </p:txBody>
       </p:sp>
@@ -3154,7 +3159,7 @@
         <p:spPr>
           <a:xfrm>
             <a:off x="548640" y="2514600"/>
-            <a:ext cx="3413760" cy="1920240"/>
+            <a:ext cx="3413760" cy="2331720"/>
           </a:xfrm>
           <a:prstGeom prst="roundRect">
             <a:avLst>
@@ -3224,7 +3229,7 @@
               <a:buNone/>
             </a:pPr>
             <a:r>
-              <a:rPr lang="en-US" sz="1350" b="1" dirty="0">
+              <a:rPr lang="en-US" sz="2000" b="1" dirty="0">
                 <a:solidFill>
                   <a:srgbClr val="1F2429"/>
                 </a:solidFill>
@@ -3234,7 +3239,7 @@
               </a:rPr>
               <a:t>BEGIN TRANSACTION</a:t>
             </a:r>
-            <a:endParaRPr lang="en-US" sz="1350" dirty="0"/>
+            <a:endParaRPr lang="en-US" sz="2000" dirty="0"/>
           </a:p>
         </p:txBody>
       </p:sp>
@@ -3246,7 +3251,7 @@
         </p:nvSpPr>
         <p:spPr>
           <a:xfrm>
-            <a:off x="3962400" y="3474720"/>
+            <a:off x="3962400" y="3680460"/>
             <a:ext cx="411480" cy="0"/>
           </a:xfrm>
           <a:prstGeom prst="line">
@@ -3271,7 +3276,7 @@
         <p:spPr>
           <a:xfrm>
             <a:off x="4373880" y="2514600"/>
-            <a:ext cx="3413760" cy="1920240"/>
+            <a:ext cx="3413760" cy="2331720"/>
           </a:xfrm>
           <a:prstGeom prst="roundRect">
             <a:avLst>
@@ -3341,7 +3346,7 @@
               <a:buNone/>
             </a:pPr>
             <a:r>
-              <a:rPr lang="en-US" sz="1350" b="1" dirty="0">
+              <a:rPr lang="en-US" sz="2000" b="1" dirty="0">
                 <a:solidFill>
                   <a:srgbClr val="1F2429"/>
                 </a:solidFill>
@@ -3351,7 +3356,7 @@
               </a:rPr>
               <a:t>INSERT Enrollment; UPDATE seatsAvailable</a:t>
             </a:r>
-            <a:endParaRPr lang="en-US" sz="1350" dirty="0"/>
+            <a:endParaRPr lang="en-US" sz="2000" dirty="0"/>
           </a:p>
         </p:txBody>
       </p:sp>
@@ -3364,7 +3369,7 @@
         <p:spPr>
           <a:xfrm>
             <a:off x="4520184" y="3518611"/>
-            <a:ext cx="3121152" cy="806501"/>
+            <a:ext cx="3121152" cy="1100000"/>
           </a:xfrm>
           <a:prstGeom prst="rect">
             <a:avLst/>
@@ -3383,7 +3388,7 @@
               <a:buNone/>
             </a:pPr>
             <a:r>
-              <a:rPr lang="en-US" sz="1050" dirty="0">
+              <a:rPr lang="en-US" sz="1800" dirty="0">
                 <a:solidFill>
                   <a:srgbClr val="6B7480"/>
                 </a:solidFill>
@@ -3393,7 +3398,7 @@
               </a:rPr>
               <a:t>Isolation (L30) stops two students racing for the last seat.</a:t>
             </a:r>
-            <a:endParaRPr lang="en-US" sz="1050" dirty="0"/>
+            <a:endParaRPr lang="en-US" sz="1800" dirty="0"/>
           </a:p>
         </p:txBody>
       </p:sp>
@@ -3405,7 +3410,7 @@
         </p:nvSpPr>
         <p:spPr>
           <a:xfrm>
-            <a:off x="7787640" y="3474720"/>
+            <a:off x="7787640" y="3680460"/>
             <a:ext cx="411480" cy="0"/>
           </a:xfrm>
           <a:prstGeom prst="line">
@@ -3430,7 +3435,7 @@
         <p:spPr>
           <a:xfrm>
             <a:off x="8199120" y="2514600"/>
-            <a:ext cx="3413760" cy="1920240"/>
+            <a:ext cx="3413760" cy="2331720"/>
           </a:xfrm>
           <a:prstGeom prst="roundRect">
             <a:avLst>
@@ -3500,7 +3505,7 @@
               <a:buNone/>
             </a:pPr>
             <a:r>
-              <a:rPr lang="en-US" sz="1350" b="1" dirty="0">
+              <a:rPr lang="en-US" sz="2000" b="1" dirty="0">
                 <a:solidFill>
                   <a:srgbClr val="1F2429"/>
                 </a:solidFill>
@@ -3510,7 +3515,7 @@
               </a:rPr>
               <a:t>COMMIT</a:t>
             </a:r>
-            <a:endParaRPr lang="en-US" sz="1350" dirty="0"/>
+            <a:endParaRPr lang="en-US" sz="2000" dirty="0"/>
           </a:p>
         </p:txBody>
       </p:sp>
@@ -3523,7 +3528,7 @@
         <p:spPr>
           <a:xfrm>
             <a:off x="8345424" y="3518611"/>
-            <a:ext cx="3121152" cy="806501"/>
+            <a:ext cx="3121152" cy="1100000"/>
           </a:xfrm>
           <a:prstGeom prst="rect">
             <a:avLst/>
@@ -3542,7 +3547,7 @@
               <a:buNone/>
             </a:pPr>
             <a:r>
-              <a:rPr lang="en-US" sz="1050" dirty="0">
+              <a:rPr lang="en-US" sz="1800" dirty="0">
                 <a:solidFill>
                   <a:srgbClr val="6B7480"/>
                 </a:solidFill>
@@ -3552,7 +3557,7 @@
               </a:rPr>
               <a:t>Durability (L31) guarantees this survives any later crash.</a:t>
             </a:r>
-            <a:endParaRPr lang="en-US" sz="1050" dirty="0"/>
+            <a:endParaRPr lang="en-US" sz="1800" dirty="0"/>
           </a:p>
         </p:txBody>
       </p:sp>
@@ -3564,7 +3569,7 @@
         </p:nvSpPr>
         <p:spPr>
           <a:xfrm>
-            <a:off x="548640" y="4709160"/>
+            <a:off x="548640" y="5074920"/>
             <a:ext cx="11064240" cy="914400"/>
           </a:xfrm>
           <a:prstGeom prst="rect">
@@ -3584,7 +3589,7 @@
               <a:buNone/>
             </a:pPr>
             <a:r>
-              <a:rPr lang="en-US" sz="1300" i="1" dirty="0">
+              <a:rPr lang="en-US" sz="1800" i="1" dirty="0">
                 <a:solidFill>
                   <a:srgbClr val="6B7480"/>
                 </a:solidFill>
@@ -3594,7 +3599,7 @@
               </a:rPr>
               <a:t>This is exactly Lecture 29's bank-transfer pattern, Lecture 30's concurrency control preventing a lost-seat race, and Lecture 31's recovery manager guaranteeing durability — applied to a single enrollment.</a:t>
             </a:r>
-            <a:endParaRPr lang="en-US" sz="1300" dirty="0"/>
+            <a:endParaRPr lang="en-US" sz="1800" dirty="0"/>
           </a:p>
         </p:txBody>
       </p:sp>
@@ -3702,7 +3707,7 @@
                 <a:ea typeface="Calibri" pitchFamily="34" charset="-122"/>
                 <a:cs typeface="Calibri" pitchFamily="34" charset="-120"/>
               </a:rPr>
-              <a:t>The Whole Course, as One Thread</a:t>
+              <a:t>The Whole Course, as One Thread (Part 1 of 2)</a:t>
             </a:r>
             <a:endParaRPr lang="en-US" sz="2500" dirty="0"/>
           </a:p>
@@ -3733,7 +3738,7 @@
               <a:buNone/>
             </a:pPr>
             <a:r>
-              <a:rPr lang="en-US" sz="1000" u="sng" dirty="0">
+              <a:rPr lang="en-US" sz="1200" u="sng" dirty="0">
                 <a:solidFill>
                   <a:srgbClr val="8A939B"/>
                 </a:solidFill>
@@ -3754,7 +3759,7 @@
               <a:buNone/>
             </a:pPr>
             <a:r>
-              <a:rPr lang="en-US" sz="1000" dirty="0">
+              <a:rPr lang="en-US" sz="1200" dirty="0">
                 <a:solidFill>
                   <a:srgbClr val="8A939B"/>
                 </a:solidFill>
@@ -3762,9 +3767,9 @@
                 <a:ea typeface="Calibri" pitchFamily="34" charset="-122"/>
                 <a:cs typeface="Calibri" pitchFamily="34" charset="-120"/>
               </a:rPr>
-              <a:t>  ·  12</a:t>
-            </a:r>
-            <a:endParaRPr lang="en-US" sz="1000" dirty="0"/>
+              <a:t>  ·  14</a:t>
+            </a:r>
+            <a:endParaRPr lang="en-US" sz="1200" dirty="0"/>
           </a:p>
         </p:txBody>
       </p:sp>
@@ -3777,7 +3782,7 @@
         <p:spPr>
           <a:xfrm>
             <a:off x="731520" y="1325880"/>
-            <a:ext cx="10698480" cy="608076"/>
+            <a:ext cx="10698480" cy="1300000"/>
           </a:xfrm>
           <a:prstGeom prst="roundRect">
             <a:avLst>
@@ -3804,7 +3809,7 @@
         <p:spPr>
           <a:xfrm>
             <a:off x="731520" y="1325880"/>
-            <a:ext cx="91440" cy="608076"/>
+            <a:ext cx="91440" cy="1300000"/>
           </a:xfrm>
           <a:prstGeom prst="rect">
             <a:avLst/>
@@ -3824,7 +3829,7 @@
         <p:spPr>
           <a:xfrm>
             <a:off x="1051560" y="1371600"/>
-            <a:ext cx="4114800" cy="516636"/>
+            <a:ext cx="4114800" cy="1208560"/>
           </a:xfrm>
           <a:prstGeom prst="rect">
             <a:avLst/>
@@ -3840,7 +3845,7 @@
               <a:buNone/>
             </a:pPr>
             <a:r>
-              <a:rPr lang="en-US" sz="1200" b="1" dirty="0">
+              <a:rPr lang="en-US" sz="2000" b="1" dirty="0">
                 <a:solidFill>
                   <a:srgbClr val="1F2429"/>
                 </a:solidFill>
@@ -3850,7 +3855,7 @@
               </a:rPr>
               <a:t>Unit 1 — Foundations</a:t>
             </a:r>
-            <a:endParaRPr lang="en-US" sz="1200" dirty="0"/>
+            <a:endParaRPr lang="en-US" sz="2000" dirty="0"/>
           </a:p>
         </p:txBody>
       </p:sp>
@@ -3863,7 +3868,7 @@
         <p:spPr>
           <a:xfrm>
             <a:off x="5257800" y="1371600"/>
-            <a:ext cx="6035040" cy="516636"/>
+            <a:ext cx="6035040" cy="1208560"/>
           </a:xfrm>
           <a:prstGeom prst="rect">
             <a:avLst/>
@@ -3879,7 +3884,7 @@
               <a:buNone/>
             </a:pPr>
             <a:r>
-              <a:rPr lang="en-US" sz="1050" dirty="0">
+              <a:rPr lang="en-US" sz="1800" dirty="0">
                 <a:solidFill>
                   <a:srgbClr val="6B7480"/>
                 </a:solidFill>
@@ -3889,7 +3894,7 @@
               </a:rPr>
               <a:t>A DBMS, not loose files, manages Student and Course data</a:t>
             </a:r>
-            <a:endParaRPr lang="en-US" sz="1050" dirty="0"/>
+            <a:endParaRPr lang="en-US" sz="1800" dirty="0"/>
           </a:p>
         </p:txBody>
       </p:sp>
@@ -3901,8 +3906,8 @@
         </p:nvSpPr>
         <p:spPr>
           <a:xfrm>
-            <a:off x="731520" y="1979676"/>
-            <a:ext cx="10698480" cy="608076"/>
+            <a:off x="731520" y="2808760"/>
+            <a:ext cx="10698480" cy="1300000"/>
           </a:xfrm>
           <a:prstGeom prst="roundRect">
             <a:avLst>
@@ -3928,8 +3933,8 @@
         </p:nvSpPr>
         <p:spPr>
           <a:xfrm>
-            <a:off x="731520" y="1979676"/>
-            <a:ext cx="91440" cy="608076"/>
+            <a:off x="731520" y="2808760"/>
+            <a:ext cx="91440" cy="1300000"/>
           </a:xfrm>
           <a:prstGeom prst="rect">
             <a:avLst/>
@@ -3948,8 +3953,8 @@
         </p:nvSpPr>
         <p:spPr>
           <a:xfrm>
-            <a:off x="1051560" y="2025396"/>
-            <a:ext cx="4114800" cy="516636"/>
+            <a:off x="1051560" y="2854480"/>
+            <a:ext cx="4114800" cy="1208560"/>
           </a:xfrm>
           <a:prstGeom prst="rect">
             <a:avLst/>
@@ -3965,7 +3970,7 @@
               <a:buNone/>
             </a:pPr>
             <a:r>
-              <a:rPr lang="en-US" sz="1200" b="1" dirty="0">
+              <a:rPr lang="en-US" sz="1800" b="1" dirty="0">
                 <a:solidFill>
                   <a:srgbClr val="1F2429"/>
                 </a:solidFill>
@@ -3975,7 +3980,7 @@
               </a:rPr>
               <a:t>Units 2–3 — Relational Model, Algebra &amp; Calculus</a:t>
             </a:r>
-            <a:endParaRPr lang="en-US" sz="1200" dirty="0"/>
+            <a:endParaRPr lang="en-US" sz="1800" dirty="0"/>
           </a:p>
         </p:txBody>
       </p:sp>
@@ -3987,8 +3992,8 @@
         </p:nvSpPr>
         <p:spPr>
           <a:xfrm>
-            <a:off x="5257800" y="2025396"/>
-            <a:ext cx="6035040" cy="516636"/>
+            <a:off x="5257800" y="2854480"/>
+            <a:ext cx="6035040" cy="1208560"/>
           </a:xfrm>
           <a:prstGeom prst="rect">
             <a:avLst/>
@@ -4004,7 +4009,7 @@
               <a:buNone/>
             </a:pPr>
             <a:r>
-              <a:rPr lang="en-US" sz="1050" dirty="0">
+              <a:rPr lang="en-US" sz="1800" dirty="0">
                 <a:solidFill>
                   <a:srgbClr val="6B7480"/>
                 </a:solidFill>
@@ -4014,7 +4019,7 @@
               </a:rPr>
               <a:t>Data lives in constrained relations; queries are composed operators over them</a:t>
             </a:r>
-            <a:endParaRPr lang="en-US" sz="1050" dirty="0"/>
+            <a:endParaRPr lang="en-US" sz="1800" dirty="0"/>
           </a:p>
         </p:txBody>
       </p:sp>
@@ -4026,8 +4031,8 @@
         </p:nvSpPr>
         <p:spPr>
           <a:xfrm>
-            <a:off x="731520" y="2633472"/>
-            <a:ext cx="10698480" cy="608076"/>
+            <a:off x="731520" y="4291640"/>
+            <a:ext cx="10698480" cy="1300000"/>
           </a:xfrm>
           <a:prstGeom prst="roundRect">
             <a:avLst>
@@ -4053,8 +4058,8 @@
         </p:nvSpPr>
         <p:spPr>
           <a:xfrm>
-            <a:off x="731520" y="2633472"/>
-            <a:ext cx="91440" cy="608076"/>
+            <a:off x="731520" y="4291640"/>
+            <a:ext cx="91440" cy="1300000"/>
           </a:xfrm>
           <a:prstGeom prst="rect">
             <a:avLst/>
@@ -4073,8 +4078,8 @@
         </p:nvSpPr>
         <p:spPr>
           <a:xfrm>
-            <a:off x="1051560" y="2679192"/>
-            <a:ext cx="4114800" cy="516636"/>
+            <a:off x="1051560" y="4337360"/>
+            <a:ext cx="4114800" cy="1208560"/>
           </a:xfrm>
           <a:prstGeom prst="rect">
             <a:avLst/>
@@ -4090,7 +4095,7 @@
               <a:buNone/>
             </a:pPr>
             <a:r>
-              <a:rPr lang="en-US" sz="1200" b="1" dirty="0">
+              <a:rPr lang="en-US" sz="2000" b="1" dirty="0">
                 <a:solidFill>
                   <a:srgbClr val="1F2429"/>
                 </a:solidFill>
@@ -4100,7 +4105,7 @@
               </a:rPr>
               <a:t>Unit 4 — ER/EER Modeling</a:t>
             </a:r>
-            <a:endParaRPr lang="en-US" sz="1200" dirty="0"/>
+            <a:endParaRPr lang="en-US" sz="2000" dirty="0"/>
           </a:p>
         </p:txBody>
       </p:sp>
@@ -4112,8 +4117,8 @@
         </p:nvSpPr>
         <p:spPr>
           <a:xfrm>
-            <a:off x="5257800" y="2679192"/>
-            <a:ext cx="6035040" cy="516636"/>
+            <a:off x="5257800" y="4337360"/>
+            <a:ext cx="6035040" cy="1208560"/>
           </a:xfrm>
           <a:prstGeom prst="rect">
             <a:avLst/>
@@ -4129,7 +4134,7 @@
               <a:buNone/>
             </a:pPr>
             <a:r>
-              <a:rPr lang="en-US" sz="1050" dirty="0">
+              <a:rPr lang="en-US" sz="1800" dirty="0">
                 <a:solidFill>
                   <a:srgbClr val="6B7480"/>
                 </a:solidFill>
@@ -4139,507 +4144,7 @@
               </a:rPr>
               <a:t>Student —Enrolls(M:N)— Course, modeled conceptually first</a:t>
             </a:r>
-            <a:endParaRPr lang="en-US" sz="1050" dirty="0"/>
-          </a:p>
-        </p:txBody>
-      </p:sp>
-      <p:sp>
-        <p:nvSpPr>
-          <p:cNvPr id="17" name="Shape 15"/>
-          <p:cNvSpPr/>
-          <p:nvPr/>
-        </p:nvSpPr>
-        <p:spPr>
-          <a:xfrm>
-            <a:off x="731520" y="3287268"/>
-            <a:ext cx="10698480" cy="608076"/>
-          </a:xfrm>
-          <a:prstGeom prst="roundRect">
-            <a:avLst>
-              <a:gd name="adj" fmla="val 9023"/>
-            </a:avLst>
-          </a:prstGeom>
-          <a:solidFill>
-            <a:srgbClr val="FFFFFF"/>
-          </a:solidFill>
-          <a:ln w="19050">
-            <a:solidFill>
-              <a:srgbClr val="2FE6C4"/>
-            </a:solidFill>
-            <a:prstDash val="solid"/>
-          </a:ln>
-        </p:spPr>
-      </p:sp>
-      <p:sp>
-        <p:nvSpPr>
-          <p:cNvPr id="18" name="Shape 16"/>
-          <p:cNvSpPr/>
-          <p:nvPr/>
-        </p:nvSpPr>
-        <p:spPr>
-          <a:xfrm>
-            <a:off x="731520" y="3287268"/>
-            <a:ext cx="91440" cy="608076"/>
-          </a:xfrm>
-          <a:prstGeom prst="rect">
-            <a:avLst/>
-          </a:prstGeom>
-          <a:solidFill>
-            <a:srgbClr val="2FE6C4"/>
-          </a:solidFill>
-          <a:ln/>
-        </p:spPr>
-      </p:sp>
-      <p:sp>
-        <p:nvSpPr>
-          <p:cNvPr id="19" name="Text 17"/>
-          <p:cNvSpPr txBox="1"/>
-          <p:nvPr/>
-        </p:nvSpPr>
-        <p:spPr>
-          <a:xfrm>
-            <a:off x="1051560" y="3332988"/>
-            <a:ext cx="4114800" cy="516636"/>
-          </a:xfrm>
-          <a:prstGeom prst="rect">
-            <a:avLst/>
-          </a:prstGeom>
-          <a:noFill/>
-          <a:ln/>
-        </p:spPr>
-        <p:txBody>
-          <a:bodyPr wrap="square" rtlCol="0" anchor="ctr"/>
-          <a:lstStyle/>
-          <a:p>
-            <a:pPr indent="0" marL="0">
-              <a:buNone/>
-            </a:pPr>
-            <a:r>
-              <a:rPr lang="en-US" sz="1200" b="1" dirty="0">
-                <a:solidFill>
-                  <a:srgbClr val="1F2429"/>
-                </a:solidFill>
-                <a:latin typeface="Calibri" pitchFamily="34" charset="0"/>
-                <a:ea typeface="Calibri" pitchFamily="34" charset="-122"/>
-                <a:cs typeface="Calibri" pitchFamily="34" charset="-120"/>
-              </a:rPr>
-              <a:t>Unit 5 — Normalization</a:t>
-            </a:r>
-            <a:endParaRPr lang="en-US" sz="1200" dirty="0"/>
-          </a:p>
-        </p:txBody>
-      </p:sp>
-      <p:sp>
-        <p:nvSpPr>
-          <p:cNvPr id="20" name="Text 18"/>
-          <p:cNvSpPr txBox="1"/>
-          <p:nvPr/>
-        </p:nvSpPr>
-        <p:spPr>
-          <a:xfrm>
-            <a:off x="5257800" y="3332988"/>
-            <a:ext cx="6035040" cy="516636"/>
-          </a:xfrm>
-          <a:prstGeom prst="rect">
-            <a:avLst/>
-          </a:prstGeom>
-          <a:noFill/>
-          <a:ln/>
-        </p:spPr>
-        <p:txBody>
-          <a:bodyPr wrap="square" rtlCol="0" anchor="ctr"/>
-          <a:lstStyle/>
-          <a:p>
-            <a:pPr indent="0" marL="0">
-              <a:buNone/>
-            </a:pPr>
-            <a:r>
-              <a:rPr lang="en-US" sz="1050" dirty="0">
-                <a:solidFill>
-                  <a:srgbClr val="6B7480"/>
-                </a:solidFill>
-                <a:latin typeface="Calibri" pitchFamily="34" charset="0"/>
-                <a:ea typeface="Calibri" pitchFamily="34" charset="-122"/>
-                <a:cs typeface="Calibri" pitchFamily="34" charset="-120"/>
-              </a:rPr>
-              <a:t>The M:N relationship becomes its own redundancy-free Enrollment table</a:t>
-            </a:r>
-            <a:endParaRPr lang="en-US" sz="1050" dirty="0"/>
-          </a:p>
-        </p:txBody>
-      </p:sp>
-      <p:sp>
-        <p:nvSpPr>
-          <p:cNvPr id="21" name="Shape 19"/>
-          <p:cNvSpPr/>
-          <p:nvPr/>
-        </p:nvSpPr>
-        <p:spPr>
-          <a:xfrm>
-            <a:off x="731520" y="3941064"/>
-            <a:ext cx="10698480" cy="608076"/>
-          </a:xfrm>
-          <a:prstGeom prst="roundRect">
-            <a:avLst>
-              <a:gd name="adj" fmla="val 9023"/>
-            </a:avLst>
-          </a:prstGeom>
-          <a:solidFill>
-            <a:srgbClr val="FFFFFF"/>
-          </a:solidFill>
-          <a:ln w="19050">
-            <a:solidFill>
-              <a:srgbClr val="8B7FD9"/>
-            </a:solidFill>
-            <a:prstDash val="solid"/>
-          </a:ln>
-        </p:spPr>
-      </p:sp>
-      <p:sp>
-        <p:nvSpPr>
-          <p:cNvPr id="22" name="Shape 20"/>
-          <p:cNvSpPr/>
-          <p:nvPr/>
-        </p:nvSpPr>
-        <p:spPr>
-          <a:xfrm>
-            <a:off x="731520" y="3941064"/>
-            <a:ext cx="91440" cy="608076"/>
-          </a:xfrm>
-          <a:prstGeom prst="rect">
-            <a:avLst/>
-          </a:prstGeom>
-          <a:solidFill>
-            <a:srgbClr val="8B7FD9"/>
-          </a:solidFill>
-          <a:ln/>
-        </p:spPr>
-      </p:sp>
-      <p:sp>
-        <p:nvSpPr>
-          <p:cNvPr id="23" name="Text 21"/>
-          <p:cNvSpPr txBox="1"/>
-          <p:nvPr/>
-        </p:nvSpPr>
-        <p:spPr>
-          <a:xfrm>
-            <a:off x="1051560" y="3986784"/>
-            <a:ext cx="4114800" cy="516636"/>
-          </a:xfrm>
-          <a:prstGeom prst="rect">
-            <a:avLst/>
-          </a:prstGeom>
-          <a:noFill/>
-          <a:ln/>
-        </p:spPr>
-        <p:txBody>
-          <a:bodyPr wrap="square" rtlCol="0" anchor="ctr"/>
-          <a:lstStyle/>
-          <a:p>
-            <a:pPr indent="0" marL="0">
-              <a:buNone/>
-            </a:pPr>
-            <a:r>
-              <a:rPr lang="en-US" sz="1200" b="1" dirty="0">
-                <a:solidFill>
-                  <a:srgbClr val="1F2429"/>
-                </a:solidFill>
-                <a:latin typeface="Calibri" pitchFamily="34" charset="0"/>
-                <a:ea typeface="Calibri" pitchFamily="34" charset="-122"/>
-                <a:cs typeface="Calibri" pitchFamily="34" charset="-120"/>
-              </a:rPr>
-              <a:t>Unit 6 — Views, Security, Indexing</a:t>
-            </a:r>
-            <a:endParaRPr lang="en-US" sz="1200" dirty="0"/>
-          </a:p>
-        </p:txBody>
-      </p:sp>
-      <p:sp>
-        <p:nvSpPr>
-          <p:cNvPr id="24" name="Text 22"/>
-          <p:cNvSpPr txBox="1"/>
-          <p:nvPr/>
-        </p:nvSpPr>
-        <p:spPr>
-          <a:xfrm>
-            <a:off x="5257800" y="3986784"/>
-            <a:ext cx="6035040" cy="516636"/>
-          </a:xfrm>
-          <a:prstGeom prst="rect">
-            <a:avLst/>
-          </a:prstGeom>
-          <a:noFill/>
-          <a:ln/>
-        </p:spPr>
-        <p:txBody>
-          <a:bodyPr wrap="square" rtlCol="0" anchor="ctr"/>
-          <a:lstStyle/>
-          <a:p>
-            <a:pPr indent="0" marL="0">
-              <a:buNone/>
-            </a:pPr>
-            <a:r>
-              <a:rPr lang="en-US" sz="1050" dirty="0">
-                <a:solidFill>
-                  <a:srgbClr val="6B7480"/>
-                </a:solidFill>
-                <a:latin typeface="Calibri" pitchFamily="34" charset="0"/>
-                <a:ea typeface="Calibri" pitchFamily="34" charset="-122"/>
-                <a:cs typeface="Calibri" pitchFamily="34" charset="-120"/>
-              </a:rPr>
-              <a:t>A transcript view, access control, and a fast lookup path</a:t>
-            </a:r>
-            <a:endParaRPr lang="en-US" sz="1050" dirty="0"/>
-          </a:p>
-        </p:txBody>
-      </p:sp>
-      <p:sp>
-        <p:nvSpPr>
-          <p:cNvPr id="25" name="Shape 23"/>
-          <p:cNvSpPr/>
-          <p:nvPr/>
-        </p:nvSpPr>
-        <p:spPr>
-          <a:xfrm>
-            <a:off x="731520" y="4594860"/>
-            <a:ext cx="10698480" cy="608076"/>
-          </a:xfrm>
-          <a:prstGeom prst="roundRect">
-            <a:avLst>
-              <a:gd name="adj" fmla="val 9023"/>
-            </a:avLst>
-          </a:prstGeom>
-          <a:solidFill>
-            <a:srgbClr val="FFFFFF"/>
-          </a:solidFill>
-          <a:ln w="19050">
-            <a:solidFill>
-              <a:srgbClr val="E8A33D"/>
-            </a:solidFill>
-            <a:prstDash val="solid"/>
-          </a:ln>
-        </p:spPr>
-      </p:sp>
-      <p:sp>
-        <p:nvSpPr>
-          <p:cNvPr id="26" name="Shape 24"/>
-          <p:cNvSpPr/>
-          <p:nvPr/>
-        </p:nvSpPr>
-        <p:spPr>
-          <a:xfrm>
-            <a:off x="731520" y="4594860"/>
-            <a:ext cx="91440" cy="608076"/>
-          </a:xfrm>
-          <a:prstGeom prst="rect">
-            <a:avLst/>
-          </a:prstGeom>
-          <a:solidFill>
-            <a:srgbClr val="E8A33D"/>
-          </a:solidFill>
-          <a:ln/>
-        </p:spPr>
-      </p:sp>
-      <p:sp>
-        <p:nvSpPr>
-          <p:cNvPr id="27" name="Text 25"/>
-          <p:cNvSpPr txBox="1"/>
-          <p:nvPr/>
-        </p:nvSpPr>
-        <p:spPr>
-          <a:xfrm>
-            <a:off x="1051560" y="4640580"/>
-            <a:ext cx="4114800" cy="516636"/>
-          </a:xfrm>
-          <a:prstGeom prst="rect">
-            <a:avLst/>
-          </a:prstGeom>
-          <a:noFill/>
-          <a:ln/>
-        </p:spPr>
-        <p:txBody>
-          <a:bodyPr wrap="square" rtlCol="0" anchor="ctr"/>
-          <a:lstStyle/>
-          <a:p>
-            <a:pPr indent="0" marL="0">
-              <a:buNone/>
-            </a:pPr>
-            <a:r>
-              <a:rPr lang="en-US" sz="1200" b="1" dirty="0">
-                <a:solidFill>
-                  <a:srgbClr val="1F2429"/>
-                </a:solidFill>
-                <a:latin typeface="Calibri" pitchFamily="34" charset="0"/>
-                <a:ea typeface="Calibri" pitchFamily="34" charset="-122"/>
-                <a:cs typeface="Calibri" pitchFamily="34" charset="-120"/>
-              </a:rPr>
-              <a:t>Unit 7 — NoSQL Contrast</a:t>
-            </a:r>
-            <a:endParaRPr lang="en-US" sz="1200" dirty="0"/>
-          </a:p>
-        </p:txBody>
-      </p:sp>
-      <p:sp>
-        <p:nvSpPr>
-          <p:cNvPr id="28" name="Text 26"/>
-          <p:cNvSpPr txBox="1"/>
-          <p:nvPr/>
-        </p:nvSpPr>
-        <p:spPr>
-          <a:xfrm>
-            <a:off x="5257800" y="4640580"/>
-            <a:ext cx="6035040" cy="516636"/>
-          </a:xfrm>
-          <a:prstGeom prst="rect">
-            <a:avLst/>
-          </a:prstGeom>
-          <a:noFill/>
-          <a:ln/>
-        </p:spPr>
-        <p:txBody>
-          <a:bodyPr wrap="square" rtlCol="0" anchor="ctr"/>
-          <a:lstStyle/>
-          <a:p>
-            <a:pPr indent="0" marL="0">
-              <a:buNone/>
-            </a:pPr>
-            <a:r>
-              <a:rPr lang="en-US" sz="1050" dirty="0">
-                <a:solidFill>
-                  <a:srgbClr val="6B7480"/>
-                </a:solidFill>
-                <a:latin typeface="Calibri" pitchFamily="34" charset="0"/>
-                <a:ea typeface="Calibri" pitchFamily="34" charset="-122"/>
-                <a:cs typeface="Calibri" pitchFamily="34" charset="-120"/>
-              </a:rPr>
-              <a:t>The same data, deliberately denormalized, for a different access pattern</a:t>
-            </a:r>
-            <a:endParaRPr lang="en-US" sz="1050" dirty="0"/>
-          </a:p>
-        </p:txBody>
-      </p:sp>
-      <p:sp>
-        <p:nvSpPr>
-          <p:cNvPr id="29" name="Shape 27"/>
-          <p:cNvSpPr/>
-          <p:nvPr/>
-        </p:nvSpPr>
-        <p:spPr>
-          <a:xfrm>
-            <a:off x="731520" y="5248656"/>
-            <a:ext cx="10698480" cy="608076"/>
-          </a:xfrm>
-          <a:prstGeom prst="roundRect">
-            <a:avLst>
-              <a:gd name="adj" fmla="val 9023"/>
-            </a:avLst>
-          </a:prstGeom>
-          <a:solidFill>
-            <a:srgbClr val="FFFFFF"/>
-          </a:solidFill>
-          <a:ln w="19050">
-            <a:solidFill>
-              <a:srgbClr val="2FE6C4"/>
-            </a:solidFill>
-            <a:prstDash val="solid"/>
-          </a:ln>
-        </p:spPr>
-      </p:sp>
-      <p:sp>
-        <p:nvSpPr>
-          <p:cNvPr id="30" name="Shape 28"/>
-          <p:cNvSpPr/>
-          <p:nvPr/>
-        </p:nvSpPr>
-        <p:spPr>
-          <a:xfrm>
-            <a:off x="731520" y="5248656"/>
-            <a:ext cx="91440" cy="608076"/>
-          </a:xfrm>
-          <a:prstGeom prst="rect">
-            <a:avLst/>
-          </a:prstGeom>
-          <a:solidFill>
-            <a:srgbClr val="2FE6C4"/>
-          </a:solidFill>
-          <a:ln/>
-        </p:spPr>
-      </p:sp>
-      <p:sp>
-        <p:nvSpPr>
-          <p:cNvPr id="31" name="Text 29"/>
-          <p:cNvSpPr txBox="1"/>
-          <p:nvPr/>
-        </p:nvSpPr>
-        <p:spPr>
-          <a:xfrm>
-            <a:off x="1051560" y="5294376"/>
-            <a:ext cx="4114800" cy="516636"/>
-          </a:xfrm>
-          <a:prstGeom prst="rect">
-            <a:avLst/>
-          </a:prstGeom>
-          <a:noFill/>
-          <a:ln/>
-        </p:spPr>
-        <p:txBody>
-          <a:bodyPr wrap="square" rtlCol="0" anchor="ctr"/>
-          <a:lstStyle/>
-          <a:p>
-            <a:pPr indent="0" marL="0">
-              <a:buNone/>
-            </a:pPr>
-            <a:r>
-              <a:rPr lang="en-US" sz="1200" b="1" dirty="0">
-                <a:solidFill>
-                  <a:srgbClr val="1F2429"/>
-                </a:solidFill>
-                <a:latin typeface="Calibri" pitchFamily="34" charset="0"/>
-                <a:ea typeface="Calibri" pitchFamily="34" charset="-122"/>
-                <a:cs typeface="Calibri" pitchFamily="34" charset="-120"/>
-              </a:rPr>
-              <a:t>Unit 8 — Transactions</a:t>
-            </a:r>
-            <a:endParaRPr lang="en-US" sz="1200" dirty="0"/>
-          </a:p>
-        </p:txBody>
-      </p:sp>
-      <p:sp>
-        <p:nvSpPr>
-          <p:cNvPr id="32" name="Text 30"/>
-          <p:cNvSpPr txBox="1"/>
-          <p:nvPr/>
-        </p:nvSpPr>
-        <p:spPr>
-          <a:xfrm>
-            <a:off x="5257800" y="5294376"/>
-            <a:ext cx="6035040" cy="516636"/>
-          </a:xfrm>
-          <a:prstGeom prst="rect">
-            <a:avLst/>
-          </a:prstGeom>
-          <a:noFill/>
-          <a:ln/>
-        </p:spPr>
-        <p:txBody>
-          <a:bodyPr wrap="square" rtlCol="0" anchor="ctr"/>
-          <a:lstStyle/>
-          <a:p>
-            <a:pPr indent="0" marL="0">
-              <a:buNone/>
-            </a:pPr>
-            <a:r>
-              <a:rPr lang="en-US" sz="1050" dirty="0">
-                <a:solidFill>
-                  <a:srgbClr val="6B7480"/>
-                </a:solidFill>
-                <a:latin typeface="Calibri" pitchFamily="34" charset="0"/>
-                <a:ea typeface="Calibri" pitchFamily="34" charset="-122"/>
-                <a:cs typeface="Calibri" pitchFamily="34" charset="-120"/>
-              </a:rPr>
-              <a:t>Every write to this data, wrapped in ACID guarantees</a:t>
-            </a:r>
-            <a:endParaRPr lang="en-US" sz="1050" dirty="0"/>
+            <a:endParaRPr lang="en-US" sz="1800" dirty="0"/>
           </a:p>
         </p:txBody>
       </p:sp>
@@ -4708,7 +4213,7 @@
                 <a:ea typeface="Calibri" pitchFamily="34" charset="-122"/>
                 <a:cs typeface="Calibri" pitchFamily="34" charset="-120"/>
               </a:rPr>
-              <a:t>THREE NATURAL DIRECTIONS</a:t>
+              <a:t>NATURAL DIRECTION 1 OF 3</a:t>
             </a:r>
             <a:endParaRPr lang="en-US" sz="1200" dirty="0"/>
           </a:p>
@@ -4747,7 +4252,7 @@
                 <a:ea typeface="Calibri" pitchFamily="34" charset="-122"/>
                 <a:cs typeface="Calibri" pitchFamily="34" charset="-120"/>
               </a:rPr>
-              <a:t>Where This Leads Next</a:t>
+              <a:t>Where This Leads Next: Distributed Databases</a:t>
             </a:r>
             <a:endParaRPr lang="en-US" sz="2500" dirty="0"/>
           </a:p>
@@ -4778,7 +4283,7 @@
               <a:buNone/>
             </a:pPr>
             <a:r>
-              <a:rPr lang="en-US" sz="1000" u="sng" dirty="0">
+              <a:rPr lang="en-US" sz="1200" u="sng" dirty="0">
                 <a:solidFill>
                   <a:srgbClr val="8A939B"/>
                 </a:solidFill>
@@ -4799,7 +4304,7 @@
               <a:buNone/>
             </a:pPr>
             <a:r>
-              <a:rPr lang="en-US" sz="1000" dirty="0">
+              <a:rPr lang="en-US" sz="1200" dirty="0">
                 <a:solidFill>
                   <a:srgbClr val="8A939B"/>
                 </a:solidFill>
@@ -4807,9 +4312,9 @@
                 <a:ea typeface="Calibri" pitchFamily="34" charset="-122"/>
                 <a:cs typeface="Calibri" pitchFamily="34" charset="-120"/>
               </a:rPr>
-              <a:t>  ·  13</a:t>
-            </a:r>
-            <a:endParaRPr lang="en-US" sz="1000" dirty="0"/>
+              <a:t>  ·  16</a:t>
+            </a:r>
+            <a:endParaRPr lang="en-US" sz="1200" dirty="0"/>
           </a:p>
         </p:txBody>
       </p:sp>
@@ -4838,7 +4343,7 @@
               <a:buNone/>
             </a:pPr>
             <a:r>
-              <a:rPr lang="en-US" sz="1400" dirty="0">
+              <a:rPr lang="en-US" sz="1800" dirty="0">
                 <a:solidFill>
                   <a:srgbClr val="1F2429"/>
                 </a:solidFill>
@@ -4848,7 +4353,7 @@
               </a:rPr>
               <a:t>This course deliberately stopped at a single DBMS instance, serving requests one transaction at a time (however concurrently).</a:t>
             </a:r>
-            <a:endParaRPr lang="en-US" sz="1400" dirty="0"/>
+            <a:endParaRPr lang="en-US" sz="1800" dirty="0"/>
           </a:p>
         </p:txBody>
       </p:sp>
@@ -4860,8 +4365,8 @@
         </p:nvSpPr>
         <p:spPr>
           <a:xfrm>
-            <a:off x="548640" y="2011680"/>
-            <a:ext cx="3474720" cy="3931920"/>
+            <a:off x="548640" y="2194560"/>
+            <a:ext cx="11064240" cy="3749040"/>
           </a:xfrm>
           <a:prstGeom prst="roundRect">
             <a:avLst>
@@ -4894,7 +4399,7 @@
         </p:nvSpPr>
         <p:spPr>
           <a:xfrm>
-            <a:off x="713232" y="2157984"/>
+            <a:off x="713232" y="2340864"/>
             <a:ext cx="201168" cy="201168"/>
           </a:xfrm>
           <a:prstGeom prst="ellipse">
@@ -4914,8 +4419,8 @@
         </p:nvSpPr>
         <p:spPr>
           <a:xfrm>
-            <a:off x="1005840" y="2103120"/>
-            <a:ext cx="2834640" cy="365760"/>
+            <a:off x="1005840" y="2286000"/>
+            <a:ext cx="10149840" cy="365760"/>
           </a:xfrm>
           <a:prstGeom prst="rect">
             <a:avLst/>
@@ -4931,7 +4436,7 @@
               <a:buNone/>
             </a:pPr>
             <a:r>
-              <a:rPr lang="en-US" sz="1350" b="1" dirty="0">
+              <a:rPr lang="en-US" sz="2000" b="1" dirty="0">
                 <a:solidFill>
                   <a:srgbClr val="1F2429"/>
                 </a:solidFill>
@@ -4941,7 +4446,7 @@
               </a:rPr>
               <a:t>Distributed Databases</a:t>
             </a:r>
-            <a:endParaRPr lang="en-US" sz="1350" dirty="0"/>
+            <a:endParaRPr lang="en-US" sz="2000" dirty="0"/>
           </a:p>
         </p:txBody>
       </p:sp>
@@ -4953,8 +4458,8 @@
         </p:nvSpPr>
         <p:spPr>
           <a:xfrm>
-            <a:off x="749808" y="2514600"/>
-            <a:ext cx="3072384" cy="3337560"/>
+            <a:off x="749808" y="2697480"/>
+            <a:ext cx="10661904" cy="3200000"/>
           </a:xfrm>
           <a:prstGeom prst="rect">
             <a:avLst/>
@@ -4973,7 +4478,7 @@
               <a:buNone/>
             </a:pPr>
             <a:r>
-              <a:rPr lang="en-US" sz="1050" dirty="0">
+              <a:rPr lang="en-US" sz="1800" dirty="0">
                 <a:solidFill>
                   <a:srgbClr val="6B7480"/>
                 </a:solidFill>
@@ -4983,277 +4488,7 @@
               </a:rPr>
               <a:t>What happens when data is spread across multiple machines, and a transaction might update rows on two at once — needing its own version of Atomicity and Isolation, across a network that can partially fail.</a:t>
             </a:r>
-            <a:endParaRPr lang="en-US" sz="1050" dirty="0"/>
-          </a:p>
-        </p:txBody>
-      </p:sp>
-      <p:sp>
-        <p:nvSpPr>
-          <p:cNvPr id="10" name="Shape 8"/>
-          <p:cNvSpPr/>
-          <p:nvPr/>
-        </p:nvSpPr>
-        <p:spPr>
-          <a:xfrm>
-            <a:off x="4343400" y="2011680"/>
-            <a:ext cx="3474720" cy="3931920"/>
-          </a:xfrm>
-          <a:prstGeom prst="roundRect">
-            <a:avLst>
-              <a:gd name="adj" fmla="val 2105"/>
-            </a:avLst>
-          </a:prstGeom>
-          <a:solidFill>
-            <a:srgbClr val="FFFFFF"/>
-          </a:solidFill>
-          <a:ln w="22225">
-            <a:solidFill>
-              <a:srgbClr val="8B7FD9"/>
-            </a:solidFill>
-            <a:prstDash val="solid"/>
-          </a:ln>
-          <a:effectLst>
-            <a:outerShdw sx="100000" sy="100000" kx="0" ky="0" algn="bl" rotWithShape="0" blurRad="63500" dist="25400" dir="5400000">
-              <a:srgbClr val="1F2429">
-                <a:alpha val="15000"/>
-              </a:srgbClr>
-            </a:outerShdw>
-          </a:effectLst>
-        </p:spPr>
-      </p:sp>
-      <p:sp>
-        <p:nvSpPr>
-          <p:cNvPr id="11" name="Shape 9"/>
-          <p:cNvSpPr/>
-          <p:nvPr/>
-        </p:nvSpPr>
-        <p:spPr>
-          <a:xfrm>
-            <a:off x="4507992" y="2157984"/>
-            <a:ext cx="201168" cy="201168"/>
-          </a:xfrm>
-          <a:prstGeom prst="ellipse">
-            <a:avLst/>
-          </a:prstGeom>
-          <a:solidFill>
-            <a:srgbClr val="8B7FD9"/>
-          </a:solidFill>
-          <a:ln/>
-        </p:spPr>
-      </p:sp>
-      <p:sp>
-        <p:nvSpPr>
-          <p:cNvPr id="12" name="Text 10"/>
-          <p:cNvSpPr txBox="1"/>
-          <p:nvPr/>
-        </p:nvSpPr>
-        <p:spPr>
-          <a:xfrm>
-            <a:off x="4800600" y="2103120"/>
-            <a:ext cx="2834640" cy="365760"/>
-          </a:xfrm>
-          <a:prstGeom prst="rect">
-            <a:avLst/>
-          </a:prstGeom>
-          <a:noFill/>
-          <a:ln/>
-        </p:spPr>
-        <p:txBody>
-          <a:bodyPr wrap="square" rtlCol="0" anchor="t"/>
-          <a:lstStyle/>
-          <a:p>
-            <a:pPr indent="0" marL="0">
-              <a:buNone/>
-            </a:pPr>
-            <a:r>
-              <a:rPr lang="en-US" sz="1350" b="1" dirty="0">
-                <a:solidFill>
-                  <a:srgbClr val="1F2429"/>
-                </a:solidFill>
-                <a:latin typeface="Calibri" pitchFamily="34" charset="0"/>
-                <a:ea typeface="Calibri" pitchFamily="34" charset="-122"/>
-                <a:cs typeface="Calibri" pitchFamily="34" charset="-120"/>
-              </a:rPr>
-              <a:t>Data Warehousing &amp; OLAP</a:t>
-            </a:r>
-            <a:endParaRPr lang="en-US" sz="1350" dirty="0"/>
-          </a:p>
-        </p:txBody>
-      </p:sp>
-      <p:sp>
-        <p:nvSpPr>
-          <p:cNvPr id="13" name="Text 11"/>
-          <p:cNvSpPr txBox="1"/>
-          <p:nvPr/>
-        </p:nvSpPr>
-        <p:spPr>
-          <a:xfrm>
-            <a:off x="4544568" y="2514600"/>
-            <a:ext cx="3072384" cy="3337560"/>
-          </a:xfrm>
-          <a:prstGeom prst="rect">
-            <a:avLst/>
-          </a:prstGeom>
-          <a:noFill/>
-          <a:ln/>
-        </p:spPr>
-        <p:txBody>
-          <a:bodyPr wrap="square" rtlCol="0" anchor="t"/>
-          <a:lstStyle/>
-          <a:p>
-            <a:pPr indent="0" marL="0">
-              <a:lnSpc>
-                <a:spcPct val="112000"/>
-              </a:lnSpc>
-              <a:buNone/>
-            </a:pPr>
-            <a:r>
-              <a:rPr lang="en-US" sz="1050" dirty="0">
-                <a:solidFill>
-                  <a:srgbClr val="6B7480"/>
-                </a:solidFill>
-                <a:latin typeface="Calibri" pitchFamily="34" charset="0"/>
-                <a:ea typeface="Calibri" pitchFamily="34" charset="-122"/>
-                <a:cs typeface="Calibri" pitchFamily="34" charset="-120"/>
-              </a:rPr>
-              <a:t>This course's relational model optimized for many small, fast transactions (OLTP); a data warehouse instead optimizes for huge, read-heavy analytical queries across a company's entire history.</a:t>
-            </a:r>
-            <a:endParaRPr lang="en-US" sz="1050" dirty="0"/>
-          </a:p>
-        </p:txBody>
-      </p:sp>
-      <p:sp>
-        <p:nvSpPr>
-          <p:cNvPr id="14" name="Shape 12"/>
-          <p:cNvSpPr/>
-          <p:nvPr/>
-        </p:nvSpPr>
-        <p:spPr>
-          <a:xfrm>
-            <a:off x="8138160" y="2011680"/>
-            <a:ext cx="3474720" cy="3931920"/>
-          </a:xfrm>
-          <a:prstGeom prst="roundRect">
-            <a:avLst>
-              <a:gd name="adj" fmla="val 2105"/>
-            </a:avLst>
-          </a:prstGeom>
-          <a:solidFill>
-            <a:srgbClr val="FFFFFF"/>
-          </a:solidFill>
-          <a:ln w="22225">
-            <a:solidFill>
-              <a:srgbClr val="E8A33D"/>
-            </a:solidFill>
-            <a:prstDash val="solid"/>
-          </a:ln>
-          <a:effectLst>
-            <a:outerShdw sx="100000" sy="100000" kx="0" ky="0" algn="bl" rotWithShape="0" blurRad="63500" dist="25400" dir="5400000">
-              <a:srgbClr val="1F2429">
-                <a:alpha val="15000"/>
-              </a:srgbClr>
-            </a:outerShdw>
-          </a:effectLst>
-        </p:spPr>
-      </p:sp>
-      <p:sp>
-        <p:nvSpPr>
-          <p:cNvPr id="15" name="Shape 13"/>
-          <p:cNvSpPr/>
-          <p:nvPr/>
-        </p:nvSpPr>
-        <p:spPr>
-          <a:xfrm>
-            <a:off x="8302752" y="2157984"/>
-            <a:ext cx="201168" cy="201168"/>
-          </a:xfrm>
-          <a:prstGeom prst="ellipse">
-            <a:avLst/>
-          </a:prstGeom>
-          <a:solidFill>
-            <a:srgbClr val="E8A33D"/>
-          </a:solidFill>
-          <a:ln/>
-        </p:spPr>
-      </p:sp>
-      <p:sp>
-        <p:nvSpPr>
-          <p:cNvPr id="16" name="Text 14"/>
-          <p:cNvSpPr txBox="1"/>
-          <p:nvPr/>
-        </p:nvSpPr>
-        <p:spPr>
-          <a:xfrm>
-            <a:off x="8595360" y="2103120"/>
-            <a:ext cx="2834640" cy="365760"/>
-          </a:xfrm>
-          <a:prstGeom prst="rect">
-            <a:avLst/>
-          </a:prstGeom>
-          <a:noFill/>
-          <a:ln/>
-        </p:spPr>
-        <p:txBody>
-          <a:bodyPr wrap="square" rtlCol="0" anchor="t"/>
-          <a:lstStyle/>
-          <a:p>
-            <a:pPr indent="0" marL="0">
-              <a:buNone/>
-            </a:pPr>
-            <a:r>
-              <a:rPr lang="en-US" sz="1350" b="1" dirty="0">
-                <a:solidFill>
-                  <a:srgbClr val="1F2429"/>
-                </a:solidFill>
-                <a:latin typeface="Calibri" pitchFamily="34" charset="0"/>
-                <a:ea typeface="Calibri" pitchFamily="34" charset="-122"/>
-                <a:cs typeface="Calibri" pitchFamily="34" charset="-120"/>
-              </a:rPr>
-              <a:t>Query Optimization</a:t>
-            </a:r>
-            <a:endParaRPr lang="en-US" sz="1350" dirty="0"/>
-          </a:p>
-        </p:txBody>
-      </p:sp>
-      <p:sp>
-        <p:nvSpPr>
-          <p:cNvPr id="17" name="Text 15"/>
-          <p:cNvSpPr txBox="1"/>
-          <p:nvPr/>
-        </p:nvSpPr>
-        <p:spPr>
-          <a:xfrm>
-            <a:off x="8339328" y="2514600"/>
-            <a:ext cx="3072384" cy="3337560"/>
-          </a:xfrm>
-          <a:prstGeom prst="rect">
-            <a:avLst/>
-          </a:prstGeom>
-          <a:noFill/>
-          <a:ln/>
-        </p:spPr>
-        <p:txBody>
-          <a:bodyPr wrap="square" rtlCol="0" anchor="t"/>
-          <a:lstStyle/>
-          <a:p>
-            <a:pPr indent="0" marL="0">
-              <a:lnSpc>
-                <a:spcPct val="112000"/>
-              </a:lnSpc>
-              <a:buNone/>
-            </a:pPr>
-            <a:r>
-              <a:rPr lang="en-US" sz="1050" dirty="0">
-                <a:solidFill>
-                  <a:srgbClr val="6B7480"/>
-                </a:solidFill>
-                <a:latin typeface="Calibri" pitchFamily="34" charset="0"/>
-                <a:ea typeface="Calibri" pitchFamily="34" charset="-122"/>
-                <a:cs typeface="Calibri" pitchFamily="34" charset="-120"/>
-              </a:rPr>
-              <a:t>Every SQL query this course wrote was silently run through a query optimizer choosing how to execute the relational algebra behind it — which index, which join order.</a:t>
-            </a:r>
-            <a:endParaRPr lang="en-US" sz="1050" dirty="0"/>
+            <a:endParaRPr lang="en-US" sz="1800" dirty="0"/>
           </a:p>
         </p:txBody>
       </p:sp>
@@ -5380,7 +4615,7 @@
               <a:buNone/>
             </a:pPr>
             <a:r>
-              <a:rPr lang="en-US" sz="1400" b="1" spc="200" kern="0" dirty="0">
+              <a:rPr lang="en-US" sz="2000" b="1" spc="200" kern="0" dirty="0">
                 <a:solidFill>
                   <a:srgbClr val="2FE6C4"/>
                 </a:solidFill>
@@ -5390,7 +4625,7 @@
               </a:rPr>
               <a:t>DATABASE SYSTEMS · CSC270</a:t>
             </a:r>
-            <a:endParaRPr lang="en-US" sz="1400" dirty="0"/>
+            <a:endParaRPr lang="en-US" sz="2000" dirty="0"/>
           </a:p>
         </p:txBody>
       </p:sp>
@@ -5461,7 +4696,7 @@
               <a:buNone/>
             </a:pPr>
             <a:r>
-              <a:rPr lang="en-US" sz="1500" dirty="0">
+              <a:rPr lang="en-US" sz="1800" dirty="0">
                 <a:solidFill>
                   <a:srgbClr val="8A939B"/>
                 </a:solidFill>
@@ -5471,7 +4706,7 @@
               </a:rPr>
               <a:t>You started this semester with a question about files and spreadsheets, and built, unit by unit, a complete and rigorous answer: how to model data correctly, prove it's free of redundancy, query it with a composable algebra, secure and speed up access to it, consider a document-based alternative when it fits, and guarantee every change to it is safe — even against concurrent access and outright hardware failure.</a:t>
             </a:r>
-            <a:endParaRPr lang="en-US" sz="1500" dirty="0"/>
+            <a:endParaRPr lang="en-US" sz="1800" dirty="0"/>
           </a:p>
           <a:p>
             <a:pPr algn="ctr" indent="0" marL="0">
@@ -5480,7 +4715,7 @@
               </a:lnSpc>
               <a:buNone/>
             </a:pPr>
-            <a:endParaRPr lang="en-US" sz="1500" dirty="0"/>
+            <a:endParaRPr lang="en-US" sz="1800" dirty="0"/>
           </a:p>
           <a:p>
             <a:pPr algn="ctr" indent="0" marL="0">
@@ -5490,7 +4725,7 @@
               <a:buNone/>
             </a:pPr>
             <a:r>
-              <a:rPr lang="en-US" sz="1500" dirty="0">
+              <a:rPr lang="en-US" sz="1800" dirty="0">
                 <a:solidFill>
                   <a:srgbClr val="8A939B"/>
                 </a:solidFill>
@@ -5500,7 +4735,7 @@
               </a:rPr>
               <a:t>That habit of mind — is this schema modeled correctly, normalized enough, indexed and secured, and every write actually safe — is what this course was built to give you. Congratulations on completing Database Systems.</a:t>
             </a:r>
-            <a:endParaRPr lang="en-US" sz="1500" dirty="0"/>
+            <a:endParaRPr lang="en-US" sz="1800" dirty="0"/>
           </a:p>
         </p:txBody>
       </p:sp>
@@ -5529,7 +4764,7 @@
               <a:buNone/>
             </a:pPr>
             <a:r>
-              <a:rPr lang="en-US" sz="1000" u="sng" dirty="0">
+              <a:rPr lang="en-US" sz="1200" u="sng" dirty="0">
                 <a:solidFill>
                   <a:srgbClr val="8A939B"/>
                 </a:solidFill>
@@ -5550,7 +4785,7 @@
               <a:buNone/>
             </a:pPr>
             <a:r>
-              <a:rPr lang="en-US" sz="1000" dirty="0">
+              <a:rPr lang="en-US" sz="1200" dirty="0">
                 <a:solidFill>
                   <a:srgbClr val="8A939B"/>
                 </a:solidFill>
@@ -5558,9 +4793,2675 @@
                 <a:ea typeface="Calibri" pitchFamily="34" charset="-122"/>
                 <a:cs typeface="Calibri" pitchFamily="34" charset="-120"/>
               </a:rPr>
-              <a:t>  ·  14</a:t>
-            </a:r>
-            <a:endParaRPr lang="en-US" sz="1000" dirty="0"/>
+              <a:t>  ·  19</a:t>
+            </a:r>
+            <a:endParaRPr lang="en-US" sz="1200" dirty="0"/>
+          </a:p>
+        </p:txBody>
+      </p:sp>
+    </p:spTree>
+  </p:cSld>
+  <p:clrMapOvr>
+    <a:masterClrMapping/>
+  </p:clrMapOvr>
+</p:sld>
+</file>
+
+<file path=ppt/slides/slide15.xml><?xml version="1.0" encoding="utf-8"?>
+<p:sld xmlns:a="http://schemas.openxmlformats.org/drawingml/2006/main" xmlns:r="http://schemas.openxmlformats.org/officeDocument/2006/relationships" xmlns:p="http://schemas.openxmlformats.org/presentationml/2006/main">
+  <p:cSld name="Slide 8">
+    <p:bg>
+      <p:bgPr>
+        <a:solidFill>
+          <a:srgbClr val="F7F8F9"/>
+        </a:solidFill>
+      </p:bgPr>
+    </p:bg>
+    <p:spTree>
+      <p:nvGrpSpPr>
+        <p:cNvPr id="1" name=""/>
+        <p:cNvGrpSpPr/>
+        <p:nvPr/>
+      </p:nvGrpSpPr>
+      <p:grpSpPr>
+        <a:xfrm>
+          <a:off x="0" y="0"/>
+          <a:ext cx="0" cy="0"/>
+          <a:chOff x="0" y="0"/>
+          <a:chExt cx="0" cy="0"/>
+        </a:xfrm>
+      </p:grpSpPr>
+      <p:sp>
+        <p:nvSpPr>
+          <p:cNvPr id="2" name="Text 0"/>
+          <p:cNvSpPr txBox="1"/>
+          <p:nvPr/>
+        </p:nvSpPr>
+        <p:spPr>
+          <a:xfrm>
+            <a:off x="548640" y="320040"/>
+            <a:ext cx="9144000" cy="292608"/>
+          </a:xfrm>
+          <a:prstGeom prst="rect">
+            <a:avLst/>
+          </a:prstGeom>
+          <a:noFill/>
+          <a:ln/>
+        </p:spPr>
+        <p:txBody>
+          <a:bodyPr wrap="square" rtlCol="0" anchor="ctr"/>
+          <a:lstStyle/>
+          <a:p>
+            <a:pPr indent="0" marL="0">
+              <a:buNone/>
+            </a:pPr>
+            <a:r>
+              <a:rPr lang="en-US" sz="1200" b="1" spc="150" kern="0" dirty="0">
+                <a:solidFill>
+                  <a:srgbClr val="8B7FD9"/>
+                </a:solidFill>
+                <a:latin typeface="Calibri" pitchFamily="34" charset="0"/>
+                <a:ea typeface="Calibri" pitchFamily="34" charset="-122"/>
+                <a:cs typeface="Calibri" pitchFamily="34" charset="-120"/>
+              </a:rPr>
+              <a:t>LECTURE 18 ONWARD</a:t>
+            </a:r>
+            <a:endParaRPr lang="en-US" sz="1200" dirty="0"/>
+          </a:p>
+        </p:txBody>
+      </p:sp>
+      <p:sp>
+        <p:nvSpPr>
+          <p:cNvPr id="3" name="Text 1"/>
+          <p:cNvSpPr txBox="1"/>
+          <p:nvPr/>
+        </p:nvSpPr>
+        <p:spPr>
+          <a:xfrm>
+            <a:off x="548640" y="566928"/>
+            <a:ext cx="11064240" cy="640080"/>
+          </a:xfrm>
+          <a:prstGeom prst="rect">
+            <a:avLst/>
+          </a:prstGeom>
+          <a:noFill/>
+          <a:ln/>
+        </p:spPr>
+        <p:txBody>
+          <a:bodyPr wrap="square" rtlCol="0" anchor="ctr"/>
+          <a:lstStyle/>
+          <a:p>
+            <a:pPr indent="0" marL="0">
+              <a:buNone/>
+            </a:pPr>
+            <a:r>
+              <a:rPr lang="en-US" sz="2500" b="1" dirty="0">
+                <a:solidFill>
+                  <a:srgbClr val="1F2429"/>
+                </a:solidFill>
+                <a:latin typeface="Calibri" pitchFamily="34" charset="0"/>
+                <a:ea typeface="Calibri" pitchFamily="34" charset="-122"/>
+                <a:cs typeface="Calibri" pitchFamily="34" charset="-120"/>
+              </a:rPr>
+              <a:t>Unit 5 — Normalization, Part 2: The Fix</a:t>
+            </a:r>
+            <a:endParaRPr lang="en-US" sz="2500" dirty="0"/>
+          </a:p>
+        </p:txBody>
+      </p:sp>
+      <p:sp>
+        <p:nvSpPr>
+          <p:cNvPr id="4" name="Text 2"/>
+          <p:cNvSpPr txBox="1"/>
+          <p:nvPr/>
+        </p:nvSpPr>
+        <p:spPr>
+          <a:xfrm>
+            <a:off x="9951415" y="6455664"/>
+            <a:ext cx="2011680" cy="292608"/>
+          </a:xfrm>
+          <a:prstGeom prst="rect">
+            <a:avLst/>
+          </a:prstGeom>
+          <a:noFill/>
+          <a:ln/>
+        </p:spPr>
+        <p:txBody>
+          <a:bodyPr wrap="square" rtlCol="0" anchor="ctr"/>
+          <a:lstStyle/>
+          <a:p>
+            <a:pPr algn="r" indent="0" marL="0">
+              <a:buNone/>
+            </a:pPr>
+            <a:r>
+              <a:rPr lang="en-US" sz="1200" u="sng" dirty="0">
+                <a:solidFill>
+                  <a:srgbClr val="8A939B"/>
+                </a:solidFill>
+                <a:latin typeface="Calibri" pitchFamily="34" charset="0"/>
+                <a:ea typeface="Calibri" pitchFamily="34" charset="-122"/>
+                <a:cs typeface="Calibri" pitchFamily="34" charset="-120"/>
+                <a:hlinkClick r:id="rId1" invalidUrl="" action="" tgtFrame="" tooltip="" history="1" highlightClick="0" endSnd="0">
+                  <a:extLst>
+                    <a:ext uri="{A12FA001-AC4F-418D-AE19-62706E023703}">
+                      <ahyp:hlinkClr xmlns:ahyp="http://schemas.microsoft.com/office/drawing/2018/hyperlinkcolor" val="tx"/>
+                    </a:ext>
+                  </a:extLst>
+                </a:hlinkClick>
+              </a:rPr>
+              <a:t>cuinotes.com</a:t>
+            </a:r>
+            <a:pPr algn="r" indent="0" marL="0">
+              <a:buNone/>
+            </a:pPr>
+            <a:r>
+              <a:rPr lang="en-US" sz="1200" dirty="0">
+                <a:solidFill>
+                  <a:srgbClr val="8A939B"/>
+                </a:solidFill>
+                <a:latin typeface="Calibri" pitchFamily="34" charset="0"/>
+                <a:ea typeface="Calibri" pitchFamily="34" charset="-122"/>
+                <a:cs typeface="Calibri" pitchFamily="34" charset="-120"/>
+              </a:rPr>
+              <a:t>  ·  9</a:t>
+            </a:r>
+            <a:endParaRPr lang="en-US" sz="1200" dirty="0"/>
+          </a:p>
+        </p:txBody>
+      </p:sp>
+      <p:sp>
+        <p:nvSpPr>
+          <p:cNvPr id="8" name="Text 5"/>
+          <p:cNvSpPr txBox="1"/>
+          <p:nvPr/>
+        </p:nvSpPr>
+        <p:spPr>
+          <a:xfrm>
+            <a:off x="548640" y="1325880"/>
+            <a:ext cx="11064240" cy="338328"/>
+          </a:xfrm>
+          <a:prstGeom prst="rect">
+            <a:avLst/>
+          </a:prstGeom>
+          <a:noFill/>
+          <a:ln/>
+        </p:spPr>
+        <p:txBody>
+          <a:bodyPr wrap="square" rtlCol="0" anchor="ctr"/>
+          <a:lstStyle/>
+          <a:p>
+            <a:pPr indent="0" marL="0">
+              <a:buNone/>
+            </a:pPr>
+            <a:r>
+              <a:rPr lang="en-US" sz="1800" b="1" dirty="0">
+                <a:solidFill>
+                  <a:srgbClr val="2FE6C4"/>
+                </a:solidFill>
+                <a:latin typeface="Calibri" pitchFamily="34" charset="0"/>
+                <a:ea typeface="Calibri" pitchFamily="34" charset="-122"/>
+                <a:cs typeface="Calibri" pitchFamily="34" charset="-120"/>
+              </a:rPr>
+              <a:t>3NF — Enrollment references, doesn't repeat</a:t>
+            </a:r>
+            <a:endParaRPr lang="en-US" sz="1800" dirty="0"/>
+          </a:p>
+        </p:txBody>
+      </p:sp>
+      <p:graphicFrame>
+        <p:nvGraphicFramePr>
+          <p:cNvPr id="17" name="Table 1"/>
+          <p:cNvGraphicFramePr>
+            <a:graphicFrameLocks noGrp="1"/>
+          </p:cNvGraphicFramePr>
+          <p:nvPr>
+            <p:extLst>
+              <p:ext uri="{D42A27DB-BD31-4B8C-83A1-F6EECF244321}">
+                <p14:modId xmlns:p14="http://schemas.microsoft.com/office/powerpoint/2010/main" val="1579011935"/>
+              </p:ext>
+            </p:extLst>
+          </p:nvPr>
+        </p:nvGraphicFramePr>
+        <p:xfrm>
+          <a:off x="548640" y="1807368"/>
+          <a:ext cx="11064240" cy="2800000"/>
+        </p:xfrm>
+        <a:graphic>
+          <a:graphicData uri="http://schemas.openxmlformats.org/drawingml/2006/table">
+            <a:tbl>
+              <a:tblPr/>
+              <a:tblGrid>
+                <a:gridCol w="4125649"/>
+                <a:gridCol w="4125649"/>
+                <a:gridCol w="2812942"/>
+              </a:tblGrid>
+              <a:tr h="933333">
+                <a:tc>
+                  <a:txBody>
+                    <a:bodyPr/>
+                    <a:lstStyle/>
+                    <a:p>
+                      <a:pPr algn="l" indent="0" marL="0">
+                        <a:buNone/>
+                      </a:pPr>
+                      <a:r>
+                        <a:rPr lang="en-US" sz="1400" b="1" dirty="0">
+                          <a:solidFill>
+                            <a:srgbClr val="FFFFFF"/>
+                          </a:solidFill>
+                          <a:latin typeface="Calibri" pitchFamily="34" charset="0"/>
+                          <a:ea typeface="Calibri" pitchFamily="34" charset="-122"/>
+                          <a:cs typeface="Calibri" pitchFamily="34" charset="-120"/>
+                        </a:rPr>
+                        <a:t>studentId</a:t>
+                      </a:r>
+                      <a:endParaRPr lang="en-US" sz="1400" dirty="0">
+                        <a:latin typeface="Calibri" charset="0"/>
+                        <a:ea typeface="Calibri" charset="0"/>
+                        <a:cs typeface="Calibri" charset="0"/>
+                      </a:endParaRPr>
+                    </a:p>
+                  </a:txBody>
+                  <a:tcPr marL="91440" marR="91440" marT="45720" marB="45720" anchor="ctr">
+                    <a:lnL w="9525" cap="flat" cmpd="sng" algn="ctr">
+                      <a:solidFill>
+                        <a:srgbClr val="E1E4E8"/>
+                      </a:solidFill>
+                      <a:prstDash val="solid"/>
+                      <a:round/>
+                      <a:headEnd type="none" w="med" len="med"/>
+                      <a:tailEnd type="none" w="med" len="med"/>
+                    </a:lnL>
+                    <a:lnR w="9525" cap="flat" cmpd="sng" algn="ctr">
+                      <a:solidFill>
+                        <a:srgbClr val="E1E4E8"/>
+                      </a:solidFill>
+                      <a:prstDash val="solid"/>
+                      <a:round/>
+                      <a:headEnd type="none" w="med" len="med"/>
+                      <a:tailEnd type="none" w="med" len="med"/>
+                    </a:lnR>
+                    <a:lnT w="9525" cap="flat" cmpd="sng" algn="ctr">
+                      <a:solidFill>
+                        <a:srgbClr val="E1E4E8"/>
+                      </a:solidFill>
+                      <a:prstDash val="solid"/>
+                      <a:round/>
+                      <a:headEnd type="none" w="med" len="med"/>
+                      <a:tailEnd type="none" w="med" len="med"/>
+                    </a:lnT>
+                    <a:lnB w="9525" cap="flat" cmpd="sng" algn="ctr">
+                      <a:solidFill>
+                        <a:srgbClr val="E1E4E8"/>
+                      </a:solidFill>
+                      <a:prstDash val="solid"/>
+                      <a:round/>
+                      <a:headEnd type="none" w="med" len="med"/>
+                      <a:tailEnd type="none" w="med" len="med"/>
+                    </a:lnB>
+                    <a:solidFill>
+                      <a:srgbClr val="0E9E85"/>
+                    </a:solidFill>
+                  </a:tcPr>
+                </a:tc>
+                <a:tc>
+                  <a:txBody>
+                    <a:bodyPr/>
+                    <a:lstStyle/>
+                    <a:p>
+                      <a:pPr algn="l" indent="0" marL="0">
+                        <a:buNone/>
+                      </a:pPr>
+                      <a:r>
+                        <a:rPr lang="en-US" sz="1400" b="1" dirty="0">
+                          <a:solidFill>
+                            <a:srgbClr val="FFFFFF"/>
+                          </a:solidFill>
+                          <a:latin typeface="Calibri" pitchFamily="34" charset="0"/>
+                          <a:ea typeface="Calibri" pitchFamily="34" charset="-122"/>
+                          <a:cs typeface="Calibri" pitchFamily="34" charset="-120"/>
+                        </a:rPr>
+                        <a:t>courseId</a:t>
+                      </a:r>
+                      <a:endParaRPr lang="en-US" sz="1400" dirty="0">
+                        <a:latin typeface="Calibri" charset="0"/>
+                        <a:ea typeface="Calibri" charset="0"/>
+                        <a:cs typeface="Calibri" charset="0"/>
+                      </a:endParaRPr>
+                    </a:p>
+                  </a:txBody>
+                  <a:tcPr marL="91440" marR="91440" marT="45720" marB="45720" anchor="ctr">
+                    <a:lnL w="9525" cap="flat" cmpd="sng" algn="ctr">
+                      <a:solidFill>
+                        <a:srgbClr val="E1E4E8"/>
+                      </a:solidFill>
+                      <a:prstDash val="solid"/>
+                      <a:round/>
+                      <a:headEnd type="none" w="med" len="med"/>
+                      <a:tailEnd type="none" w="med" len="med"/>
+                    </a:lnL>
+                    <a:lnR w="9525" cap="flat" cmpd="sng" algn="ctr">
+                      <a:solidFill>
+                        <a:srgbClr val="E1E4E8"/>
+                      </a:solidFill>
+                      <a:prstDash val="solid"/>
+                      <a:round/>
+                      <a:headEnd type="none" w="med" len="med"/>
+                      <a:tailEnd type="none" w="med" len="med"/>
+                    </a:lnR>
+                    <a:lnT w="9525" cap="flat" cmpd="sng" algn="ctr">
+                      <a:solidFill>
+                        <a:srgbClr val="E1E4E8"/>
+                      </a:solidFill>
+                      <a:prstDash val="solid"/>
+                      <a:round/>
+                      <a:headEnd type="none" w="med" len="med"/>
+                      <a:tailEnd type="none" w="med" len="med"/>
+                    </a:lnT>
+                    <a:lnB w="9525" cap="flat" cmpd="sng" algn="ctr">
+                      <a:solidFill>
+                        <a:srgbClr val="E1E4E8"/>
+                      </a:solidFill>
+                      <a:prstDash val="solid"/>
+                      <a:round/>
+                      <a:headEnd type="none" w="med" len="med"/>
+                      <a:tailEnd type="none" w="med" len="med"/>
+                    </a:lnB>
+                    <a:solidFill>
+                      <a:srgbClr val="0E9E85"/>
+                    </a:solidFill>
+                  </a:tcPr>
+                </a:tc>
+                <a:tc>
+                  <a:txBody>
+                    <a:bodyPr/>
+                    <a:lstStyle/>
+                    <a:p>
+                      <a:pPr algn="l" indent="0" marL="0">
+                        <a:buNone/>
+                      </a:pPr>
+                      <a:r>
+                        <a:rPr lang="en-US" sz="1400" b="1" dirty="0">
+                          <a:solidFill>
+                            <a:srgbClr val="FFFFFF"/>
+                          </a:solidFill>
+                          <a:latin typeface="Calibri" pitchFamily="34" charset="0"/>
+                          <a:ea typeface="Calibri" pitchFamily="34" charset="-122"/>
+                          <a:cs typeface="Calibri" pitchFamily="34" charset="-120"/>
+                        </a:rPr>
+                        <a:t>grade</a:t>
+                      </a:r>
+                      <a:endParaRPr lang="en-US" sz="1400" dirty="0">
+                        <a:latin typeface="Calibri" charset="0"/>
+                        <a:ea typeface="Calibri" charset="0"/>
+                        <a:cs typeface="Calibri" charset="0"/>
+                      </a:endParaRPr>
+                    </a:p>
+                  </a:txBody>
+                  <a:tcPr marL="91440" marR="91440" marT="45720" marB="45720" anchor="ctr">
+                    <a:lnL w="9525" cap="flat" cmpd="sng" algn="ctr">
+                      <a:solidFill>
+                        <a:srgbClr val="E1E4E8"/>
+                      </a:solidFill>
+                      <a:prstDash val="solid"/>
+                      <a:round/>
+                      <a:headEnd type="none" w="med" len="med"/>
+                      <a:tailEnd type="none" w="med" len="med"/>
+                    </a:lnL>
+                    <a:lnR w="9525" cap="flat" cmpd="sng" algn="ctr">
+                      <a:solidFill>
+                        <a:srgbClr val="E1E4E8"/>
+                      </a:solidFill>
+                      <a:prstDash val="solid"/>
+                      <a:round/>
+                      <a:headEnd type="none" w="med" len="med"/>
+                      <a:tailEnd type="none" w="med" len="med"/>
+                    </a:lnR>
+                    <a:lnT w="9525" cap="flat" cmpd="sng" algn="ctr">
+                      <a:solidFill>
+                        <a:srgbClr val="E1E4E8"/>
+                      </a:solidFill>
+                      <a:prstDash val="solid"/>
+                      <a:round/>
+                      <a:headEnd type="none" w="med" len="med"/>
+                      <a:tailEnd type="none" w="med" len="med"/>
+                    </a:lnT>
+                    <a:lnB w="9525" cap="flat" cmpd="sng" algn="ctr">
+                      <a:solidFill>
+                        <a:srgbClr val="E1E4E8"/>
+                      </a:solidFill>
+                      <a:prstDash val="solid"/>
+                      <a:round/>
+                      <a:headEnd type="none" w="med" len="med"/>
+                      <a:tailEnd type="none" w="med" len="med"/>
+                    </a:lnB>
+                    <a:solidFill>
+                      <a:srgbClr val="0E9E85"/>
+                    </a:solidFill>
+                  </a:tcPr>
+                </a:tc>
+              </a:tr>
+              <a:tr h="933333">
+                <a:tc>
+                  <a:txBody>
+                    <a:bodyPr/>
+                    <a:lstStyle/>
+                    <a:p>
+                      <a:pPr algn="l" indent="0" marL="0">
+                        <a:buNone/>
+                      </a:pPr>
+                      <a:r>
+                        <a:rPr lang="en-US" sz="1400" dirty="0">
+                          <a:solidFill>
+                            <a:srgbClr val="1F2429"/>
+                          </a:solidFill>
+                          <a:latin typeface="Calibri" pitchFamily="34" charset="0"/>
+                          <a:ea typeface="Calibri" pitchFamily="34" charset="-122"/>
+                          <a:cs typeface="Calibri" pitchFamily="34" charset="-120"/>
+                        </a:rPr>
+                        <a:t>S001</a:t>
+                      </a:r>
+                      <a:endParaRPr lang="en-US" sz="1400" dirty="0">
+                        <a:latin typeface="Calibri" charset="0"/>
+                        <a:ea typeface="Calibri" charset="0"/>
+                        <a:cs typeface="Calibri" charset="0"/>
+                      </a:endParaRPr>
+                    </a:p>
+                  </a:txBody>
+                  <a:tcPr marL="91440" marR="91440" marT="45720" marB="45720" anchor="ctr">
+                    <a:lnL w="9525" cap="flat" cmpd="sng" algn="ctr">
+                      <a:solidFill>
+                        <a:srgbClr val="E1E4E8"/>
+                      </a:solidFill>
+                      <a:prstDash val="solid"/>
+                      <a:round/>
+                      <a:headEnd type="none" w="med" len="med"/>
+                      <a:tailEnd type="none" w="med" len="med"/>
+                    </a:lnL>
+                    <a:lnR w="9525" cap="flat" cmpd="sng" algn="ctr">
+                      <a:solidFill>
+                        <a:srgbClr val="E1E4E8"/>
+                      </a:solidFill>
+                      <a:prstDash val="solid"/>
+                      <a:round/>
+                      <a:headEnd type="none" w="med" len="med"/>
+                      <a:tailEnd type="none" w="med" len="med"/>
+                    </a:lnR>
+                    <a:lnT w="9525" cap="flat" cmpd="sng" algn="ctr">
+                      <a:solidFill>
+                        <a:srgbClr val="E1E4E8"/>
+                      </a:solidFill>
+                      <a:prstDash val="solid"/>
+                      <a:round/>
+                      <a:headEnd type="none" w="med" len="med"/>
+                      <a:tailEnd type="none" w="med" len="med"/>
+                    </a:lnT>
+                    <a:lnB w="9525" cap="flat" cmpd="sng" algn="ctr">
+                      <a:solidFill>
+                        <a:srgbClr val="E1E4E8"/>
+                      </a:solidFill>
+                      <a:prstDash val="solid"/>
+                      <a:round/>
+                      <a:headEnd type="none" w="med" len="med"/>
+                      <a:tailEnd type="none" w="med" len="med"/>
+                    </a:lnB>
+                    <a:solidFill>
+                      <a:srgbClr val="FFFFFF"/>
+                    </a:solidFill>
+                  </a:tcPr>
+                </a:tc>
+                <a:tc>
+                  <a:txBody>
+                    <a:bodyPr/>
+                    <a:lstStyle/>
+                    <a:p>
+                      <a:pPr algn="l" indent="0" marL="0">
+                        <a:buNone/>
+                      </a:pPr>
+                      <a:r>
+                        <a:rPr lang="en-US" sz="1400" dirty="0">
+                          <a:solidFill>
+                            <a:srgbClr val="1F2429"/>
+                          </a:solidFill>
+                          <a:latin typeface="Calibri" pitchFamily="34" charset="0"/>
+                          <a:ea typeface="Calibri" pitchFamily="34" charset="-122"/>
+                          <a:cs typeface="Calibri" pitchFamily="34" charset="-120"/>
+                        </a:rPr>
+                        <a:t>CS270</a:t>
+                      </a:r>
+                      <a:endParaRPr lang="en-US" sz="1400" dirty="0">
+                        <a:latin typeface="Calibri" charset="0"/>
+                        <a:ea typeface="Calibri" charset="0"/>
+                        <a:cs typeface="Calibri" charset="0"/>
+                      </a:endParaRPr>
+                    </a:p>
+                  </a:txBody>
+                  <a:tcPr marL="91440" marR="91440" marT="45720" marB="45720" anchor="ctr">
+                    <a:lnL w="9525" cap="flat" cmpd="sng" algn="ctr">
+                      <a:solidFill>
+                        <a:srgbClr val="E1E4E8"/>
+                      </a:solidFill>
+                      <a:prstDash val="solid"/>
+                      <a:round/>
+                      <a:headEnd type="none" w="med" len="med"/>
+                      <a:tailEnd type="none" w="med" len="med"/>
+                    </a:lnL>
+                    <a:lnR w="9525" cap="flat" cmpd="sng" algn="ctr">
+                      <a:solidFill>
+                        <a:srgbClr val="E1E4E8"/>
+                      </a:solidFill>
+                      <a:prstDash val="solid"/>
+                      <a:round/>
+                      <a:headEnd type="none" w="med" len="med"/>
+                      <a:tailEnd type="none" w="med" len="med"/>
+                    </a:lnR>
+                    <a:lnT w="9525" cap="flat" cmpd="sng" algn="ctr">
+                      <a:solidFill>
+                        <a:srgbClr val="E1E4E8"/>
+                      </a:solidFill>
+                      <a:prstDash val="solid"/>
+                      <a:round/>
+                      <a:headEnd type="none" w="med" len="med"/>
+                      <a:tailEnd type="none" w="med" len="med"/>
+                    </a:lnT>
+                    <a:lnB w="9525" cap="flat" cmpd="sng" algn="ctr">
+                      <a:solidFill>
+                        <a:srgbClr val="E1E4E8"/>
+                      </a:solidFill>
+                      <a:prstDash val="solid"/>
+                      <a:round/>
+                      <a:headEnd type="none" w="med" len="med"/>
+                      <a:tailEnd type="none" w="med" len="med"/>
+                    </a:lnB>
+                    <a:solidFill>
+                      <a:srgbClr val="FFFFFF"/>
+                    </a:solidFill>
+                  </a:tcPr>
+                </a:tc>
+                <a:tc>
+                  <a:txBody>
+                    <a:bodyPr/>
+                    <a:lstStyle/>
+                    <a:p>
+                      <a:pPr algn="l" indent="0" marL="0">
+                        <a:buNone/>
+                      </a:pPr>
+                      <a:r>
+                        <a:rPr lang="en-US" sz="1400" dirty="0">
+                          <a:solidFill>
+                            <a:srgbClr val="1F2429"/>
+                          </a:solidFill>
+                          <a:latin typeface="Calibri" pitchFamily="34" charset="0"/>
+                          <a:ea typeface="Calibri" pitchFamily="34" charset="-122"/>
+                          <a:cs typeface="Calibri" pitchFamily="34" charset="-120"/>
+                        </a:rPr>
+                        <a:t>A</a:t>
+                      </a:r>
+                      <a:endParaRPr lang="en-US" sz="1400" dirty="0">
+                        <a:latin typeface="Calibri" charset="0"/>
+                        <a:ea typeface="Calibri" charset="0"/>
+                        <a:cs typeface="Calibri" charset="0"/>
+                      </a:endParaRPr>
+                    </a:p>
+                  </a:txBody>
+                  <a:tcPr marL="91440" marR="91440" marT="45720" marB="45720" anchor="ctr">
+                    <a:lnL w="9525" cap="flat" cmpd="sng" algn="ctr">
+                      <a:solidFill>
+                        <a:srgbClr val="E1E4E8"/>
+                      </a:solidFill>
+                      <a:prstDash val="solid"/>
+                      <a:round/>
+                      <a:headEnd type="none" w="med" len="med"/>
+                      <a:tailEnd type="none" w="med" len="med"/>
+                    </a:lnL>
+                    <a:lnR w="9525" cap="flat" cmpd="sng" algn="ctr">
+                      <a:solidFill>
+                        <a:srgbClr val="E1E4E8"/>
+                      </a:solidFill>
+                      <a:prstDash val="solid"/>
+                      <a:round/>
+                      <a:headEnd type="none" w="med" len="med"/>
+                      <a:tailEnd type="none" w="med" len="med"/>
+                    </a:lnR>
+                    <a:lnT w="9525" cap="flat" cmpd="sng" algn="ctr">
+                      <a:solidFill>
+                        <a:srgbClr val="E1E4E8"/>
+                      </a:solidFill>
+                      <a:prstDash val="solid"/>
+                      <a:round/>
+                      <a:headEnd type="none" w="med" len="med"/>
+                      <a:tailEnd type="none" w="med" len="med"/>
+                    </a:lnT>
+                    <a:lnB w="9525" cap="flat" cmpd="sng" algn="ctr">
+                      <a:solidFill>
+                        <a:srgbClr val="E1E4E8"/>
+                      </a:solidFill>
+                      <a:prstDash val="solid"/>
+                      <a:round/>
+                      <a:headEnd type="none" w="med" len="med"/>
+                      <a:tailEnd type="none" w="med" len="med"/>
+                    </a:lnB>
+                    <a:solidFill>
+                      <a:srgbClr val="FFFFFF"/>
+                    </a:solidFill>
+                  </a:tcPr>
+                </a:tc>
+              </a:tr>
+              <a:tr h="933333">
+                <a:tc>
+                  <a:txBody>
+                    <a:bodyPr/>
+                    <a:lstStyle/>
+                    <a:p>
+                      <a:pPr algn="l" indent="0" marL="0">
+                        <a:buNone/>
+                      </a:pPr>
+                      <a:r>
+                        <a:rPr lang="en-US" sz="1400" dirty="0">
+                          <a:solidFill>
+                            <a:srgbClr val="1F2429"/>
+                          </a:solidFill>
+                          <a:latin typeface="Calibri" pitchFamily="34" charset="0"/>
+                          <a:ea typeface="Calibri" pitchFamily="34" charset="-122"/>
+                          <a:cs typeface="Calibri" pitchFamily="34" charset="-120"/>
+                        </a:rPr>
+                        <a:t>S001</a:t>
+                      </a:r>
+                      <a:endParaRPr lang="en-US" sz="1400" dirty="0">
+                        <a:latin typeface="Calibri" charset="0"/>
+                        <a:ea typeface="Calibri" charset="0"/>
+                        <a:cs typeface="Calibri" charset="0"/>
+                      </a:endParaRPr>
+                    </a:p>
+                  </a:txBody>
+                  <a:tcPr marL="91440" marR="91440" marT="45720" marB="45720" anchor="ctr">
+                    <a:lnL w="9525" cap="flat" cmpd="sng" algn="ctr">
+                      <a:solidFill>
+                        <a:srgbClr val="E1E4E8"/>
+                      </a:solidFill>
+                      <a:prstDash val="solid"/>
+                      <a:round/>
+                      <a:headEnd type="none" w="med" len="med"/>
+                      <a:tailEnd type="none" w="med" len="med"/>
+                    </a:lnL>
+                    <a:lnR w="9525" cap="flat" cmpd="sng" algn="ctr">
+                      <a:solidFill>
+                        <a:srgbClr val="E1E4E8"/>
+                      </a:solidFill>
+                      <a:prstDash val="solid"/>
+                      <a:round/>
+                      <a:headEnd type="none" w="med" len="med"/>
+                      <a:tailEnd type="none" w="med" len="med"/>
+                    </a:lnR>
+                    <a:lnT w="9525" cap="flat" cmpd="sng" algn="ctr">
+                      <a:solidFill>
+                        <a:srgbClr val="E1E4E8"/>
+                      </a:solidFill>
+                      <a:prstDash val="solid"/>
+                      <a:round/>
+                      <a:headEnd type="none" w="med" len="med"/>
+                      <a:tailEnd type="none" w="med" len="med"/>
+                    </a:lnT>
+                    <a:lnB w="9525" cap="flat" cmpd="sng" algn="ctr">
+                      <a:solidFill>
+                        <a:srgbClr val="E1E4E8"/>
+                      </a:solidFill>
+                      <a:prstDash val="solid"/>
+                      <a:round/>
+                      <a:headEnd type="none" w="med" len="med"/>
+                      <a:tailEnd type="none" w="med" len="med"/>
+                    </a:lnB>
+                    <a:solidFill>
+                      <a:srgbClr val="EEF1F3"/>
+                    </a:solidFill>
+                  </a:tcPr>
+                </a:tc>
+                <a:tc>
+                  <a:txBody>
+                    <a:bodyPr/>
+                    <a:lstStyle/>
+                    <a:p>
+                      <a:pPr algn="l" indent="0" marL="0">
+                        <a:buNone/>
+                      </a:pPr>
+                      <a:r>
+                        <a:rPr lang="en-US" sz="1400" dirty="0">
+                          <a:solidFill>
+                            <a:srgbClr val="1F2429"/>
+                          </a:solidFill>
+                          <a:latin typeface="Calibri" pitchFamily="34" charset="0"/>
+                          <a:ea typeface="Calibri" pitchFamily="34" charset="-122"/>
+                          <a:cs typeface="Calibri" pitchFamily="34" charset="-120"/>
+                        </a:rPr>
+                        <a:t>CS211</a:t>
+                      </a:r>
+                      <a:endParaRPr lang="en-US" sz="1400" dirty="0">
+                        <a:latin typeface="Calibri" charset="0"/>
+                        <a:ea typeface="Calibri" charset="0"/>
+                        <a:cs typeface="Calibri" charset="0"/>
+                      </a:endParaRPr>
+                    </a:p>
+                  </a:txBody>
+                  <a:tcPr marL="91440" marR="91440" marT="45720" marB="45720" anchor="ctr">
+                    <a:lnL w="9525" cap="flat" cmpd="sng" algn="ctr">
+                      <a:solidFill>
+                        <a:srgbClr val="E1E4E8"/>
+                      </a:solidFill>
+                      <a:prstDash val="solid"/>
+                      <a:round/>
+                      <a:headEnd type="none" w="med" len="med"/>
+                      <a:tailEnd type="none" w="med" len="med"/>
+                    </a:lnL>
+                    <a:lnR w="9525" cap="flat" cmpd="sng" algn="ctr">
+                      <a:solidFill>
+                        <a:srgbClr val="E1E4E8"/>
+                      </a:solidFill>
+                      <a:prstDash val="solid"/>
+                      <a:round/>
+                      <a:headEnd type="none" w="med" len="med"/>
+                      <a:tailEnd type="none" w="med" len="med"/>
+                    </a:lnR>
+                    <a:lnT w="9525" cap="flat" cmpd="sng" algn="ctr">
+                      <a:solidFill>
+                        <a:srgbClr val="E1E4E8"/>
+                      </a:solidFill>
+                      <a:prstDash val="solid"/>
+                      <a:round/>
+                      <a:headEnd type="none" w="med" len="med"/>
+                      <a:tailEnd type="none" w="med" len="med"/>
+                    </a:lnT>
+                    <a:lnB w="9525" cap="flat" cmpd="sng" algn="ctr">
+                      <a:solidFill>
+                        <a:srgbClr val="E1E4E8"/>
+                      </a:solidFill>
+                      <a:prstDash val="solid"/>
+                      <a:round/>
+                      <a:headEnd type="none" w="med" len="med"/>
+                      <a:tailEnd type="none" w="med" len="med"/>
+                    </a:lnB>
+                    <a:solidFill>
+                      <a:srgbClr val="EEF1F3"/>
+                    </a:solidFill>
+                  </a:tcPr>
+                </a:tc>
+                <a:tc>
+                  <a:txBody>
+                    <a:bodyPr/>
+                    <a:lstStyle/>
+                    <a:p>
+                      <a:pPr algn="l" indent="0" marL="0">
+                        <a:buNone/>
+                      </a:pPr>
+                      <a:r>
+                        <a:rPr lang="en-US" sz="1400" dirty="0">
+                          <a:solidFill>
+                            <a:srgbClr val="1F2429"/>
+                          </a:solidFill>
+                          <a:latin typeface="Calibri" pitchFamily="34" charset="0"/>
+                          <a:ea typeface="Calibri" pitchFamily="34" charset="-122"/>
+                          <a:cs typeface="Calibri" pitchFamily="34" charset="-120"/>
+                        </a:rPr>
+                        <a:t>B+</a:t>
+                      </a:r>
+                      <a:endParaRPr lang="en-US" sz="1400" dirty="0">
+                        <a:latin typeface="Calibri" charset="0"/>
+                        <a:ea typeface="Calibri" charset="0"/>
+                        <a:cs typeface="Calibri" charset="0"/>
+                      </a:endParaRPr>
+                    </a:p>
+                  </a:txBody>
+                  <a:tcPr marL="91440" marR="91440" marT="45720" marB="45720" anchor="ctr">
+                    <a:lnL w="9525" cap="flat" cmpd="sng" algn="ctr">
+                      <a:solidFill>
+                        <a:srgbClr val="E1E4E8"/>
+                      </a:solidFill>
+                      <a:prstDash val="solid"/>
+                      <a:round/>
+                      <a:headEnd type="none" w="med" len="med"/>
+                      <a:tailEnd type="none" w="med" len="med"/>
+                    </a:lnL>
+                    <a:lnR w="9525" cap="flat" cmpd="sng" algn="ctr">
+                      <a:solidFill>
+                        <a:srgbClr val="E1E4E8"/>
+                      </a:solidFill>
+                      <a:prstDash val="solid"/>
+                      <a:round/>
+                      <a:headEnd type="none" w="med" len="med"/>
+                      <a:tailEnd type="none" w="med" len="med"/>
+                    </a:lnR>
+                    <a:lnT w="9525" cap="flat" cmpd="sng" algn="ctr">
+                      <a:solidFill>
+                        <a:srgbClr val="E1E4E8"/>
+                      </a:solidFill>
+                      <a:prstDash val="solid"/>
+                      <a:round/>
+                      <a:headEnd type="none" w="med" len="med"/>
+                      <a:tailEnd type="none" w="med" len="med"/>
+                    </a:lnT>
+                    <a:lnB w="9525" cap="flat" cmpd="sng" algn="ctr">
+                      <a:solidFill>
+                        <a:srgbClr val="E1E4E8"/>
+                      </a:solidFill>
+                      <a:prstDash val="solid"/>
+                      <a:round/>
+                      <a:headEnd type="none" w="med" len="med"/>
+                      <a:tailEnd type="none" w="med" len="med"/>
+                    </a:lnB>
+                    <a:solidFill>
+                      <a:srgbClr val="EEF1F3"/>
+                    </a:solidFill>
+                  </a:tcPr>
+                </a:tc>
+              </a:tr>
+            </a:tbl>
+          </a:graphicData>
+        </a:graphic>
+      </p:graphicFrame>
+      <p:sp>
+        <p:nvSpPr>
+          <p:cNvPr id="10" name="Shape 6"/>
+          <p:cNvSpPr/>
+          <p:nvPr/>
+        </p:nvSpPr>
+        <p:spPr>
+          <a:xfrm>
+            <a:off x="548640" y="4790528"/>
+            <a:ext cx="11064240" cy="1417320"/>
+          </a:xfrm>
+          <a:prstGeom prst="roundRect">
+            <a:avLst>
+              <a:gd name="adj" fmla="val 5161"/>
+            </a:avLst>
+          </a:prstGeom>
+          <a:solidFill>
+            <a:srgbClr val="F1F2F6"/>
+          </a:solidFill>
+          <a:ln/>
+        </p:spPr>
+      </p:sp>
+      <p:sp>
+        <p:nvSpPr>
+          <p:cNvPr id="11" name="Text 7"/>
+          <p:cNvSpPr txBox="1"/>
+          <p:nvPr/>
+        </p:nvSpPr>
+        <p:spPr>
+          <a:xfrm>
+            <a:off x="822960" y="4945976"/>
+            <a:ext cx="10515600" cy="1143000"/>
+          </a:xfrm>
+          <a:prstGeom prst="rect">
+            <a:avLst/>
+          </a:prstGeom>
+          <a:noFill/>
+          <a:ln/>
+        </p:spPr>
+        <p:txBody>
+          <a:bodyPr wrap="square" rtlCol="0" anchor="t"/>
+          <a:lstStyle/>
+          <a:p>
+            <a:pPr indent="0" marL="0">
+              <a:lnSpc>
+                <a:spcPct val="122000"/>
+              </a:lnSpc>
+              <a:buNone/>
+            </a:pPr>
+            <a:r>
+              <a:rPr lang="en-US" sz="1800" dirty="0">
+                <a:solidFill>
+                  <a:srgbClr val="1F2429"/>
+                </a:solidFill>
+                <a:latin typeface="Calibri" pitchFamily="34" charset="0"/>
+                <a:ea typeface="Calibri" pitchFamily="34" charset="-122"/>
+                <a:cs typeface="Calibri" pitchFamily="34" charset="-120"/>
+              </a:rPr>
+              <a:t>A fresh Enrollment table — holding only the foreign keys and any enrollment-specific attribute, like the grade — matches the ER diagram's M:N relationship as its own relation, exactly as Unit 4's modeling anticipated.</a:t>
+            </a:r>
+            <a:endParaRPr lang="en-US" sz="1800" dirty="0"/>
+          </a:p>
+        </p:txBody>
+      </p:sp>
+    </p:spTree>
+  </p:cSld>
+  <p:clrMapOvr>
+    <a:masterClrMapping/>
+  </p:clrMapOvr>
+</p:sld>
+</file>
+
+<file path=ppt/slides/slide16.xml><?xml version="1.0" encoding="utf-8"?>
+<p:sld xmlns:a="http://schemas.openxmlformats.org/drawingml/2006/main" xmlns:r="http://schemas.openxmlformats.org/officeDocument/2006/relationships" xmlns:p="http://schemas.openxmlformats.org/presentationml/2006/main">
+  <p:cSld name="Slide 9">
+    <p:bg>
+      <p:bgPr>
+        <a:solidFill>
+          <a:srgbClr val="F7F8F9"/>
+        </a:solidFill>
+      </p:bgPr>
+    </p:bg>
+    <p:spTree>
+      <p:nvGrpSpPr>
+        <p:cNvPr id="1" name=""/>
+        <p:cNvGrpSpPr/>
+        <p:nvPr/>
+      </p:nvGrpSpPr>
+      <p:grpSpPr>
+        <a:xfrm>
+          <a:off x="0" y="0"/>
+          <a:ext cx="0" cy="0"/>
+          <a:chOff x="0" y="0"/>
+          <a:chExt cx="0" cy="0"/>
+        </a:xfrm>
+      </p:grpSpPr>
+      <p:sp>
+        <p:nvSpPr>
+          <p:cNvPr id="2" name="Text 0"/>
+          <p:cNvSpPr txBox="1"/>
+          <p:nvPr/>
+        </p:nvSpPr>
+        <p:spPr>
+          <a:xfrm>
+            <a:off x="548640" y="320040"/>
+            <a:ext cx="9144000" cy="292608"/>
+          </a:xfrm>
+          <a:prstGeom prst="rect">
+            <a:avLst/>
+          </a:prstGeom>
+          <a:noFill/>
+          <a:ln/>
+        </p:spPr>
+        <p:txBody>
+          <a:bodyPr wrap="square" rtlCol="0" anchor="ctr"/>
+          <a:lstStyle/>
+          <a:p>
+            <a:pPr indent="0" marL="0">
+              <a:buNone/>
+            </a:pPr>
+            <a:r>
+              <a:rPr lang="en-US" sz="1200" b="1" spc="150" kern="0" dirty="0">
+                <a:solidFill>
+                  <a:srgbClr val="8B7FD9"/>
+                </a:solidFill>
+                <a:latin typeface="Calibri" pitchFamily="34" charset="0"/>
+                <a:ea typeface="Calibri" pitchFamily="34" charset="-122"/>
+                <a:cs typeface="Calibri" pitchFamily="34" charset="-120"/>
+              </a:rPr>
+              <a:t>LECTURE 23 ONWARD</a:t>
+            </a:r>
+            <a:endParaRPr lang="en-US" sz="1200" dirty="0"/>
+          </a:p>
+        </p:txBody>
+      </p:sp>
+      <p:sp>
+        <p:nvSpPr>
+          <p:cNvPr id="3" name="Text 1"/>
+          <p:cNvSpPr txBox="1"/>
+          <p:nvPr/>
+        </p:nvSpPr>
+        <p:spPr>
+          <a:xfrm>
+            <a:off x="548640" y="566928"/>
+            <a:ext cx="11064240" cy="640080"/>
+          </a:xfrm>
+          <a:prstGeom prst="rect">
+            <a:avLst/>
+          </a:prstGeom>
+          <a:noFill/>
+          <a:ln/>
+        </p:spPr>
+        <p:txBody>
+          <a:bodyPr wrap="square" rtlCol="0" anchor="ctr"/>
+          <a:lstStyle/>
+          <a:p>
+            <a:pPr indent="0" marL="0">
+              <a:buNone/>
+            </a:pPr>
+            <a:r>
+              <a:rPr lang="en-US" sz="2500" b="1" dirty="0">
+                <a:solidFill>
+                  <a:srgbClr val="1F2429"/>
+                </a:solidFill>
+                <a:latin typeface="Calibri" pitchFamily="34" charset="0"/>
+                <a:ea typeface="Calibri" pitchFamily="34" charset="-122"/>
+                <a:cs typeface="Calibri" pitchFamily="34" charset="-120"/>
+              </a:rPr>
+              <a:t>Unit 6 — Indexing (Part 2 of 2)</a:t>
+            </a:r>
+            <a:endParaRPr lang="en-US" sz="2500" dirty="0"/>
+          </a:p>
+        </p:txBody>
+      </p:sp>
+      <p:sp>
+        <p:nvSpPr>
+          <p:cNvPr id="4" name="Text 2"/>
+          <p:cNvSpPr txBox="1"/>
+          <p:nvPr/>
+        </p:nvSpPr>
+        <p:spPr>
+          <a:xfrm>
+            <a:off x="9951415" y="6455664"/>
+            <a:ext cx="2011680" cy="292608"/>
+          </a:xfrm>
+          <a:prstGeom prst="rect">
+            <a:avLst/>
+          </a:prstGeom>
+          <a:noFill/>
+          <a:ln/>
+        </p:spPr>
+        <p:txBody>
+          <a:bodyPr wrap="square" rtlCol="0" anchor="ctr"/>
+          <a:lstStyle/>
+          <a:p>
+            <a:pPr algn="r" indent="0" marL="0">
+              <a:buNone/>
+            </a:pPr>
+            <a:r>
+              <a:rPr lang="en-US" sz="1200" u="sng" dirty="0">
+                <a:solidFill>
+                  <a:srgbClr val="8A939B"/>
+                </a:solidFill>
+                <a:latin typeface="Calibri" pitchFamily="34" charset="0"/>
+                <a:ea typeface="Calibri" pitchFamily="34" charset="-122"/>
+                <a:cs typeface="Calibri" pitchFamily="34" charset="-120"/>
+                <a:hlinkClick r:id="rId1" invalidUrl="" action="" tgtFrame="" tooltip="" history="1" highlightClick="0" endSnd="0">
+                  <a:extLst>
+                    <a:ext uri="{A12FA001-AC4F-418D-AE19-62706E023703}">
+                      <ahyp:hlinkClr xmlns:ahyp="http://schemas.microsoft.com/office/drawing/2018/hyperlinkcolor" val="tx"/>
+                    </a:ext>
+                  </a:extLst>
+                </a:hlinkClick>
+              </a:rPr>
+              <a:t>cuinotes.com</a:t>
+            </a:r>
+            <a:pPr algn="r" indent="0" marL="0">
+              <a:buNone/>
+            </a:pPr>
+            <a:r>
+              <a:rPr lang="en-US" sz="1200" dirty="0">
+                <a:solidFill>
+                  <a:srgbClr val="8A939B"/>
+                </a:solidFill>
+                <a:latin typeface="Calibri" pitchFamily="34" charset="0"/>
+                <a:ea typeface="Calibri" pitchFamily="34" charset="-122"/>
+                <a:cs typeface="Calibri" pitchFamily="34" charset="-120"/>
+              </a:rPr>
+              <a:t>  ·  11</a:t>
+            </a:r>
+            <a:endParaRPr lang="en-US" sz="1200" dirty="0"/>
+          </a:p>
+        </p:txBody>
+      </p:sp>
+      <p:sp>
+        <p:nvSpPr>
+          <p:cNvPr id="5" name="Text 3"/>
+          <p:cNvSpPr txBox="1"/>
+          <p:nvPr/>
+        </p:nvSpPr>
+        <p:spPr>
+          <a:xfrm>
+            <a:off x="548640" y="1325880"/>
+            <a:ext cx="5212080" cy="457200"/>
+          </a:xfrm>
+          <a:prstGeom prst="rect">
+            <a:avLst/>
+          </a:prstGeom>
+          <a:noFill/>
+          <a:ln/>
+        </p:spPr>
+        <p:txBody>
+          <a:bodyPr wrap="square" rtlCol="0" anchor="ctr"/>
+          <a:lstStyle/>
+          <a:p>
+            <a:pPr indent="0" marL="0">
+              <a:buNone/>
+            </a:pPr>
+            <a:r>
+              <a:rPr lang="en-US" sz="1800" dirty="0">
+                <a:solidFill>
+                  <a:srgbClr val="1F2429"/>
+                </a:solidFill>
+                <a:latin typeface="Calibri" pitchFamily="34" charset="0"/>
+                <a:ea typeface="Calibri" pitchFamily="34" charset="-122"/>
+                <a:cs typeface="Calibri" pitchFamily="34" charset="-120"/>
+              </a:rPr>
+              <a:t>Operationalizing the normalized schema for real applications.</a:t>
+            </a:r>
+            <a:endParaRPr lang="en-US" sz="1800" dirty="0"/>
+          </a:p>
+        </p:txBody>
+      </p:sp>
+      <p:sp>
+        <p:nvSpPr>
+          <p:cNvPr id="6" name="Text 4"/>
+          <p:cNvSpPr txBox="1"/>
+          <p:nvPr/>
+        </p:nvSpPr>
+        <p:spPr>
+          <a:xfrm>
+            <a:off x="548640" y="1828800"/>
+            <a:ext cx="11064240" cy="1000000"/>
+          </a:xfrm>
+          <a:prstGeom prst="rect">
+            <a:avLst/>
+          </a:prstGeom>
+          <a:noFill/>
+          <a:ln/>
+        </p:spPr>
+        <p:txBody>
+          <a:bodyPr wrap="square" rtlCol="0" anchor="t"/>
+          <a:lstStyle/>
+          <a:p>
+            <a:pPr indent="0" marL="0">
+              <a:lnSpc>
+                <a:spcPct val="130000"/>
+              </a:lnSpc>
+              <a:buNone/>
+            </a:pPr>
+            <a:r>
+              <a:rPr lang="en-US" sz="1800" dirty="0">
+                <a:solidFill>
+                  <a:srgbClr val="1F2429"/>
+                </a:solidFill>
+                <a:latin typeface="Calibri" pitchFamily="34" charset="0"/>
+                <a:ea typeface="Calibri" pitchFamily="34" charset="-122"/>
+                <a:cs typeface="Calibri" pitchFamily="34" charset="-120"/>
+              </a:rPr>
+              <a:t>An index on Enrollment.studentId turns “find this student's enrollments” from a full scan into a direct lookup.</a:t>
+            </a:r>
+            <a:endParaRPr lang="en-US" sz="1800" dirty="0"/>
+          </a:p>
+        </p:txBody>
+      </p:sp>
+      <p:sp>
+        <p:nvSpPr>
+          <p:cNvPr id="17" name="Shape 15"/>
+          <p:cNvSpPr/>
+          <p:nvPr/>
+        </p:nvSpPr>
+        <p:spPr>
+          <a:xfrm>
+            <a:off x="548640" y="3017520"/>
+            <a:ext cx="11064240" cy="2286000"/>
+          </a:xfrm>
+          <a:prstGeom prst="roundRect">
+            <a:avLst>
+              <a:gd name="adj" fmla="val 4810"/>
+            </a:avLst>
+          </a:prstGeom>
+          <a:solidFill>
+            <a:srgbClr val="FFFFFF"/>
+          </a:solidFill>
+          <a:ln w="22225">
+            <a:solidFill>
+              <a:srgbClr val="E8A33D"/>
+            </a:solidFill>
+            <a:prstDash val="solid"/>
+          </a:ln>
+          <a:effectLst>
+            <a:outerShdw sx="100000" sy="100000" kx="0" ky="0" algn="bl" rotWithShape="0" blurRad="76200" dist="25400" dir="5400000">
+              <a:srgbClr val="1F2429">
+                <a:alpha val="16000"/>
+              </a:srgbClr>
+            </a:outerShdw>
+          </a:effectLst>
+        </p:spPr>
+      </p:sp>
+      <p:sp>
+        <p:nvSpPr>
+          <p:cNvPr id="18" name="Shape 16"/>
+          <p:cNvSpPr/>
+          <p:nvPr/>
+        </p:nvSpPr>
+        <p:spPr>
+          <a:xfrm>
+            <a:off x="694944" y="3246120"/>
+            <a:ext cx="91440" cy="310896"/>
+          </a:xfrm>
+          <a:prstGeom prst="rect">
+            <a:avLst/>
+          </a:prstGeom>
+          <a:solidFill>
+            <a:srgbClr val="E8A33D"/>
+          </a:solidFill>
+          <a:ln/>
+        </p:spPr>
+      </p:sp>
+      <p:sp>
+        <p:nvSpPr>
+          <p:cNvPr id="19" name="Text 17"/>
+          <p:cNvSpPr txBox="1"/>
+          <p:nvPr/>
+        </p:nvSpPr>
+        <p:spPr>
+          <a:xfrm>
+            <a:off x="914400" y="3154680"/>
+            <a:ext cx="10332720" cy="684428"/>
+          </a:xfrm>
+          <a:prstGeom prst="rect">
+            <a:avLst/>
+          </a:prstGeom>
+          <a:noFill/>
+          <a:ln/>
+        </p:spPr>
+        <p:txBody>
+          <a:bodyPr wrap="square" rtlCol="0" anchor="t"/>
+          <a:lstStyle/>
+          <a:p>
+            <a:pPr indent="0" marL="0">
+              <a:buNone/>
+            </a:pPr>
+            <a:r>
+              <a:rPr lang="en-US" sz="2000" b="1" dirty="0">
+                <a:solidFill>
+                  <a:srgbClr val="1F2429"/>
+                </a:solidFill>
+                <a:latin typeface="Calibri" pitchFamily="34" charset="0"/>
+                <a:ea typeface="Calibri" pitchFamily="34" charset="-122"/>
+                <a:cs typeface="Calibri" pitchFamily="34" charset="-120"/>
+              </a:rPr>
+              <a:t>INDEX ON Enrollment(studentId)</a:t>
+            </a:r>
+            <a:endParaRPr lang="en-US" sz="2000" dirty="0"/>
+          </a:p>
+        </p:txBody>
+      </p:sp>
+      <p:sp>
+        <p:nvSpPr>
+          <p:cNvPr id="20" name="Text 18"/>
+          <p:cNvSpPr txBox="1"/>
+          <p:nvPr/>
+        </p:nvSpPr>
+        <p:spPr>
+          <a:xfrm>
+            <a:off x="914400" y="3886200"/>
+            <a:ext cx="10332720" cy="836524"/>
+          </a:xfrm>
+          <a:prstGeom prst="rect">
+            <a:avLst/>
+          </a:prstGeom>
+          <a:noFill/>
+          <a:ln/>
+        </p:spPr>
+        <p:txBody>
+          <a:bodyPr wrap="square" rtlCol="0" anchor="t"/>
+          <a:lstStyle/>
+          <a:p>
+            <a:pPr indent="0" marL="0">
+              <a:lnSpc>
+                <a:spcPct val="110000"/>
+              </a:lnSpc>
+              <a:buNone/>
+            </a:pPr>
+            <a:r>
+              <a:rPr lang="en-US" sz="1800" dirty="0">
+                <a:solidFill>
+                  <a:srgbClr val="6B7480"/>
+                </a:solidFill>
+                <a:latin typeface="Calibri" pitchFamily="34" charset="0"/>
+                <a:ea typeface="Calibri" pitchFamily="34" charset="-122"/>
+                <a:cs typeface="Calibri" pitchFamily="34" charset="-120"/>
+              </a:rPr>
+              <a:t>Makes “find this student's enrollments” fast.</a:t>
+            </a:r>
+            <a:endParaRPr lang="en-US" sz="1800" dirty="0"/>
+          </a:p>
+        </p:txBody>
+      </p:sp>
+    </p:spTree>
+  </p:cSld>
+  <p:clrMapOvr>
+    <a:masterClrMapping/>
+  </p:clrMapOvr>
+</p:sld>
+</file>
+
+<file path=ppt/slides/slide17.xml><?xml version="1.0" encoding="utf-8"?>
+<p:sld xmlns:a="http://schemas.openxmlformats.org/drawingml/2006/main" xmlns:r="http://schemas.openxmlformats.org/officeDocument/2006/relationships" xmlns:p="http://schemas.openxmlformats.org/presentationml/2006/main">
+  <p:cSld name="Slide 12">
+    <p:bg>
+      <p:bgPr>
+        <a:solidFill>
+          <a:srgbClr val="F7F8F9"/>
+        </a:solidFill>
+      </p:bgPr>
+    </p:bg>
+    <p:spTree>
+      <p:nvGrpSpPr>
+        <p:cNvPr id="1" name=""/>
+        <p:cNvGrpSpPr/>
+        <p:nvPr/>
+      </p:nvGrpSpPr>
+      <p:grpSpPr>
+        <a:xfrm>
+          <a:off x="0" y="0"/>
+          <a:ext cx="0" cy="0"/>
+          <a:chOff x="0" y="0"/>
+          <a:chExt cx="0" cy="0"/>
+        </a:xfrm>
+      </p:grpSpPr>
+      <p:sp>
+        <p:nvSpPr>
+          <p:cNvPr id="2" name="Text 0"/>
+          <p:cNvSpPr txBox="1"/>
+          <p:nvPr/>
+        </p:nvSpPr>
+        <p:spPr>
+          <a:xfrm>
+            <a:off x="548640" y="320040"/>
+            <a:ext cx="9144000" cy="292608"/>
+          </a:xfrm>
+          <a:prstGeom prst="rect">
+            <a:avLst/>
+          </a:prstGeom>
+          <a:noFill/>
+          <a:ln/>
+        </p:spPr>
+        <p:txBody>
+          <a:bodyPr wrap="square" rtlCol="0" anchor="ctr"/>
+          <a:lstStyle/>
+          <a:p>
+            <a:pPr indent="0" marL="0">
+              <a:buNone/>
+            </a:pPr>
+            <a:r>
+              <a:rPr lang="en-US" sz="1200" b="1" spc="150" kern="0" dirty="0">
+                <a:solidFill>
+                  <a:srgbClr val="8B7FD9"/>
+                </a:solidFill>
+                <a:latin typeface="Calibri" pitchFamily="34" charset="0"/>
+                <a:ea typeface="Calibri" pitchFamily="34" charset="-122"/>
+                <a:cs typeface="Calibri" pitchFamily="34" charset="-120"/>
+              </a:rPr>
+              <a:t>CONCEPT MAP</a:t>
+            </a:r>
+            <a:endParaRPr lang="en-US" sz="1200" dirty="0"/>
+          </a:p>
+        </p:txBody>
+      </p:sp>
+      <p:sp>
+        <p:nvSpPr>
+          <p:cNvPr id="3" name="Text 1"/>
+          <p:cNvSpPr txBox="1"/>
+          <p:nvPr/>
+        </p:nvSpPr>
+        <p:spPr>
+          <a:xfrm>
+            <a:off x="548640" y="566928"/>
+            <a:ext cx="11064240" cy="640080"/>
+          </a:xfrm>
+          <a:prstGeom prst="rect">
+            <a:avLst/>
+          </a:prstGeom>
+          <a:noFill/>
+          <a:ln/>
+        </p:spPr>
+        <p:txBody>
+          <a:bodyPr wrap="square" rtlCol="0" anchor="ctr"/>
+          <a:lstStyle/>
+          <a:p>
+            <a:pPr indent="0" marL="0">
+              <a:buNone/>
+            </a:pPr>
+            <a:r>
+              <a:rPr lang="en-US" sz="2500" b="1" dirty="0">
+                <a:solidFill>
+                  <a:srgbClr val="1F2429"/>
+                </a:solidFill>
+                <a:latin typeface="Calibri" pitchFamily="34" charset="0"/>
+                <a:ea typeface="Calibri" pitchFamily="34" charset="-122"/>
+                <a:cs typeface="Calibri" pitchFamily="34" charset="-120"/>
+              </a:rPr>
+              <a:t>The Whole Course, as One Thread (Part 2 of 2)</a:t>
+            </a:r>
+            <a:endParaRPr lang="en-US" sz="2500" dirty="0"/>
+          </a:p>
+        </p:txBody>
+      </p:sp>
+      <p:sp>
+        <p:nvSpPr>
+          <p:cNvPr id="4" name="Text 2"/>
+          <p:cNvSpPr txBox="1"/>
+          <p:nvPr/>
+        </p:nvSpPr>
+        <p:spPr>
+          <a:xfrm>
+            <a:off x="9951415" y="6455664"/>
+            <a:ext cx="2011680" cy="292608"/>
+          </a:xfrm>
+          <a:prstGeom prst="rect">
+            <a:avLst/>
+          </a:prstGeom>
+          <a:noFill/>
+          <a:ln/>
+        </p:spPr>
+        <p:txBody>
+          <a:bodyPr wrap="square" rtlCol="0" anchor="ctr"/>
+          <a:lstStyle/>
+          <a:p>
+            <a:pPr algn="r" indent="0" marL="0">
+              <a:buNone/>
+            </a:pPr>
+            <a:r>
+              <a:rPr lang="en-US" sz="1200" u="sng" dirty="0">
+                <a:solidFill>
+                  <a:srgbClr val="8A939B"/>
+                </a:solidFill>
+                <a:latin typeface="Calibri" pitchFamily="34" charset="0"/>
+                <a:ea typeface="Calibri" pitchFamily="34" charset="-122"/>
+                <a:cs typeface="Calibri" pitchFamily="34" charset="-120"/>
+                <a:hlinkClick r:id="rId1" invalidUrl="" action="" tgtFrame="" tooltip="" history="1" highlightClick="0" endSnd="0">
+                  <a:extLst>
+                    <a:ext uri="{A12FA001-AC4F-418D-AE19-62706E023703}">
+                      <ahyp:hlinkClr xmlns:ahyp="http://schemas.microsoft.com/office/drawing/2018/hyperlinkcolor" val="tx"/>
+                    </a:ext>
+                  </a:extLst>
+                </a:hlinkClick>
+              </a:rPr>
+              <a:t>cuinotes.com</a:t>
+            </a:r>
+            <a:pPr algn="r" indent="0" marL="0">
+              <a:buNone/>
+            </a:pPr>
+            <a:r>
+              <a:rPr lang="en-US" sz="1200" dirty="0">
+                <a:solidFill>
+                  <a:srgbClr val="8A939B"/>
+                </a:solidFill>
+                <a:latin typeface="Calibri" pitchFamily="34" charset="0"/>
+                <a:ea typeface="Calibri" pitchFamily="34" charset="-122"/>
+                <a:cs typeface="Calibri" pitchFamily="34" charset="-120"/>
+              </a:rPr>
+              <a:t>  ·  15</a:t>
+            </a:r>
+            <a:endParaRPr lang="en-US" sz="1200" dirty="0"/>
+          </a:p>
+        </p:txBody>
+      </p:sp>
+      <p:sp>
+        <p:nvSpPr>
+          <p:cNvPr id="17" name="Shape 15"/>
+          <p:cNvSpPr/>
+          <p:nvPr/>
+        </p:nvSpPr>
+        <p:spPr>
+          <a:xfrm>
+            <a:off x="731520" y="1325880"/>
+            <a:ext cx="10698480" cy="1000000"/>
+          </a:xfrm>
+          <a:prstGeom prst="roundRect">
+            <a:avLst>
+              <a:gd name="adj" fmla="val 9023"/>
+            </a:avLst>
+          </a:prstGeom>
+          <a:solidFill>
+            <a:srgbClr val="FFFFFF"/>
+          </a:solidFill>
+          <a:ln w="19050">
+            <a:solidFill>
+              <a:srgbClr val="2FE6C4"/>
+            </a:solidFill>
+            <a:prstDash val="solid"/>
+          </a:ln>
+        </p:spPr>
+      </p:sp>
+      <p:sp>
+        <p:nvSpPr>
+          <p:cNvPr id="18" name="Shape 16"/>
+          <p:cNvSpPr/>
+          <p:nvPr/>
+        </p:nvSpPr>
+        <p:spPr>
+          <a:xfrm>
+            <a:off x="731520" y="1325880"/>
+            <a:ext cx="91440" cy="1000000"/>
+          </a:xfrm>
+          <a:prstGeom prst="rect">
+            <a:avLst/>
+          </a:prstGeom>
+          <a:solidFill>
+            <a:srgbClr val="2FE6C4"/>
+          </a:solidFill>
+          <a:ln/>
+        </p:spPr>
+      </p:sp>
+      <p:sp>
+        <p:nvSpPr>
+          <p:cNvPr id="19" name="Text 17"/>
+          <p:cNvSpPr txBox="1"/>
+          <p:nvPr/>
+        </p:nvSpPr>
+        <p:spPr>
+          <a:xfrm>
+            <a:off x="1051560" y="1371600"/>
+            <a:ext cx="4114800" cy="908560"/>
+          </a:xfrm>
+          <a:prstGeom prst="rect">
+            <a:avLst/>
+          </a:prstGeom>
+          <a:noFill/>
+          <a:ln/>
+        </p:spPr>
+        <p:txBody>
+          <a:bodyPr wrap="square" rtlCol="0" anchor="ctr"/>
+          <a:lstStyle/>
+          <a:p>
+            <a:pPr indent="0" marL="0">
+              <a:buNone/>
+            </a:pPr>
+            <a:r>
+              <a:rPr lang="en-US" sz="2000" b="1" dirty="0">
+                <a:solidFill>
+                  <a:srgbClr val="1F2429"/>
+                </a:solidFill>
+                <a:latin typeface="Calibri" pitchFamily="34" charset="0"/>
+                <a:ea typeface="Calibri" pitchFamily="34" charset="-122"/>
+                <a:cs typeface="Calibri" pitchFamily="34" charset="-120"/>
+              </a:rPr>
+              <a:t>Unit 5 — Normalization</a:t>
+            </a:r>
+            <a:endParaRPr lang="en-US" sz="2000" dirty="0"/>
+          </a:p>
+        </p:txBody>
+      </p:sp>
+      <p:sp>
+        <p:nvSpPr>
+          <p:cNvPr id="20" name="Text 18"/>
+          <p:cNvSpPr txBox="1"/>
+          <p:nvPr/>
+        </p:nvSpPr>
+        <p:spPr>
+          <a:xfrm>
+            <a:off x="5257800" y="1371600"/>
+            <a:ext cx="6035040" cy="908560"/>
+          </a:xfrm>
+          <a:prstGeom prst="rect">
+            <a:avLst/>
+          </a:prstGeom>
+          <a:noFill/>
+          <a:ln/>
+        </p:spPr>
+        <p:txBody>
+          <a:bodyPr wrap="square" rtlCol="0" anchor="ctr"/>
+          <a:lstStyle/>
+          <a:p>
+            <a:pPr indent="0" marL="0">
+              <a:buNone/>
+            </a:pPr>
+            <a:r>
+              <a:rPr lang="en-US" sz="1800" dirty="0">
+                <a:solidFill>
+                  <a:srgbClr val="6B7480"/>
+                </a:solidFill>
+                <a:latin typeface="Calibri" pitchFamily="34" charset="0"/>
+                <a:ea typeface="Calibri" pitchFamily="34" charset="-122"/>
+                <a:cs typeface="Calibri" pitchFamily="34" charset="-120"/>
+              </a:rPr>
+              <a:t>The M:N relationship becomes its own redundancy-free Enrollment table</a:t>
+            </a:r>
+            <a:endParaRPr lang="en-US" sz="1800" dirty="0"/>
+          </a:p>
+        </p:txBody>
+      </p:sp>
+      <p:sp>
+        <p:nvSpPr>
+          <p:cNvPr id="21" name="Shape 19"/>
+          <p:cNvSpPr/>
+          <p:nvPr/>
+        </p:nvSpPr>
+        <p:spPr>
+          <a:xfrm>
+            <a:off x="731520" y="2508760"/>
+            <a:ext cx="10698480" cy="1000000"/>
+          </a:xfrm>
+          <a:prstGeom prst="roundRect">
+            <a:avLst>
+              <a:gd name="adj" fmla="val 9023"/>
+            </a:avLst>
+          </a:prstGeom>
+          <a:solidFill>
+            <a:srgbClr val="FFFFFF"/>
+          </a:solidFill>
+          <a:ln w="19050">
+            <a:solidFill>
+              <a:srgbClr val="8B7FD9"/>
+            </a:solidFill>
+            <a:prstDash val="solid"/>
+          </a:ln>
+        </p:spPr>
+      </p:sp>
+      <p:sp>
+        <p:nvSpPr>
+          <p:cNvPr id="22" name="Shape 20"/>
+          <p:cNvSpPr/>
+          <p:nvPr/>
+        </p:nvSpPr>
+        <p:spPr>
+          <a:xfrm>
+            <a:off x="731520" y="2508760"/>
+            <a:ext cx="91440" cy="1000000"/>
+          </a:xfrm>
+          <a:prstGeom prst="rect">
+            <a:avLst/>
+          </a:prstGeom>
+          <a:solidFill>
+            <a:srgbClr val="8B7FD9"/>
+          </a:solidFill>
+          <a:ln/>
+        </p:spPr>
+      </p:sp>
+      <p:sp>
+        <p:nvSpPr>
+          <p:cNvPr id="23" name="Text 21"/>
+          <p:cNvSpPr txBox="1"/>
+          <p:nvPr/>
+        </p:nvSpPr>
+        <p:spPr>
+          <a:xfrm>
+            <a:off x="1051560" y="2554480"/>
+            <a:ext cx="4114800" cy="908560"/>
+          </a:xfrm>
+          <a:prstGeom prst="rect">
+            <a:avLst/>
+          </a:prstGeom>
+          <a:noFill/>
+          <a:ln/>
+        </p:spPr>
+        <p:txBody>
+          <a:bodyPr wrap="square" rtlCol="0" anchor="ctr"/>
+          <a:lstStyle/>
+          <a:p>
+            <a:pPr indent="0" marL="0">
+              <a:buNone/>
+            </a:pPr>
+            <a:r>
+              <a:rPr lang="en-US" sz="2000" b="1" dirty="0">
+                <a:solidFill>
+                  <a:srgbClr val="1F2429"/>
+                </a:solidFill>
+                <a:latin typeface="Calibri" pitchFamily="34" charset="0"/>
+                <a:ea typeface="Calibri" pitchFamily="34" charset="-122"/>
+                <a:cs typeface="Calibri" pitchFamily="34" charset="-120"/>
+              </a:rPr>
+              <a:t>Unit 6 — Views, Security, Indexing</a:t>
+            </a:r>
+            <a:endParaRPr lang="en-US" sz="2000" dirty="0"/>
+          </a:p>
+        </p:txBody>
+      </p:sp>
+      <p:sp>
+        <p:nvSpPr>
+          <p:cNvPr id="24" name="Text 22"/>
+          <p:cNvSpPr txBox="1"/>
+          <p:nvPr/>
+        </p:nvSpPr>
+        <p:spPr>
+          <a:xfrm>
+            <a:off x="5257800" y="2554480"/>
+            <a:ext cx="6035040" cy="908560"/>
+          </a:xfrm>
+          <a:prstGeom prst="rect">
+            <a:avLst/>
+          </a:prstGeom>
+          <a:noFill/>
+          <a:ln/>
+        </p:spPr>
+        <p:txBody>
+          <a:bodyPr wrap="square" rtlCol="0" anchor="ctr"/>
+          <a:lstStyle/>
+          <a:p>
+            <a:pPr indent="0" marL="0">
+              <a:buNone/>
+            </a:pPr>
+            <a:r>
+              <a:rPr lang="en-US" sz="1800" dirty="0">
+                <a:solidFill>
+                  <a:srgbClr val="6B7480"/>
+                </a:solidFill>
+                <a:latin typeface="Calibri" pitchFamily="34" charset="0"/>
+                <a:ea typeface="Calibri" pitchFamily="34" charset="-122"/>
+                <a:cs typeface="Calibri" pitchFamily="34" charset="-120"/>
+              </a:rPr>
+              <a:t>A transcript view, access control, and a fast lookup path</a:t>
+            </a:r>
+            <a:endParaRPr lang="en-US" sz="1800" dirty="0"/>
+          </a:p>
+        </p:txBody>
+      </p:sp>
+      <p:sp>
+        <p:nvSpPr>
+          <p:cNvPr id="25" name="Shape 23"/>
+          <p:cNvSpPr/>
+          <p:nvPr/>
+        </p:nvSpPr>
+        <p:spPr>
+          <a:xfrm>
+            <a:off x="731520" y="3691640"/>
+            <a:ext cx="10698480" cy="1000000"/>
+          </a:xfrm>
+          <a:prstGeom prst="roundRect">
+            <a:avLst>
+              <a:gd name="adj" fmla="val 9023"/>
+            </a:avLst>
+          </a:prstGeom>
+          <a:solidFill>
+            <a:srgbClr val="FFFFFF"/>
+          </a:solidFill>
+          <a:ln w="19050">
+            <a:solidFill>
+              <a:srgbClr val="E8A33D"/>
+            </a:solidFill>
+            <a:prstDash val="solid"/>
+          </a:ln>
+        </p:spPr>
+      </p:sp>
+      <p:sp>
+        <p:nvSpPr>
+          <p:cNvPr id="26" name="Shape 24"/>
+          <p:cNvSpPr/>
+          <p:nvPr/>
+        </p:nvSpPr>
+        <p:spPr>
+          <a:xfrm>
+            <a:off x="731520" y="3691640"/>
+            <a:ext cx="91440" cy="1000000"/>
+          </a:xfrm>
+          <a:prstGeom prst="rect">
+            <a:avLst/>
+          </a:prstGeom>
+          <a:solidFill>
+            <a:srgbClr val="E8A33D"/>
+          </a:solidFill>
+          <a:ln/>
+        </p:spPr>
+      </p:sp>
+      <p:sp>
+        <p:nvSpPr>
+          <p:cNvPr id="27" name="Text 25"/>
+          <p:cNvSpPr txBox="1"/>
+          <p:nvPr/>
+        </p:nvSpPr>
+        <p:spPr>
+          <a:xfrm>
+            <a:off x="1051560" y="3737360"/>
+            <a:ext cx="4114800" cy="908560"/>
+          </a:xfrm>
+          <a:prstGeom prst="rect">
+            <a:avLst/>
+          </a:prstGeom>
+          <a:noFill/>
+          <a:ln/>
+        </p:spPr>
+        <p:txBody>
+          <a:bodyPr wrap="square" rtlCol="0" anchor="ctr"/>
+          <a:lstStyle/>
+          <a:p>
+            <a:pPr indent="0" marL="0">
+              <a:buNone/>
+            </a:pPr>
+            <a:r>
+              <a:rPr lang="en-US" sz="2000" b="1" dirty="0">
+                <a:solidFill>
+                  <a:srgbClr val="1F2429"/>
+                </a:solidFill>
+                <a:latin typeface="Calibri" pitchFamily="34" charset="0"/>
+                <a:ea typeface="Calibri" pitchFamily="34" charset="-122"/>
+                <a:cs typeface="Calibri" pitchFamily="34" charset="-120"/>
+              </a:rPr>
+              <a:t>Unit 7 — NoSQL Contrast</a:t>
+            </a:r>
+            <a:endParaRPr lang="en-US" sz="2000" dirty="0"/>
+          </a:p>
+        </p:txBody>
+      </p:sp>
+      <p:sp>
+        <p:nvSpPr>
+          <p:cNvPr id="28" name="Text 26"/>
+          <p:cNvSpPr txBox="1"/>
+          <p:nvPr/>
+        </p:nvSpPr>
+        <p:spPr>
+          <a:xfrm>
+            <a:off x="5257800" y="3737360"/>
+            <a:ext cx="6035040" cy="908560"/>
+          </a:xfrm>
+          <a:prstGeom prst="rect">
+            <a:avLst/>
+          </a:prstGeom>
+          <a:noFill/>
+          <a:ln/>
+        </p:spPr>
+        <p:txBody>
+          <a:bodyPr wrap="square" rtlCol="0" anchor="ctr"/>
+          <a:lstStyle/>
+          <a:p>
+            <a:pPr indent="0" marL="0">
+              <a:buNone/>
+            </a:pPr>
+            <a:r>
+              <a:rPr lang="en-US" sz="1800" dirty="0">
+                <a:solidFill>
+                  <a:srgbClr val="6B7480"/>
+                </a:solidFill>
+                <a:latin typeface="Calibri" pitchFamily="34" charset="0"/>
+                <a:ea typeface="Calibri" pitchFamily="34" charset="-122"/>
+                <a:cs typeface="Calibri" pitchFamily="34" charset="-120"/>
+              </a:rPr>
+              <a:t>The same data, deliberately denormalized, for a different access pattern</a:t>
+            </a:r>
+            <a:endParaRPr lang="en-US" sz="1800" dirty="0"/>
+          </a:p>
+        </p:txBody>
+      </p:sp>
+      <p:sp>
+        <p:nvSpPr>
+          <p:cNvPr id="29" name="Shape 27"/>
+          <p:cNvSpPr/>
+          <p:nvPr/>
+        </p:nvSpPr>
+        <p:spPr>
+          <a:xfrm>
+            <a:off x="731520" y="4874520"/>
+            <a:ext cx="10698480" cy="1000000"/>
+          </a:xfrm>
+          <a:prstGeom prst="roundRect">
+            <a:avLst>
+              <a:gd name="adj" fmla="val 9023"/>
+            </a:avLst>
+          </a:prstGeom>
+          <a:solidFill>
+            <a:srgbClr val="FFFFFF"/>
+          </a:solidFill>
+          <a:ln w="19050">
+            <a:solidFill>
+              <a:srgbClr val="2FE6C4"/>
+            </a:solidFill>
+            <a:prstDash val="solid"/>
+          </a:ln>
+        </p:spPr>
+      </p:sp>
+      <p:sp>
+        <p:nvSpPr>
+          <p:cNvPr id="30" name="Shape 28"/>
+          <p:cNvSpPr/>
+          <p:nvPr/>
+        </p:nvSpPr>
+        <p:spPr>
+          <a:xfrm>
+            <a:off x="731520" y="4874520"/>
+            <a:ext cx="91440" cy="1000000"/>
+          </a:xfrm>
+          <a:prstGeom prst="rect">
+            <a:avLst/>
+          </a:prstGeom>
+          <a:solidFill>
+            <a:srgbClr val="2FE6C4"/>
+          </a:solidFill>
+          <a:ln/>
+        </p:spPr>
+      </p:sp>
+      <p:sp>
+        <p:nvSpPr>
+          <p:cNvPr id="31" name="Text 29"/>
+          <p:cNvSpPr txBox="1"/>
+          <p:nvPr/>
+        </p:nvSpPr>
+        <p:spPr>
+          <a:xfrm>
+            <a:off x="1051560" y="4920240"/>
+            <a:ext cx="4114800" cy="908560"/>
+          </a:xfrm>
+          <a:prstGeom prst="rect">
+            <a:avLst/>
+          </a:prstGeom>
+          <a:noFill/>
+          <a:ln/>
+        </p:spPr>
+        <p:txBody>
+          <a:bodyPr wrap="square" rtlCol="0" anchor="ctr"/>
+          <a:lstStyle/>
+          <a:p>
+            <a:pPr indent="0" marL="0">
+              <a:buNone/>
+            </a:pPr>
+            <a:r>
+              <a:rPr lang="en-US" sz="2000" b="1" dirty="0">
+                <a:solidFill>
+                  <a:srgbClr val="1F2429"/>
+                </a:solidFill>
+                <a:latin typeface="Calibri" pitchFamily="34" charset="0"/>
+                <a:ea typeface="Calibri" pitchFamily="34" charset="-122"/>
+                <a:cs typeface="Calibri" pitchFamily="34" charset="-120"/>
+              </a:rPr>
+              <a:t>Unit 8 — Transactions</a:t>
+            </a:r>
+            <a:endParaRPr lang="en-US" sz="2000" dirty="0"/>
+          </a:p>
+        </p:txBody>
+      </p:sp>
+      <p:sp>
+        <p:nvSpPr>
+          <p:cNvPr id="32" name="Text 30"/>
+          <p:cNvSpPr txBox="1"/>
+          <p:nvPr/>
+        </p:nvSpPr>
+        <p:spPr>
+          <a:xfrm>
+            <a:off x="5257800" y="4920240"/>
+            <a:ext cx="6035040" cy="908560"/>
+          </a:xfrm>
+          <a:prstGeom prst="rect">
+            <a:avLst/>
+          </a:prstGeom>
+          <a:noFill/>
+          <a:ln/>
+        </p:spPr>
+        <p:txBody>
+          <a:bodyPr wrap="square" rtlCol="0" anchor="ctr"/>
+          <a:lstStyle/>
+          <a:p>
+            <a:pPr indent="0" marL="0">
+              <a:buNone/>
+            </a:pPr>
+            <a:r>
+              <a:rPr lang="en-US" sz="1800" dirty="0">
+                <a:solidFill>
+                  <a:srgbClr val="6B7480"/>
+                </a:solidFill>
+                <a:latin typeface="Calibri" pitchFamily="34" charset="0"/>
+                <a:ea typeface="Calibri" pitchFamily="34" charset="-122"/>
+                <a:cs typeface="Calibri" pitchFamily="34" charset="-120"/>
+              </a:rPr>
+              <a:t>Every write to this data, wrapped in ACID guarantees</a:t>
+            </a:r>
+            <a:endParaRPr lang="en-US" sz="1800" dirty="0"/>
+          </a:p>
+        </p:txBody>
+      </p:sp>
+    </p:spTree>
+  </p:cSld>
+  <p:clrMapOvr>
+    <a:masterClrMapping/>
+  </p:clrMapOvr>
+</p:sld>
+</file>
+
+<file path=ppt/slides/slide18.xml><?xml version="1.0" encoding="utf-8"?>
+<p:sld xmlns:a="http://schemas.openxmlformats.org/drawingml/2006/main" xmlns:r="http://schemas.openxmlformats.org/officeDocument/2006/relationships" xmlns:p="http://schemas.openxmlformats.org/presentationml/2006/main">
+  <p:cSld name="Slide 13">
+    <p:bg>
+      <p:bgPr>
+        <a:solidFill>
+          <a:srgbClr val="F7F8F9"/>
+        </a:solidFill>
+      </p:bgPr>
+    </p:bg>
+    <p:spTree>
+      <p:nvGrpSpPr>
+        <p:cNvPr id="1" name=""/>
+        <p:cNvGrpSpPr/>
+        <p:nvPr/>
+      </p:nvGrpSpPr>
+      <p:grpSpPr>
+        <a:xfrm>
+          <a:off x="0" y="0"/>
+          <a:ext cx="0" cy="0"/>
+          <a:chOff x="0" y="0"/>
+          <a:chExt cx="0" cy="0"/>
+        </a:xfrm>
+      </p:grpSpPr>
+      <p:sp>
+        <p:nvSpPr>
+          <p:cNvPr id="2" name="Text 0"/>
+          <p:cNvSpPr txBox="1"/>
+          <p:nvPr/>
+        </p:nvSpPr>
+        <p:spPr>
+          <a:xfrm>
+            <a:off x="548640" y="320040"/>
+            <a:ext cx="9144000" cy="292608"/>
+          </a:xfrm>
+          <a:prstGeom prst="rect">
+            <a:avLst/>
+          </a:prstGeom>
+          <a:noFill/>
+          <a:ln/>
+        </p:spPr>
+        <p:txBody>
+          <a:bodyPr wrap="square" rtlCol="0" anchor="ctr"/>
+          <a:lstStyle/>
+          <a:p>
+            <a:pPr indent="0" marL="0">
+              <a:buNone/>
+            </a:pPr>
+            <a:r>
+              <a:rPr lang="en-US" sz="1200" b="1" spc="150" kern="0" dirty="0">
+                <a:solidFill>
+                  <a:srgbClr val="8B7FD9"/>
+                </a:solidFill>
+                <a:latin typeface="Calibri" pitchFamily="34" charset="0"/>
+                <a:ea typeface="Calibri" pitchFamily="34" charset="-122"/>
+                <a:cs typeface="Calibri" pitchFamily="34" charset="-120"/>
+              </a:rPr>
+              <a:t>NATURAL DIRECTION 2 OF 3</a:t>
+            </a:r>
+            <a:endParaRPr lang="en-US" sz="1200" dirty="0"/>
+          </a:p>
+        </p:txBody>
+      </p:sp>
+      <p:sp>
+        <p:nvSpPr>
+          <p:cNvPr id="3" name="Text 1"/>
+          <p:cNvSpPr txBox="1"/>
+          <p:nvPr/>
+        </p:nvSpPr>
+        <p:spPr>
+          <a:xfrm>
+            <a:off x="548640" y="566928"/>
+            <a:ext cx="11064240" cy="640080"/>
+          </a:xfrm>
+          <a:prstGeom prst="rect">
+            <a:avLst/>
+          </a:prstGeom>
+          <a:noFill/>
+          <a:ln/>
+        </p:spPr>
+        <p:txBody>
+          <a:bodyPr wrap="square" rtlCol="0" anchor="ctr"/>
+          <a:lstStyle/>
+          <a:p>
+            <a:pPr indent="0" marL="0">
+              <a:buNone/>
+            </a:pPr>
+            <a:r>
+              <a:rPr lang="en-US" sz="2500" b="1" dirty="0">
+                <a:solidFill>
+                  <a:srgbClr val="1F2429"/>
+                </a:solidFill>
+                <a:latin typeface="Calibri" pitchFamily="34" charset="0"/>
+                <a:ea typeface="Calibri" pitchFamily="34" charset="-122"/>
+                <a:cs typeface="Calibri" pitchFamily="34" charset="-120"/>
+              </a:rPr>
+              <a:t>Where This Leads Next: Data Warehousing &amp; OLAP</a:t>
+            </a:r>
+            <a:endParaRPr lang="en-US" sz="2500" dirty="0"/>
+          </a:p>
+        </p:txBody>
+      </p:sp>
+      <p:sp>
+        <p:nvSpPr>
+          <p:cNvPr id="4" name="Text 2"/>
+          <p:cNvSpPr txBox="1"/>
+          <p:nvPr/>
+        </p:nvSpPr>
+        <p:spPr>
+          <a:xfrm>
+            <a:off x="9951415" y="6455664"/>
+            <a:ext cx="2011680" cy="292608"/>
+          </a:xfrm>
+          <a:prstGeom prst="rect">
+            <a:avLst/>
+          </a:prstGeom>
+          <a:noFill/>
+          <a:ln/>
+        </p:spPr>
+        <p:txBody>
+          <a:bodyPr wrap="square" rtlCol="0" anchor="ctr"/>
+          <a:lstStyle/>
+          <a:p>
+            <a:pPr algn="r" indent="0" marL="0">
+              <a:buNone/>
+            </a:pPr>
+            <a:r>
+              <a:rPr lang="en-US" sz="1200" u="sng" dirty="0">
+                <a:solidFill>
+                  <a:srgbClr val="8A939B"/>
+                </a:solidFill>
+                <a:latin typeface="Calibri" pitchFamily="34" charset="0"/>
+                <a:ea typeface="Calibri" pitchFamily="34" charset="-122"/>
+                <a:cs typeface="Calibri" pitchFamily="34" charset="-120"/>
+                <a:hlinkClick r:id="rId1" invalidUrl="" action="" tgtFrame="" tooltip="" history="1" highlightClick="0" endSnd="0">
+                  <a:extLst>
+                    <a:ext uri="{A12FA001-AC4F-418D-AE19-62706E023703}">
+                      <ahyp:hlinkClr xmlns:ahyp="http://schemas.microsoft.com/office/drawing/2018/hyperlinkcolor" val="tx"/>
+                    </a:ext>
+                  </a:extLst>
+                </a:hlinkClick>
+              </a:rPr>
+              <a:t>cuinotes.com</a:t>
+            </a:r>
+            <a:pPr algn="r" indent="0" marL="0">
+              <a:buNone/>
+            </a:pPr>
+            <a:r>
+              <a:rPr lang="en-US" sz="1200" dirty="0">
+                <a:solidFill>
+                  <a:srgbClr val="8A939B"/>
+                </a:solidFill>
+                <a:latin typeface="Calibri" pitchFamily="34" charset="0"/>
+                <a:ea typeface="Calibri" pitchFamily="34" charset="-122"/>
+                <a:cs typeface="Calibri" pitchFamily="34" charset="-120"/>
+              </a:rPr>
+              <a:t>  ·  17</a:t>
+            </a:r>
+            <a:endParaRPr lang="en-US" sz="1200" dirty="0"/>
+          </a:p>
+        </p:txBody>
+      </p:sp>
+      <p:sp>
+        <p:nvSpPr>
+          <p:cNvPr id="5" name="Text 3"/>
+          <p:cNvSpPr txBox="1"/>
+          <p:nvPr/>
+        </p:nvSpPr>
+        <p:spPr>
+          <a:xfrm>
+            <a:off x="548640" y="1325880"/>
+            <a:ext cx="11064240" cy="548640"/>
+          </a:xfrm>
+          <a:prstGeom prst="rect">
+            <a:avLst/>
+          </a:prstGeom>
+          <a:noFill/>
+          <a:ln/>
+        </p:spPr>
+        <p:txBody>
+          <a:bodyPr wrap="square" rtlCol="0" anchor="ctr"/>
+          <a:lstStyle/>
+          <a:p>
+            <a:pPr indent="0" marL="0">
+              <a:buNone/>
+            </a:pPr>
+            <a:r>
+              <a:rPr lang="en-US" sz="1800" dirty="0">
+                <a:solidFill>
+                  <a:srgbClr val="1F2429"/>
+                </a:solidFill>
+                <a:latin typeface="Calibri" pitchFamily="34" charset="0"/>
+                <a:ea typeface="Calibri" pitchFamily="34" charset="-122"/>
+                <a:cs typeface="Calibri" pitchFamily="34" charset="-120"/>
+              </a:rPr>
+              <a:t>This course deliberately stopped at a single DBMS instance, serving requests one transaction at a time (however concurrently).</a:t>
+            </a:r>
+            <a:endParaRPr lang="en-US" sz="1800" dirty="0"/>
+          </a:p>
+        </p:txBody>
+      </p:sp>
+      <p:sp>
+        <p:nvSpPr>
+          <p:cNvPr id="10" name="Shape 8"/>
+          <p:cNvSpPr/>
+          <p:nvPr/>
+        </p:nvSpPr>
+        <p:spPr>
+          <a:xfrm>
+            <a:off x="548640" y="2194560"/>
+            <a:ext cx="11064240" cy="3749040"/>
+          </a:xfrm>
+          <a:prstGeom prst="roundRect">
+            <a:avLst>
+              <a:gd name="adj" fmla="val 2105"/>
+            </a:avLst>
+          </a:prstGeom>
+          <a:solidFill>
+            <a:srgbClr val="FFFFFF"/>
+          </a:solidFill>
+          <a:ln w="22225">
+            <a:solidFill>
+              <a:srgbClr val="8B7FD9"/>
+            </a:solidFill>
+            <a:prstDash val="solid"/>
+          </a:ln>
+          <a:effectLst>
+            <a:outerShdw sx="100000" sy="100000" kx="0" ky="0" algn="bl" rotWithShape="0" blurRad="63500" dist="25400" dir="5400000">
+              <a:srgbClr val="1F2429">
+                <a:alpha val="15000"/>
+              </a:srgbClr>
+            </a:outerShdw>
+          </a:effectLst>
+        </p:spPr>
+      </p:sp>
+      <p:sp>
+        <p:nvSpPr>
+          <p:cNvPr id="11" name="Shape 9"/>
+          <p:cNvSpPr/>
+          <p:nvPr/>
+        </p:nvSpPr>
+        <p:spPr>
+          <a:xfrm>
+            <a:off x="713232" y="2340864"/>
+            <a:ext cx="201168" cy="201168"/>
+          </a:xfrm>
+          <a:prstGeom prst="ellipse">
+            <a:avLst/>
+          </a:prstGeom>
+          <a:solidFill>
+            <a:srgbClr val="8B7FD9"/>
+          </a:solidFill>
+          <a:ln/>
+        </p:spPr>
+      </p:sp>
+      <p:sp>
+        <p:nvSpPr>
+          <p:cNvPr id="12" name="Text 10"/>
+          <p:cNvSpPr txBox="1"/>
+          <p:nvPr/>
+        </p:nvSpPr>
+        <p:spPr>
+          <a:xfrm>
+            <a:off x="1005840" y="2286000"/>
+            <a:ext cx="10149840" cy="365760"/>
+          </a:xfrm>
+          <a:prstGeom prst="rect">
+            <a:avLst/>
+          </a:prstGeom>
+          <a:noFill/>
+          <a:ln/>
+        </p:spPr>
+        <p:txBody>
+          <a:bodyPr wrap="square" rtlCol="0" anchor="t"/>
+          <a:lstStyle/>
+          <a:p>
+            <a:pPr indent="0" marL="0">
+              <a:buNone/>
+            </a:pPr>
+            <a:r>
+              <a:rPr lang="en-US" sz="2000" b="1" dirty="0">
+                <a:solidFill>
+                  <a:srgbClr val="1F2429"/>
+                </a:solidFill>
+                <a:latin typeface="Calibri" pitchFamily="34" charset="0"/>
+                <a:ea typeface="Calibri" pitchFamily="34" charset="-122"/>
+                <a:cs typeface="Calibri" pitchFamily="34" charset="-120"/>
+              </a:rPr>
+              <a:t>Data Warehousing &amp; OLAP</a:t>
+            </a:r>
+            <a:endParaRPr lang="en-US" sz="2000" dirty="0"/>
+          </a:p>
+        </p:txBody>
+      </p:sp>
+      <p:sp>
+        <p:nvSpPr>
+          <p:cNvPr id="13" name="Text 11"/>
+          <p:cNvSpPr txBox="1"/>
+          <p:nvPr/>
+        </p:nvSpPr>
+        <p:spPr>
+          <a:xfrm>
+            <a:off x="749808" y="2697480"/>
+            <a:ext cx="10661904" cy="3200000"/>
+          </a:xfrm>
+          <a:prstGeom prst="rect">
+            <a:avLst/>
+          </a:prstGeom>
+          <a:noFill/>
+          <a:ln/>
+        </p:spPr>
+        <p:txBody>
+          <a:bodyPr wrap="square" rtlCol="0" anchor="t"/>
+          <a:lstStyle/>
+          <a:p>
+            <a:pPr indent="0" marL="0">
+              <a:lnSpc>
+                <a:spcPct val="112000"/>
+              </a:lnSpc>
+              <a:buNone/>
+            </a:pPr>
+            <a:r>
+              <a:rPr lang="en-US" sz="1800" dirty="0">
+                <a:solidFill>
+                  <a:srgbClr val="6B7480"/>
+                </a:solidFill>
+                <a:latin typeface="Calibri" pitchFamily="34" charset="0"/>
+                <a:ea typeface="Calibri" pitchFamily="34" charset="-122"/>
+                <a:cs typeface="Calibri" pitchFamily="34" charset="-120"/>
+              </a:rPr>
+              <a:t>This course's relational model optimized for many small, fast transactions (OLTP); a data warehouse instead optimizes for huge, read-heavy analytical queries across a company's entire history.</a:t>
+            </a:r>
+            <a:endParaRPr lang="en-US" sz="1800" dirty="0"/>
+          </a:p>
+        </p:txBody>
+      </p:sp>
+    </p:spTree>
+  </p:cSld>
+  <p:clrMapOvr>
+    <a:masterClrMapping/>
+  </p:clrMapOvr>
+</p:sld>
+</file>
+
+<file path=ppt/slides/slide19.xml><?xml version="1.0" encoding="utf-8"?>
+<p:sld xmlns:a="http://schemas.openxmlformats.org/drawingml/2006/main" xmlns:r="http://schemas.openxmlformats.org/officeDocument/2006/relationships" xmlns:p="http://schemas.openxmlformats.org/presentationml/2006/main">
+  <p:cSld name="Slide 13">
+    <p:bg>
+      <p:bgPr>
+        <a:solidFill>
+          <a:srgbClr val="F7F8F9"/>
+        </a:solidFill>
+      </p:bgPr>
+    </p:bg>
+    <p:spTree>
+      <p:nvGrpSpPr>
+        <p:cNvPr id="1" name=""/>
+        <p:cNvGrpSpPr/>
+        <p:nvPr/>
+      </p:nvGrpSpPr>
+      <p:grpSpPr>
+        <a:xfrm>
+          <a:off x="0" y="0"/>
+          <a:ext cx="0" cy="0"/>
+          <a:chOff x="0" y="0"/>
+          <a:chExt cx="0" cy="0"/>
+        </a:xfrm>
+      </p:grpSpPr>
+      <p:sp>
+        <p:nvSpPr>
+          <p:cNvPr id="2" name="Text 0"/>
+          <p:cNvSpPr txBox="1"/>
+          <p:nvPr/>
+        </p:nvSpPr>
+        <p:spPr>
+          <a:xfrm>
+            <a:off x="548640" y="320040"/>
+            <a:ext cx="9144000" cy="292608"/>
+          </a:xfrm>
+          <a:prstGeom prst="rect">
+            <a:avLst/>
+          </a:prstGeom>
+          <a:noFill/>
+          <a:ln/>
+        </p:spPr>
+        <p:txBody>
+          <a:bodyPr wrap="square" rtlCol="0" anchor="ctr"/>
+          <a:lstStyle/>
+          <a:p>
+            <a:pPr indent="0" marL="0">
+              <a:buNone/>
+            </a:pPr>
+            <a:r>
+              <a:rPr lang="en-US" sz="1200" b="1" spc="150" kern="0" dirty="0">
+                <a:solidFill>
+                  <a:srgbClr val="8B7FD9"/>
+                </a:solidFill>
+                <a:latin typeface="Calibri" pitchFamily="34" charset="0"/>
+                <a:ea typeface="Calibri" pitchFamily="34" charset="-122"/>
+                <a:cs typeface="Calibri" pitchFamily="34" charset="-120"/>
+              </a:rPr>
+              <a:t>NATURAL DIRECTION 3 OF 3</a:t>
+            </a:r>
+            <a:endParaRPr lang="en-US" sz="1200" dirty="0"/>
+          </a:p>
+        </p:txBody>
+      </p:sp>
+      <p:sp>
+        <p:nvSpPr>
+          <p:cNvPr id="3" name="Text 1"/>
+          <p:cNvSpPr txBox="1"/>
+          <p:nvPr/>
+        </p:nvSpPr>
+        <p:spPr>
+          <a:xfrm>
+            <a:off x="548640" y="566928"/>
+            <a:ext cx="11064240" cy="640080"/>
+          </a:xfrm>
+          <a:prstGeom prst="rect">
+            <a:avLst/>
+          </a:prstGeom>
+          <a:noFill/>
+          <a:ln/>
+        </p:spPr>
+        <p:txBody>
+          <a:bodyPr wrap="square" rtlCol="0" anchor="ctr"/>
+          <a:lstStyle/>
+          <a:p>
+            <a:pPr indent="0" marL="0">
+              <a:buNone/>
+            </a:pPr>
+            <a:r>
+              <a:rPr lang="en-US" sz="2500" b="1" dirty="0">
+                <a:solidFill>
+                  <a:srgbClr val="1F2429"/>
+                </a:solidFill>
+                <a:latin typeface="Calibri" pitchFamily="34" charset="0"/>
+                <a:ea typeface="Calibri" pitchFamily="34" charset="-122"/>
+                <a:cs typeface="Calibri" pitchFamily="34" charset="-120"/>
+              </a:rPr>
+              <a:t>Where This Leads Next: Query Optimization</a:t>
+            </a:r>
+            <a:endParaRPr lang="en-US" sz="2500" dirty="0"/>
+          </a:p>
+        </p:txBody>
+      </p:sp>
+      <p:sp>
+        <p:nvSpPr>
+          <p:cNvPr id="4" name="Text 2"/>
+          <p:cNvSpPr txBox="1"/>
+          <p:nvPr/>
+        </p:nvSpPr>
+        <p:spPr>
+          <a:xfrm>
+            <a:off x="9951415" y="6455664"/>
+            <a:ext cx="2011680" cy="292608"/>
+          </a:xfrm>
+          <a:prstGeom prst="rect">
+            <a:avLst/>
+          </a:prstGeom>
+          <a:noFill/>
+          <a:ln/>
+        </p:spPr>
+        <p:txBody>
+          <a:bodyPr wrap="square" rtlCol="0" anchor="ctr"/>
+          <a:lstStyle/>
+          <a:p>
+            <a:pPr algn="r" indent="0" marL="0">
+              <a:buNone/>
+            </a:pPr>
+            <a:r>
+              <a:rPr lang="en-US" sz="1200" u="sng" dirty="0">
+                <a:solidFill>
+                  <a:srgbClr val="8A939B"/>
+                </a:solidFill>
+                <a:latin typeface="Calibri" pitchFamily="34" charset="0"/>
+                <a:ea typeface="Calibri" pitchFamily="34" charset="-122"/>
+                <a:cs typeface="Calibri" pitchFamily="34" charset="-120"/>
+                <a:hlinkClick r:id="rId1" invalidUrl="" action="" tgtFrame="" tooltip="" history="1" highlightClick="0" endSnd="0">
+                  <a:extLst>
+                    <a:ext uri="{A12FA001-AC4F-418D-AE19-62706E023703}">
+                      <ahyp:hlinkClr xmlns:ahyp="http://schemas.microsoft.com/office/drawing/2018/hyperlinkcolor" val="tx"/>
+                    </a:ext>
+                  </a:extLst>
+                </a:hlinkClick>
+              </a:rPr>
+              <a:t>cuinotes.com</a:t>
+            </a:r>
+            <a:pPr algn="r" indent="0" marL="0">
+              <a:buNone/>
+            </a:pPr>
+            <a:r>
+              <a:rPr lang="en-US" sz="1200" dirty="0">
+                <a:solidFill>
+                  <a:srgbClr val="8A939B"/>
+                </a:solidFill>
+                <a:latin typeface="Calibri" pitchFamily="34" charset="0"/>
+                <a:ea typeface="Calibri" pitchFamily="34" charset="-122"/>
+                <a:cs typeface="Calibri" pitchFamily="34" charset="-120"/>
+              </a:rPr>
+              <a:t>  ·  18</a:t>
+            </a:r>
+            <a:endParaRPr lang="en-US" sz="1200" dirty="0"/>
+          </a:p>
+        </p:txBody>
+      </p:sp>
+      <p:sp>
+        <p:nvSpPr>
+          <p:cNvPr id="5" name="Text 3"/>
+          <p:cNvSpPr txBox="1"/>
+          <p:nvPr/>
+        </p:nvSpPr>
+        <p:spPr>
+          <a:xfrm>
+            <a:off x="548640" y="1325880"/>
+            <a:ext cx="11064240" cy="548640"/>
+          </a:xfrm>
+          <a:prstGeom prst="rect">
+            <a:avLst/>
+          </a:prstGeom>
+          <a:noFill/>
+          <a:ln/>
+        </p:spPr>
+        <p:txBody>
+          <a:bodyPr wrap="square" rtlCol="0" anchor="ctr"/>
+          <a:lstStyle/>
+          <a:p>
+            <a:pPr indent="0" marL="0">
+              <a:buNone/>
+            </a:pPr>
+            <a:r>
+              <a:rPr lang="en-US" sz="1800" dirty="0">
+                <a:solidFill>
+                  <a:srgbClr val="1F2429"/>
+                </a:solidFill>
+                <a:latin typeface="Calibri" pitchFamily="34" charset="0"/>
+                <a:ea typeface="Calibri" pitchFamily="34" charset="-122"/>
+                <a:cs typeface="Calibri" pitchFamily="34" charset="-120"/>
+              </a:rPr>
+              <a:t>This course deliberately stopped at a single DBMS instance, serving requests one transaction at a time (however concurrently).</a:t>
+            </a:r>
+            <a:endParaRPr lang="en-US" sz="1800" dirty="0"/>
+          </a:p>
+        </p:txBody>
+      </p:sp>
+      <p:sp>
+        <p:nvSpPr>
+          <p:cNvPr id="14" name="Shape 12"/>
+          <p:cNvSpPr/>
+          <p:nvPr/>
+        </p:nvSpPr>
+        <p:spPr>
+          <a:xfrm>
+            <a:off x="548640" y="2194560"/>
+            <a:ext cx="11064240" cy="3749040"/>
+          </a:xfrm>
+          <a:prstGeom prst="roundRect">
+            <a:avLst>
+              <a:gd name="adj" fmla="val 2105"/>
+            </a:avLst>
+          </a:prstGeom>
+          <a:solidFill>
+            <a:srgbClr val="FFFFFF"/>
+          </a:solidFill>
+          <a:ln w="22225">
+            <a:solidFill>
+              <a:srgbClr val="E8A33D"/>
+            </a:solidFill>
+            <a:prstDash val="solid"/>
+          </a:ln>
+          <a:effectLst>
+            <a:outerShdw sx="100000" sy="100000" kx="0" ky="0" algn="bl" rotWithShape="0" blurRad="63500" dist="25400" dir="5400000">
+              <a:srgbClr val="1F2429">
+                <a:alpha val="15000"/>
+              </a:srgbClr>
+            </a:outerShdw>
+          </a:effectLst>
+        </p:spPr>
+      </p:sp>
+      <p:sp>
+        <p:nvSpPr>
+          <p:cNvPr id="15" name="Shape 13"/>
+          <p:cNvSpPr/>
+          <p:nvPr/>
+        </p:nvSpPr>
+        <p:spPr>
+          <a:xfrm>
+            <a:off x="713232" y="2340864"/>
+            <a:ext cx="201168" cy="201168"/>
+          </a:xfrm>
+          <a:prstGeom prst="ellipse">
+            <a:avLst/>
+          </a:prstGeom>
+          <a:solidFill>
+            <a:srgbClr val="E8A33D"/>
+          </a:solidFill>
+          <a:ln/>
+        </p:spPr>
+      </p:sp>
+      <p:sp>
+        <p:nvSpPr>
+          <p:cNvPr id="16" name="Text 14"/>
+          <p:cNvSpPr txBox="1"/>
+          <p:nvPr/>
+        </p:nvSpPr>
+        <p:spPr>
+          <a:xfrm>
+            <a:off x="1005840" y="2286000"/>
+            <a:ext cx="10149840" cy="365760"/>
+          </a:xfrm>
+          <a:prstGeom prst="rect">
+            <a:avLst/>
+          </a:prstGeom>
+          <a:noFill/>
+          <a:ln/>
+        </p:spPr>
+        <p:txBody>
+          <a:bodyPr wrap="square" rtlCol="0" anchor="t"/>
+          <a:lstStyle/>
+          <a:p>
+            <a:pPr indent="0" marL="0">
+              <a:buNone/>
+            </a:pPr>
+            <a:r>
+              <a:rPr lang="en-US" sz="2000" b="1" dirty="0">
+                <a:solidFill>
+                  <a:srgbClr val="1F2429"/>
+                </a:solidFill>
+                <a:latin typeface="Calibri" pitchFamily="34" charset="0"/>
+                <a:ea typeface="Calibri" pitchFamily="34" charset="-122"/>
+                <a:cs typeface="Calibri" pitchFamily="34" charset="-120"/>
+              </a:rPr>
+              <a:t>Query Optimization</a:t>
+            </a:r>
+            <a:endParaRPr lang="en-US" sz="2000" dirty="0"/>
+          </a:p>
+        </p:txBody>
+      </p:sp>
+      <p:sp>
+        <p:nvSpPr>
+          <p:cNvPr id="17" name="Text 15"/>
+          <p:cNvSpPr txBox="1"/>
+          <p:nvPr/>
+        </p:nvSpPr>
+        <p:spPr>
+          <a:xfrm>
+            <a:off x="749808" y="2697480"/>
+            <a:ext cx="10661904" cy="3200000"/>
+          </a:xfrm>
+          <a:prstGeom prst="rect">
+            <a:avLst/>
+          </a:prstGeom>
+          <a:noFill/>
+          <a:ln/>
+        </p:spPr>
+        <p:txBody>
+          <a:bodyPr wrap="square" rtlCol="0" anchor="t"/>
+          <a:lstStyle/>
+          <a:p>
+            <a:pPr indent="0" marL="0">
+              <a:lnSpc>
+                <a:spcPct val="112000"/>
+              </a:lnSpc>
+              <a:buNone/>
+            </a:pPr>
+            <a:r>
+              <a:rPr lang="en-US" sz="1800" dirty="0">
+                <a:solidFill>
+                  <a:srgbClr val="6B7480"/>
+                </a:solidFill>
+                <a:latin typeface="Calibri" pitchFamily="34" charset="0"/>
+                <a:ea typeface="Calibri" pitchFamily="34" charset="-122"/>
+                <a:cs typeface="Calibri" pitchFamily="34" charset="-120"/>
+              </a:rPr>
+              <a:t>Every SQL query this course wrote was silently run through a query optimizer choosing how to execute the relational algebra behind it — which index, which join order.</a:t>
+            </a:r>
+            <a:endParaRPr lang="en-US" sz="1800" dirty="0"/>
           </a:p>
         </p:txBody>
       </p:sp>
@@ -5680,7 +7581,7 @@
               <a:buNone/>
             </a:pPr>
             <a:r>
-              <a:rPr lang="en-US" sz="1500" b="1" dirty="0">
+              <a:rPr lang="en-US" sz="2000" b="1" dirty="0">
                 <a:solidFill>
                   <a:srgbClr val="14181C"/>
                 </a:solidFill>
@@ -5690,7 +7591,7 @@
               </a:rPr>
               <a:t>1</a:t>
             </a:r>
-            <a:endParaRPr lang="en-US" sz="1500" dirty="0"/>
+            <a:endParaRPr lang="en-US" sz="2000" dirty="0"/>
           </a:p>
         </p:txBody>
       </p:sp>
@@ -5719,7 +7620,7 @@
               <a:buNone/>
             </a:pPr>
             <a:r>
-              <a:rPr lang="en-US" sz="1450" dirty="0">
+              <a:rPr lang="en-US" sz="1800" dirty="0">
                 <a:solidFill>
                   <a:srgbClr val="1F2429"/>
                 </a:solidFill>
@@ -5729,7 +7630,7 @@
               </a:rPr>
               <a:t>One running example, threaded through all 8 units</a:t>
             </a:r>
-            <a:endParaRPr lang="en-US" sz="1450" dirty="0"/>
+            <a:endParaRPr lang="en-US" sz="1800" dirty="0"/>
           </a:p>
         </p:txBody>
       </p:sp>
@@ -5778,7 +7679,7 @@
               <a:buNone/>
             </a:pPr>
             <a:r>
-              <a:rPr lang="en-US" sz="1500" b="1" dirty="0">
+              <a:rPr lang="en-US" sz="2000" b="1" dirty="0">
                 <a:solidFill>
                   <a:srgbClr val="14181C"/>
                 </a:solidFill>
@@ -5788,7 +7689,7 @@
               </a:rPr>
               <a:t>2</a:t>
             </a:r>
-            <a:endParaRPr lang="en-US" sz="1500" dirty="0"/>
+            <a:endParaRPr lang="en-US" sz="2000" dirty="0"/>
           </a:p>
         </p:txBody>
       </p:sp>
@@ -5817,7 +7718,7 @@
               <a:buNone/>
             </a:pPr>
             <a:r>
-              <a:rPr lang="en-US" sz="1450" dirty="0">
+              <a:rPr lang="en-US" sz="1800" dirty="0">
                 <a:solidFill>
                   <a:srgbClr val="1F2429"/>
                 </a:solidFill>
@@ -5827,7 +7728,7 @@
               </a:rPr>
               <a:t>Units 1–3: Foundations, the Relational Model, Algebra &amp; Calculus</a:t>
             </a:r>
-            <a:endParaRPr lang="en-US" sz="1450" dirty="0"/>
+            <a:endParaRPr lang="en-US" sz="1800" dirty="0"/>
           </a:p>
         </p:txBody>
       </p:sp>
@@ -5876,7 +7777,7 @@
               <a:buNone/>
             </a:pPr>
             <a:r>
-              <a:rPr lang="en-US" sz="1500" b="1" dirty="0">
+              <a:rPr lang="en-US" sz="2000" b="1" dirty="0">
                 <a:solidFill>
                   <a:srgbClr val="14181C"/>
                 </a:solidFill>
@@ -5886,7 +7787,7 @@
               </a:rPr>
               <a:t>3</a:t>
             </a:r>
-            <a:endParaRPr lang="en-US" sz="1500" dirty="0"/>
+            <a:endParaRPr lang="en-US" sz="2000" dirty="0"/>
           </a:p>
         </p:txBody>
       </p:sp>
@@ -5915,7 +7816,7 @@
               <a:buNone/>
             </a:pPr>
             <a:r>
-              <a:rPr lang="en-US" sz="1450" dirty="0">
+              <a:rPr lang="en-US" sz="1800" dirty="0">
                 <a:solidFill>
                   <a:srgbClr val="1F2429"/>
                 </a:solidFill>
@@ -5925,7 +7826,7 @@
               </a:rPr>
               <a:t>Units 4–5: ER/EER Modeling and Normalization</a:t>
             </a:r>
-            <a:endParaRPr lang="en-US" sz="1450" dirty="0"/>
+            <a:endParaRPr lang="en-US" sz="1800" dirty="0"/>
           </a:p>
         </p:txBody>
       </p:sp>
@@ -5974,7 +7875,7 @@
               <a:buNone/>
             </a:pPr>
             <a:r>
-              <a:rPr lang="en-US" sz="1500" b="1" dirty="0">
+              <a:rPr lang="en-US" sz="2000" b="1" dirty="0">
                 <a:solidFill>
                   <a:srgbClr val="14181C"/>
                 </a:solidFill>
@@ -5984,7 +7885,7 @@
               </a:rPr>
               <a:t>4</a:t>
             </a:r>
-            <a:endParaRPr lang="en-US" sz="1500" dirty="0"/>
+            <a:endParaRPr lang="en-US" sz="2000" dirty="0"/>
           </a:p>
         </p:txBody>
       </p:sp>
@@ -6013,7 +7914,7 @@
               <a:buNone/>
             </a:pPr>
             <a:r>
-              <a:rPr lang="en-US" sz="1450" dirty="0">
+              <a:rPr lang="en-US" sz="1800" dirty="0">
                 <a:solidFill>
                   <a:srgbClr val="1F2429"/>
                 </a:solidFill>
@@ -6023,7 +7924,7 @@
               </a:rPr>
               <a:t>Unit 6: Views, Security, and Indexing</a:t>
             </a:r>
-            <a:endParaRPr lang="en-US" sz="1450" dirty="0"/>
+            <a:endParaRPr lang="en-US" sz="1800" dirty="0"/>
           </a:p>
         </p:txBody>
       </p:sp>
@@ -6072,7 +7973,7 @@
               <a:buNone/>
             </a:pPr>
             <a:r>
-              <a:rPr lang="en-US" sz="1500" b="1" dirty="0">
+              <a:rPr lang="en-US" sz="2000" b="1" dirty="0">
                 <a:solidFill>
                   <a:srgbClr val="14181C"/>
                 </a:solidFill>
@@ -6082,7 +7983,7 @@
               </a:rPr>
               <a:t>5</a:t>
             </a:r>
-            <a:endParaRPr lang="en-US" sz="1500" dirty="0"/>
+            <a:endParaRPr lang="en-US" sz="2000" dirty="0"/>
           </a:p>
         </p:txBody>
       </p:sp>
@@ -6111,7 +8012,7 @@
               <a:buNone/>
             </a:pPr>
             <a:r>
-              <a:rPr lang="en-US" sz="1450" dirty="0">
+              <a:rPr lang="en-US" sz="1800" dirty="0">
                 <a:solidFill>
                   <a:srgbClr val="1F2429"/>
                 </a:solidFill>
@@ -6121,7 +8022,7 @@
               </a:rPr>
               <a:t>Unit 7: NoSQL and MongoDB</a:t>
             </a:r>
-            <a:endParaRPr lang="en-US" sz="1450" dirty="0"/>
+            <a:endParaRPr lang="en-US" sz="1800" dirty="0"/>
           </a:p>
         </p:txBody>
       </p:sp>
@@ -6170,7 +8071,7 @@
               <a:buNone/>
             </a:pPr>
             <a:r>
-              <a:rPr lang="en-US" sz="1500" b="1" dirty="0">
+              <a:rPr lang="en-US" sz="2000" b="1" dirty="0">
                 <a:solidFill>
                   <a:srgbClr val="14181C"/>
                 </a:solidFill>
@@ -6180,7 +8081,7 @@
               </a:rPr>
               <a:t>6</a:t>
             </a:r>
-            <a:endParaRPr lang="en-US" sz="1500" dirty="0"/>
+            <a:endParaRPr lang="en-US" sz="2000" dirty="0"/>
           </a:p>
         </p:txBody>
       </p:sp>
@@ -6209,7 +8110,7 @@
               <a:buNone/>
             </a:pPr>
             <a:r>
-              <a:rPr lang="en-US" sz="1450" dirty="0">
+              <a:rPr lang="en-US" sz="1800" dirty="0">
                 <a:solidFill>
                   <a:srgbClr val="1F2429"/>
                 </a:solidFill>
@@ -6219,7 +8120,7 @@
               </a:rPr>
               <a:t>Unit 8: Transaction Management</a:t>
             </a:r>
-            <a:endParaRPr lang="en-US" sz="1450" dirty="0"/>
+            <a:endParaRPr lang="en-US" sz="1800" dirty="0"/>
           </a:p>
         </p:txBody>
       </p:sp>
@@ -6268,7 +8169,7 @@
               <a:buNone/>
             </a:pPr>
             <a:r>
-              <a:rPr lang="en-US" sz="1500" b="1" dirty="0">
+              <a:rPr lang="en-US" sz="2000" b="1" dirty="0">
                 <a:solidFill>
                   <a:srgbClr val="14181C"/>
                 </a:solidFill>
@@ -6278,7 +8179,7 @@
               </a:rPr>
               <a:t>7</a:t>
             </a:r>
-            <a:endParaRPr lang="en-US" sz="1500" dirty="0"/>
+            <a:endParaRPr lang="en-US" sz="2000" dirty="0"/>
           </a:p>
         </p:txBody>
       </p:sp>
@@ -6307,7 +8208,7 @@
               <a:buNone/>
             </a:pPr>
             <a:r>
-              <a:rPr lang="en-US" sz="1450" dirty="0">
+              <a:rPr lang="en-US" sz="1800" dirty="0">
                 <a:solidFill>
                   <a:srgbClr val="1F2429"/>
                 </a:solidFill>
@@ -6317,7 +8218,7 @@
               </a:rPr>
               <a:t>The whole course as one thread, and where it leads next</a:t>
             </a:r>
-            <a:endParaRPr lang="en-US" sz="1450" dirty="0"/>
+            <a:endParaRPr lang="en-US" sz="1800" dirty="0"/>
           </a:p>
         </p:txBody>
       </p:sp>
@@ -6346,7 +8247,7 @@
               <a:buNone/>
             </a:pPr>
             <a:r>
-              <a:rPr lang="en-US" sz="1000" u="sng" dirty="0">
+              <a:rPr lang="en-US" sz="1200" u="sng" dirty="0">
                 <a:solidFill>
                   <a:srgbClr val="8A939B"/>
                 </a:solidFill>
@@ -6367,7 +8268,7 @@
               <a:buNone/>
             </a:pPr>
             <a:r>
-              <a:rPr lang="en-US" sz="1000" dirty="0">
+              <a:rPr lang="en-US" sz="1200" dirty="0">
                 <a:solidFill>
                   <a:srgbClr val="8A939B"/>
                 </a:solidFill>
@@ -6377,7 +8278,7 @@
               </a:rPr>
               <a:t>  ·  2</a:t>
             </a:r>
-            <a:endParaRPr lang="en-US" sz="1000" dirty="0"/>
+            <a:endParaRPr lang="en-US" sz="1200" dirty="0"/>
           </a:p>
         </p:txBody>
       </p:sp>
@@ -6516,7 +8417,7 @@
               <a:buNone/>
             </a:pPr>
             <a:r>
-              <a:rPr lang="en-US" sz="1000" u="sng" dirty="0">
+              <a:rPr lang="en-US" sz="1200" u="sng" dirty="0">
                 <a:solidFill>
                   <a:srgbClr val="8A939B"/>
                 </a:solidFill>
@@ -6537,7 +8438,7 @@
               <a:buNone/>
             </a:pPr>
             <a:r>
-              <a:rPr lang="en-US" sz="1000" dirty="0">
+              <a:rPr lang="en-US" sz="1200" dirty="0">
                 <a:solidFill>
                   <a:srgbClr val="8A939B"/>
                 </a:solidFill>
@@ -6547,7 +8448,7 @@
               </a:rPr>
               <a:t>  ·  3</a:t>
             </a:r>
-            <a:endParaRPr lang="en-US" sz="1000" dirty="0"/>
+            <a:endParaRPr lang="en-US" sz="1200" dirty="0"/>
           </a:p>
         </p:txBody>
       </p:sp>
@@ -6579,7 +8480,7 @@
               <a:buNone/>
             </a:pPr>
             <a:r>
-              <a:rPr lang="en-US" sz="1550" dirty="0">
+              <a:rPr lang="en-US" sz="1800" dirty="0">
                 <a:solidFill>
                   <a:srgbClr val="1F2429"/>
                 </a:solidFill>
@@ -6589,7 +8490,7 @@
               </a:rPr>
               <a:t>A university needs to record which students are enrolled in which courses. It's small enough to hold in your head in full, and rich enough that every unit of this course had something genuine to say about it.</a:t>
             </a:r>
-            <a:endParaRPr lang="en-US" sz="1550" dirty="0"/>
+            <a:endParaRPr lang="en-US" sz="1800" dirty="0"/>
           </a:p>
         </p:txBody>
       </p:sp>
@@ -6621,7 +8522,7 @@
               <a:buNone/>
             </a:pPr>
             <a:r>
-              <a:rPr lang="en-US" sz="1300" i="1" dirty="0">
+              <a:rPr lang="en-US" sz="1800" i="1" dirty="0">
                 <a:solidFill>
                   <a:srgbClr val="6B7480"/>
                 </a:solidFill>
@@ -6631,7 +8532,7 @@
               </a:rPr>
               <a:t>Thirty-one lectures ago, this course opened with a simple question: what actually is a database, and why isn't “just a bunch of files” good enough? This lecture walks back across all eight units to answer it in full.</a:t>
             </a:r>
-            <a:endParaRPr lang="en-US" sz="1300" dirty="0"/>
+            <a:endParaRPr lang="en-US" sz="1800" dirty="0"/>
           </a:p>
         </p:txBody>
       </p:sp>
@@ -6682,7 +8583,7 @@
               <a:buNone/>
             </a:pPr>
             <a:r>
-              <a:rPr lang="en-US" sz="1100" b="1" spc="100" kern="0" dirty="0">
+              <a:rPr lang="en-US" sz="2000" b="1" spc="100" kern="0" dirty="0">
                 <a:solidFill>
                   <a:srgbClr val="2FE6C4"/>
                 </a:solidFill>
@@ -6692,7 +8593,7 @@
               </a:rPr>
               <a:t>STUDENT — ENROLLS (M:N) — COURSE</a:t>
             </a:r>
-            <a:endParaRPr lang="en-US" sz="1100" dirty="0"/>
+            <a:endParaRPr lang="en-US" sz="2000" dirty="0"/>
           </a:p>
         </p:txBody>
       </p:sp>
@@ -6724,7 +8625,7 @@
               <a:buNone/>
             </a:pPr>
             <a:r>
-              <a:rPr lang="en-US" sz="1350" dirty="0">
+              <a:rPr lang="en-US" sz="1800" dirty="0">
                 <a:solidFill>
                   <a:srgbClr val="FFFFFF"/>
                 </a:solidFill>
@@ -6734,7 +8635,7 @@
               </a:rPr>
               <a:t>•  studentId, name, major</a:t>
             </a:r>
-            <a:endParaRPr lang="en-US" sz="1350" dirty="0"/>
+            <a:endParaRPr lang="en-US" sz="1800" dirty="0"/>
           </a:p>
           <a:p>
             <a:pPr indent="0" marL="0">
@@ -6744,7 +8645,7 @@
               <a:buNone/>
             </a:pPr>
             <a:r>
-              <a:rPr lang="en-US" sz="1350" dirty="0">
+              <a:rPr lang="en-US" sz="1800" dirty="0">
                 <a:solidFill>
                   <a:srgbClr val="FFFFFF"/>
                 </a:solidFill>
@@ -6754,7 +8655,7 @@
               </a:rPr>
               <a:t>•  courseId, title, seatsAvailable</a:t>
             </a:r>
-            <a:endParaRPr lang="en-US" sz="1350" dirty="0"/>
+            <a:endParaRPr lang="en-US" sz="1800" dirty="0"/>
           </a:p>
           <a:p>
             <a:pPr indent="0" marL="0">
@@ -6764,7 +8665,7 @@
               <a:buNone/>
             </a:pPr>
             <a:r>
-              <a:rPr lang="en-US" sz="1350" dirty="0">
+              <a:rPr lang="en-US" sz="1800" dirty="0">
                 <a:solidFill>
                   <a:srgbClr val="FFFFFF"/>
                 </a:solidFill>
@@ -6774,7 +8675,7 @@
               </a:rPr>
               <a:t>•  Enrollment(studentId, courseId, grade)</a:t>
             </a:r>
-            <a:endParaRPr lang="en-US" sz="1350" dirty="0"/>
+            <a:endParaRPr lang="en-US" sz="1800" dirty="0"/>
           </a:p>
           <a:p>
             <a:pPr indent="0" marL="0">
@@ -6783,7 +8684,7 @@
               </a:lnSpc>
               <a:buNone/>
             </a:pPr>
-            <a:endParaRPr lang="en-US" sz="1350" dirty="0"/>
+            <a:endParaRPr lang="en-US" sz="1800" dirty="0"/>
           </a:p>
           <a:p>
             <a:pPr indent="0" marL="0">
@@ -6793,7 +8694,7 @@
               <a:buNone/>
             </a:pPr>
             <a:r>
-              <a:rPr lang="en-US" sz="1350" dirty="0">
+              <a:rPr lang="en-US" sz="1800" dirty="0">
                 <a:solidFill>
                   <a:srgbClr val="FFFFFF"/>
                 </a:solidFill>
@@ -6803,7 +8704,7 @@
               </a:rPr>
               <a:t>“Which CS students are enrolled</a:t>
             </a:r>
-            <a:endParaRPr lang="en-US" sz="1350" dirty="0"/>
+            <a:endParaRPr lang="en-US" sz="1800" dirty="0"/>
           </a:p>
           <a:p>
             <a:pPr indent="0" marL="0">
@@ -6813,7 +8714,7 @@
               <a:buNone/>
             </a:pPr>
             <a:r>
-              <a:rPr lang="en-US" sz="1350" dirty="0">
+              <a:rPr lang="en-US" sz="1800" dirty="0">
                 <a:solidFill>
                   <a:srgbClr val="FFFFFF"/>
                 </a:solidFill>
@@ -6823,7 +8724,7 @@
               </a:rPr>
               <a:t>in a Database Systems course?”</a:t>
             </a:r>
-            <a:endParaRPr lang="en-US" sz="1350" dirty="0"/>
+            <a:endParaRPr lang="en-US" sz="1800" dirty="0"/>
           </a:p>
         </p:txBody>
       </p:sp>
@@ -6962,7 +8863,7 @@
               <a:buNone/>
             </a:pPr>
             <a:r>
-              <a:rPr lang="en-US" sz="1000" u="sng" dirty="0">
+              <a:rPr lang="en-US" sz="1200" u="sng" dirty="0">
                 <a:solidFill>
                   <a:srgbClr val="8A939B"/>
                 </a:solidFill>
@@ -6983,7 +8884,7 @@
               <a:buNone/>
             </a:pPr>
             <a:r>
-              <a:rPr lang="en-US" sz="1000" dirty="0">
+              <a:rPr lang="en-US" sz="1200" dirty="0">
                 <a:solidFill>
                   <a:srgbClr val="8A939B"/>
                 </a:solidFill>
@@ -6993,7 +8894,7 @@
               </a:rPr>
               <a:t>  ·  4</a:t>
             </a:r>
-            <a:endParaRPr lang="en-US" sz="1000" dirty="0"/>
+            <a:endParaRPr lang="en-US" sz="1200" dirty="0"/>
           </a:p>
         </p:txBody>
       </p:sp>
@@ -7025,7 +8926,7 @@
               <a:buNone/>
             </a:pPr>
             <a:r>
-              <a:rPr lang="en-US" sz="1450" dirty="0">
+              <a:rPr lang="en-US" sz="1800" dirty="0">
                 <a:solidFill>
                   <a:srgbClr val="1F2429"/>
                 </a:solidFill>
@@ -7035,7 +8936,7 @@
               </a:rPr>
               <a:t>A file-based approach (a plain spreadsheet of student records, another of course records, no coordination) suffers from redundancy, inconsistency, and poor access control. The database approach fixes this with one layer of software between every application and the raw data.</a:t>
             </a:r>
-            <a:endParaRPr lang="en-US" sz="1450" dirty="0"/>
+            <a:endParaRPr lang="en-US" sz="1800" dirty="0"/>
           </a:p>
         </p:txBody>
       </p:sp>
@@ -7118,7 +9019,7 @@
               <a:buNone/>
             </a:pPr>
             <a:r>
-              <a:rPr lang="en-US" sz="1350" b="1" dirty="0">
+              <a:rPr lang="en-US" sz="2000" b="1" dirty="0">
                 <a:solidFill>
                   <a:srgbClr val="1F2429"/>
                 </a:solidFill>
@@ -7128,7 +9029,7 @@
               </a:rPr>
               <a:t>File-Based Approach</a:t>
             </a:r>
-            <a:endParaRPr lang="en-US" sz="1350" dirty="0"/>
+            <a:endParaRPr lang="en-US" sz="2000" dirty="0"/>
           </a:p>
         </p:txBody>
       </p:sp>
@@ -7160,7 +9061,7 @@
               <a:buNone/>
             </a:pPr>
             <a:r>
-              <a:rPr lang="en-US" sz="1050" dirty="0">
+              <a:rPr lang="en-US" sz="1800" dirty="0">
                 <a:solidFill>
                   <a:srgbClr val="6B7480"/>
                 </a:solidFill>
@@ -7170,7 +9071,7 @@
               </a:rPr>
               <a:t>Each application owns its own files — redundancy, inconsistency, no shared control.</a:t>
             </a:r>
-            <a:endParaRPr lang="en-US" sz="1050" dirty="0"/>
+            <a:endParaRPr lang="en-US" sz="1800" dirty="0"/>
           </a:p>
         </p:txBody>
       </p:sp>
@@ -7277,7 +9178,7 @@
               <a:buNone/>
             </a:pPr>
             <a:r>
-              <a:rPr lang="en-US" sz="1350" b="1" dirty="0">
+              <a:rPr lang="en-US" sz="2000" b="1" dirty="0">
                 <a:solidFill>
                   <a:srgbClr val="1F2429"/>
                 </a:solidFill>
@@ -7287,7 +9188,7 @@
               </a:rPr>
               <a:t>Database Approach</a:t>
             </a:r>
-            <a:endParaRPr lang="en-US" sz="1350" dirty="0"/>
+            <a:endParaRPr lang="en-US" sz="2000" dirty="0"/>
           </a:p>
         </p:txBody>
       </p:sp>
@@ -7319,7 +9220,7 @@
               <a:buNone/>
             </a:pPr>
             <a:r>
-              <a:rPr lang="en-US" sz="1050" dirty="0">
+              <a:rPr lang="en-US" sz="1800" dirty="0">
                 <a:solidFill>
                   <a:srgbClr val="6B7480"/>
                 </a:solidFill>
@@ -7329,7 +9230,7 @@
               </a:rPr>
               <a:t>One shared repository, managed by a DBMS, used by many applications at once.</a:t>
             </a:r>
-            <a:endParaRPr lang="en-US" sz="1050" dirty="0"/>
+            <a:endParaRPr lang="en-US" sz="1800" dirty="0"/>
           </a:p>
         </p:txBody>
       </p:sp>
@@ -7468,7 +9369,7 @@
               <a:buNone/>
             </a:pPr>
             <a:r>
-              <a:rPr lang="en-US" sz="1000" u="sng" dirty="0">
+              <a:rPr lang="en-US" sz="1200" u="sng" dirty="0">
                 <a:solidFill>
                   <a:srgbClr val="8A939B"/>
                 </a:solidFill>
@@ -7489,7 +9390,7 @@
               <a:buNone/>
             </a:pPr>
             <a:r>
-              <a:rPr lang="en-US" sz="1000" dirty="0">
+              <a:rPr lang="en-US" sz="1200" dirty="0">
                 <a:solidFill>
                   <a:srgbClr val="8A939B"/>
                 </a:solidFill>
@@ -7499,7 +9400,7 @@
               </a:rPr>
               <a:t>  ·  5</a:t>
             </a:r>
-            <a:endParaRPr lang="en-US" sz="1000" dirty="0"/>
+            <a:endParaRPr lang="en-US" sz="1200" dirty="0"/>
           </a:p>
         </p:txBody>
       </p:sp>
@@ -7531,7 +9432,7 @@
               <a:buNone/>
             </a:pPr>
             <a:r>
-              <a:rPr lang="en-US" sz="1450" dirty="0">
+              <a:rPr lang="en-US" sz="1800" dirty="0">
                 <a:solidFill>
                   <a:srgbClr val="1F2429"/>
                 </a:solidFill>
@@ -7541,7 +9442,7 @@
               </a:rPr>
               <a:t>Data lives in relations (tables) — sets of tuples (rows) over a fixed set of attributes (columns). Integrity constraints keep a relation trustworthy: domain constraints, entity integrity (no NULL primary key), and referential integrity.</a:t>
             </a:r>
-            <a:endParaRPr lang="en-US" sz="1450" dirty="0"/>
+            <a:endParaRPr lang="en-US" sz="1800" dirty="0"/>
           </a:p>
         </p:txBody>
       </p:sp>
@@ -7570,7 +9471,7 @@
               <a:buNone/>
             </a:pPr>
             <a:r>
-              <a:rPr lang="en-US" sz="1250" b="1" dirty="0">
+              <a:rPr lang="en-US" sz="2000" b="1" dirty="0">
                 <a:solidFill>
                   <a:srgbClr val="1F2429"/>
                 </a:solidFill>
@@ -7580,7 +9481,7 @@
               </a:rPr>
               <a:t>Student (studentId, name, major)</a:t>
             </a:r>
-            <a:endParaRPr lang="en-US" sz="1250" dirty="0"/>
+            <a:endParaRPr lang="en-US" sz="2000" dirty="0"/>
           </a:p>
         </p:txBody>
       </p:sp>
@@ -8283,7 +10184,7 @@
               <a:buNone/>
             </a:pPr>
             <a:r>
-              <a:rPr lang="en-US" sz="1200" i="1" dirty="0">
+              <a:rPr lang="en-US" sz="1800" i="1" dirty="0">
                 <a:solidFill>
                   <a:srgbClr val="6B7480"/>
                 </a:solidFill>
@@ -8293,7 +10194,7 @@
               </a:rPr>
               <a:t>Underlined = primary key</a:t>
             </a:r>
-            <a:endParaRPr lang="en-US" sz="1200" dirty="0"/>
+            <a:endParaRPr lang="en-US" sz="1800" dirty="0"/>
           </a:p>
           <a:p>
             <a:pPr indent="0" marL="0">
@@ -8302,7 +10203,7 @@
               </a:lnSpc>
               <a:buNone/>
             </a:pPr>
-            <a:endParaRPr lang="en-US" sz="1200" dirty="0"/>
+            <a:endParaRPr lang="en-US" sz="1800" dirty="0"/>
           </a:p>
           <a:p>
             <a:pPr indent="0" marL="0">
@@ -8312,7 +10213,7 @@
               <a:buNone/>
             </a:pPr>
             <a:r>
-              <a:rPr lang="en-US" sz="1200" i="1" dirty="0">
+              <a:rPr lang="en-US" sz="1800" i="1" dirty="0">
                 <a:solidFill>
                   <a:srgbClr val="6B7480"/>
                 </a:solidFill>
@@ -8322,7 +10223,7 @@
               </a:rPr>
               <a:t>Domain, entity, and referential integrity all apply to this one relation.</a:t>
             </a:r>
-            <a:endParaRPr lang="en-US" sz="1200" dirty="0"/>
+            <a:endParaRPr lang="en-US" sz="1800" dirty="0"/>
           </a:p>
         </p:txBody>
       </p:sp>
@@ -8461,7 +10362,7 @@
               <a:buNone/>
             </a:pPr>
             <a:r>
-              <a:rPr lang="en-US" sz="1000" u="sng" dirty="0">
+              <a:rPr lang="en-US" sz="1200" u="sng" dirty="0">
                 <a:solidFill>
                   <a:srgbClr val="8A939B"/>
                 </a:solidFill>
@@ -8482,7 +10383,7 @@
               <a:buNone/>
             </a:pPr>
             <a:r>
-              <a:rPr lang="en-US" sz="1000" dirty="0">
+              <a:rPr lang="en-US" sz="1200" dirty="0">
                 <a:solidFill>
                   <a:srgbClr val="8A939B"/>
                 </a:solidFill>
@@ -8492,7 +10393,7 @@
               </a:rPr>
               <a:t>  ·  6</a:t>
             </a:r>
-            <a:endParaRPr lang="en-US" sz="1000" dirty="0"/>
+            <a:endParaRPr lang="en-US" sz="1200" dirty="0"/>
           </a:p>
         </p:txBody>
       </p:sp>
@@ -8524,7 +10425,7 @@
               <a:buNone/>
             </a:pPr>
             <a:r>
-              <a:rPr lang="en-US" sz="1450" dirty="0">
+              <a:rPr lang="en-US" sz="1800" dirty="0">
                 <a:solidFill>
                   <a:srgbClr val="1F2429"/>
                 </a:solidFill>
@@ -8534,7 +10435,7 @@
               </a:rPr>
               <a:t>A formal query language built from a small set of operators — selection, projection, join, union, division — each taking whole relations as input and producing a relation as output. That's exactly what lets these operators compose.</a:t>
             </a:r>
-            <a:endParaRPr lang="en-US" sz="1450" dirty="0"/>
+            <a:endParaRPr lang="en-US" sz="1800" dirty="0"/>
           </a:p>
         </p:txBody>
       </p:sp>
@@ -8563,7 +10464,7 @@
               <a:buNone/>
             </a:pPr>
             <a:r>
-              <a:rPr lang="en-US" sz="1350" b="1" i="1" dirty="0">
+              <a:rPr lang="en-US" sz="1800" b="1" i="1" dirty="0">
                 <a:solidFill>
                   <a:srgbClr val="8B7FD9"/>
                 </a:solidFill>
@@ -8573,7 +10474,7 @@
               </a:rPr>
               <a:t>“Which Computer Science students are enrolled in a Database Systems course?”</a:t>
             </a:r>
-            <a:endParaRPr lang="en-US" sz="1350" dirty="0"/>
+            <a:endParaRPr lang="en-US" sz="1800" dirty="0"/>
           </a:p>
         </p:txBody>
       </p:sp>
@@ -8656,7 +10557,7 @@
               <a:buNone/>
             </a:pPr>
             <a:r>
-              <a:rPr lang="en-US" sz="1350" b="1" dirty="0">
+              <a:rPr lang="en-US" sz="2000" b="1" dirty="0">
                 <a:solidFill>
                   <a:srgbClr val="1F2429"/>
                 </a:solidFill>
@@ -8666,7 +10567,7 @@
               </a:rPr>
               <a:t>σ (Selection)</a:t>
             </a:r>
-            <a:endParaRPr lang="en-US" sz="1350" dirty="0"/>
+            <a:endParaRPr lang="en-US" sz="2000" dirty="0"/>
           </a:p>
         </p:txBody>
       </p:sp>
@@ -8698,7 +10599,7 @@
               <a:buNone/>
             </a:pPr>
             <a:r>
-              <a:rPr lang="en-US" sz="1050" dirty="0">
+              <a:rPr lang="en-US" sz="1800" dirty="0">
                 <a:solidFill>
                   <a:srgbClr val="6B7480"/>
                 </a:solidFill>
@@ -8708,7 +10609,7 @@
               </a:rPr>
               <a:t>major = 'Computer Science'</a:t>
             </a:r>
-            <a:endParaRPr lang="en-US" sz="1050" dirty="0"/>
+            <a:endParaRPr lang="en-US" sz="1800" dirty="0"/>
           </a:p>
         </p:txBody>
       </p:sp>
@@ -8815,7 +10716,7 @@
               <a:buNone/>
             </a:pPr>
             <a:r>
-              <a:rPr lang="en-US" sz="1350" b="1" dirty="0">
+              <a:rPr lang="en-US" sz="2000" b="1" dirty="0">
                 <a:solidFill>
                   <a:srgbClr val="1F2429"/>
                 </a:solidFill>
@@ -8825,7 +10726,7 @@
               </a:rPr>
               <a:t>⋈ (Join)</a:t>
             </a:r>
-            <a:endParaRPr lang="en-US" sz="1350" dirty="0"/>
+            <a:endParaRPr lang="en-US" sz="2000" dirty="0"/>
           </a:p>
         </p:txBody>
       </p:sp>
@@ -8857,7 +10758,7 @@
               <a:buNone/>
             </a:pPr>
             <a:r>
-              <a:rPr lang="en-US" sz="1050" dirty="0">
+              <a:rPr lang="en-US" sz="1800" dirty="0">
                 <a:solidFill>
                   <a:srgbClr val="6B7480"/>
                 </a:solidFill>
@@ -8867,7 +10768,7 @@
               </a:rPr>
               <a:t>Student ⋈ Enrollment ⋈ Course</a:t>
             </a:r>
-            <a:endParaRPr lang="en-US" sz="1050" dirty="0"/>
+            <a:endParaRPr lang="en-US" sz="1800" dirty="0"/>
           </a:p>
         </p:txBody>
       </p:sp>
@@ -8974,7 +10875,7 @@
               <a:buNone/>
             </a:pPr>
             <a:r>
-              <a:rPr lang="en-US" sz="1350" b="1" dirty="0">
+              <a:rPr lang="en-US" sz="2000" b="1" dirty="0">
                 <a:solidFill>
                   <a:srgbClr val="1F2429"/>
                 </a:solidFill>
@@ -8984,7 +10885,7 @@
               </a:rPr>
               <a:t>π (Projection)</a:t>
             </a:r>
-            <a:endParaRPr lang="en-US" sz="1350" dirty="0"/>
+            <a:endParaRPr lang="en-US" sz="2000" dirty="0"/>
           </a:p>
         </p:txBody>
       </p:sp>
@@ -9016,7 +10917,7 @@
               <a:buNone/>
             </a:pPr>
             <a:r>
-              <a:rPr lang="en-US" sz="1050" dirty="0">
+              <a:rPr lang="en-US" sz="1800" dirty="0">
                 <a:solidFill>
                   <a:srgbClr val="6B7480"/>
                 </a:solidFill>
@@ -9026,7 +10927,7 @@
               </a:rPr>
               <a:t>name, courseTitle</a:t>
             </a:r>
-            <a:endParaRPr lang="en-US" sz="1050" dirty="0"/>
+            <a:endParaRPr lang="en-US" sz="1800" dirty="0"/>
           </a:p>
         </p:txBody>
       </p:sp>
@@ -9165,7 +11066,7 @@
               <a:buNone/>
             </a:pPr>
             <a:r>
-              <a:rPr lang="en-US" sz="1000" u="sng" dirty="0">
+              <a:rPr lang="en-US" sz="1200" u="sng" dirty="0">
                 <a:solidFill>
                   <a:srgbClr val="8A939B"/>
                 </a:solidFill>
@@ -9186,7 +11087,7 @@
               <a:buNone/>
             </a:pPr>
             <a:r>
-              <a:rPr lang="en-US" sz="1000" dirty="0">
+              <a:rPr lang="en-US" sz="1200" dirty="0">
                 <a:solidFill>
                   <a:srgbClr val="8A939B"/>
                 </a:solidFill>
@@ -9196,7 +11097,7 @@
               </a:rPr>
               <a:t>  ·  7</a:t>
             </a:r>
-            <a:endParaRPr lang="en-US" sz="1000" dirty="0"/>
+            <a:endParaRPr lang="en-US" sz="1200" dirty="0"/>
           </a:p>
         </p:txBody>
       </p:sp>
@@ -9228,7 +11129,7 @@
               <a:buNone/>
             </a:pPr>
             <a:r>
-              <a:rPr lang="en-US" sz="1450" dirty="0">
+              <a:rPr lang="en-US" sz="1800" dirty="0">
                 <a:solidFill>
                   <a:srgbClr val="1F2429"/>
                 </a:solidFill>
@@ -9238,7 +11139,7 @@
               </a:rPr>
               <a:t>The running example first takes shape here, at the conceptual level: Student and Course as entities, connected by an Enrolls relationship with M:N cardinality — refined further with EER tools like specialization where needed.</a:t>
             </a:r>
-            <a:endParaRPr lang="en-US" sz="1450" dirty="0"/>
+            <a:endParaRPr lang="en-US" sz="1800" dirty="0"/>
           </a:p>
         </p:txBody>
       </p:sp>
@@ -9294,7 +11195,7 @@
               <a:buNone/>
             </a:pPr>
             <a:r>
-              <a:rPr lang="en-US" sz="1600" b="1" dirty="0">
+              <a:rPr lang="en-US" sz="2000" b="1" dirty="0">
                 <a:solidFill>
                   <a:srgbClr val="1F2429"/>
                 </a:solidFill>
@@ -9304,7 +11205,7 @@
               </a:rPr>
               <a:t>Student</a:t>
             </a:r>
-            <a:endParaRPr lang="en-US" sz="1600" dirty="0"/>
+            <a:endParaRPr lang="en-US" sz="2000" dirty="0"/>
           </a:p>
         </p:txBody>
       </p:sp>
@@ -9336,7 +11237,7 @@
               <a:buNone/>
             </a:pPr>
             <a:r>
-              <a:rPr lang="en-US" sz="1300" dirty="0">
+              <a:rPr lang="en-US" sz="1800" dirty="0">
                 <a:solidFill>
                   <a:srgbClr val="6B7480"/>
                 </a:solidFill>
@@ -9346,7 +11247,7 @@
               </a:rPr>
               <a:t>studentId (PK)</a:t>
             </a:r>
-            <a:endParaRPr lang="en-US" sz="1300" dirty="0"/>
+            <a:endParaRPr lang="en-US" sz="1800" dirty="0"/>
           </a:p>
           <a:p>
             <a:pPr indent="0" marL="0">
@@ -9356,7 +11257,7 @@
               <a:buNone/>
             </a:pPr>
             <a:r>
-              <a:rPr lang="en-US" sz="1300" dirty="0">
+              <a:rPr lang="en-US" sz="1800" dirty="0">
                 <a:solidFill>
                   <a:srgbClr val="6B7480"/>
                 </a:solidFill>
@@ -9366,7 +11267,7 @@
               </a:rPr>
               <a:t>name</a:t>
             </a:r>
-            <a:endParaRPr lang="en-US" sz="1300" dirty="0"/>
+            <a:endParaRPr lang="en-US" sz="1800" dirty="0"/>
           </a:p>
           <a:p>
             <a:pPr indent="0" marL="0">
@@ -9376,7 +11277,7 @@
               <a:buNone/>
             </a:pPr>
             <a:r>
-              <a:rPr lang="en-US" sz="1300" dirty="0">
+              <a:rPr lang="en-US" sz="1800" dirty="0">
                 <a:solidFill>
                   <a:srgbClr val="6B7480"/>
                 </a:solidFill>
@@ -9386,7 +11287,7 @@
               </a:rPr>
               <a:t>major</a:t>
             </a:r>
-            <a:endParaRPr lang="en-US" sz="1300" dirty="0"/>
+            <a:endParaRPr lang="en-US" sz="1800" dirty="0"/>
           </a:p>
         </p:txBody>
       </p:sp>
@@ -9442,7 +11343,7 @@
               <a:buNone/>
             </a:pPr>
             <a:r>
-              <a:rPr lang="en-US" sz="1600" b="1" dirty="0">
+              <a:rPr lang="en-US" sz="2000" b="1" dirty="0">
                 <a:solidFill>
                   <a:srgbClr val="1F2429"/>
                 </a:solidFill>
@@ -9452,7 +11353,7 @@
               </a:rPr>
               <a:t>Course</a:t>
             </a:r>
-            <a:endParaRPr lang="en-US" sz="1600" dirty="0"/>
+            <a:endParaRPr lang="en-US" sz="2000" dirty="0"/>
           </a:p>
         </p:txBody>
       </p:sp>
@@ -9484,7 +11385,7 @@
               <a:buNone/>
             </a:pPr>
             <a:r>
-              <a:rPr lang="en-US" sz="1300" dirty="0">
+              <a:rPr lang="en-US" sz="1800" dirty="0">
                 <a:solidFill>
                   <a:srgbClr val="6B7480"/>
                 </a:solidFill>
@@ -9494,7 +11395,7 @@
               </a:rPr>
               <a:t>courseId (PK)</a:t>
             </a:r>
-            <a:endParaRPr lang="en-US" sz="1300" dirty="0"/>
+            <a:endParaRPr lang="en-US" sz="1800" dirty="0"/>
           </a:p>
           <a:p>
             <a:pPr indent="0" marL="0">
@@ -9504,7 +11405,7 @@
               <a:buNone/>
             </a:pPr>
             <a:r>
-              <a:rPr lang="en-US" sz="1300" dirty="0">
+              <a:rPr lang="en-US" sz="1800" dirty="0">
                 <a:solidFill>
                   <a:srgbClr val="6B7480"/>
                 </a:solidFill>
@@ -9514,7 +11415,7 @@
               </a:rPr>
               <a:t>title</a:t>
             </a:r>
-            <a:endParaRPr lang="en-US" sz="1300" dirty="0"/>
+            <a:endParaRPr lang="en-US" sz="1800" dirty="0"/>
           </a:p>
           <a:p>
             <a:pPr indent="0" marL="0">
@@ -9524,7 +11425,7 @@
               <a:buNone/>
             </a:pPr>
             <a:r>
-              <a:rPr lang="en-US" sz="1300" dirty="0">
+              <a:rPr lang="en-US" sz="1800" dirty="0">
                 <a:solidFill>
                   <a:srgbClr val="6B7480"/>
                 </a:solidFill>
@@ -9534,7 +11435,7 @@
               </a:rPr>
               <a:t>seatsAvailable</a:t>
             </a:r>
-            <a:endParaRPr lang="en-US" sz="1300" dirty="0"/>
+            <a:endParaRPr lang="en-US" sz="1800" dirty="0"/>
           </a:p>
         </p:txBody>
       </p:sp>
@@ -9608,7 +11509,7 @@
               <a:buNone/>
             </a:pPr>
             <a:r>
-              <a:rPr lang="en-US" sz="1400" b="1" dirty="0">
+              <a:rPr lang="en-US" sz="2000" b="1" dirty="0">
                 <a:solidFill>
                   <a:srgbClr val="FFFFFF"/>
                 </a:solidFill>
@@ -9618,7 +11519,7 @@
               </a:rPr>
               <a:t>Enrolls</a:t>
             </a:r>
-            <a:endParaRPr lang="en-US" sz="1400" dirty="0"/>
+            <a:endParaRPr lang="en-US" sz="2000" dirty="0"/>
           </a:p>
         </p:txBody>
       </p:sp>
@@ -9667,7 +11568,7 @@
               <a:buNone/>
             </a:pPr>
             <a:r>
-              <a:rPr lang="en-US" sz="1200" b="1" dirty="0">
+              <a:rPr lang="en-US" sz="2000" b="1" dirty="0">
                 <a:solidFill>
                   <a:srgbClr val="14181C"/>
                 </a:solidFill>
@@ -9677,7 +11578,7 @@
               </a:rPr>
               <a:t>M</a:t>
             </a:r>
-            <a:endParaRPr lang="en-US" sz="1200" dirty="0"/>
+            <a:endParaRPr lang="en-US" sz="2000" dirty="0"/>
           </a:p>
         </p:txBody>
       </p:sp>
@@ -9726,7 +11627,7 @@
               <a:buNone/>
             </a:pPr>
             <a:r>
-              <a:rPr lang="en-US" sz="1200" b="1" dirty="0">
+              <a:rPr lang="en-US" sz="2000" b="1" dirty="0">
                 <a:solidFill>
                   <a:srgbClr val="14181C"/>
                 </a:solidFill>
@@ -9736,7 +11637,7 @@
               </a:rPr>
               <a:t>N</a:t>
             </a:r>
-            <a:endParaRPr lang="en-US" sz="1200" dirty="0"/>
+            <a:endParaRPr lang="en-US" sz="2000" dirty="0"/>
           </a:p>
         </p:txBody>
       </p:sp>
@@ -9844,7 +11745,7 @@
                 <a:ea typeface="Calibri" pitchFamily="34" charset="-122"/>
                 <a:cs typeface="Calibri" pitchFamily="34" charset="-120"/>
               </a:rPr>
-              <a:t>Unit 5 — Normalization</a:t>
+              <a:t>Unit 5 — Normalization, Part 1: The Problem</a:t>
             </a:r>
             <a:endParaRPr lang="en-US" sz="2500" dirty="0"/>
           </a:p>
@@ -9875,7 +11776,7 @@
               <a:buNone/>
             </a:pPr>
             <a:r>
-              <a:rPr lang="en-US" sz="1000" u="sng" dirty="0">
+              <a:rPr lang="en-US" sz="1200" u="sng" dirty="0">
                 <a:solidFill>
                   <a:srgbClr val="8A939B"/>
                 </a:solidFill>
@@ -9896,7 +11797,7 @@
               <a:buNone/>
             </a:pPr>
             <a:r>
-              <a:rPr lang="en-US" sz="1000" dirty="0">
+              <a:rPr lang="en-US" sz="1200" dirty="0">
                 <a:solidFill>
                   <a:srgbClr val="8A939B"/>
                 </a:solidFill>
@@ -9906,7 +11807,7 @@
               </a:rPr>
               <a:t>  ·  8</a:t>
             </a:r>
-            <a:endParaRPr lang="en-US" sz="1000" dirty="0"/>
+            <a:endParaRPr lang="en-US" sz="1200" dirty="0"/>
           </a:p>
         </p:txBody>
       </p:sp>
@@ -9919,7 +11820,7 @@
         <p:spPr>
           <a:xfrm>
             <a:off x="548640" y="1325880"/>
-            <a:ext cx="11064240" cy="822960"/>
+            <a:ext cx="11064240" cy="1200000"/>
           </a:xfrm>
           <a:prstGeom prst="rect">
             <a:avLst/>
@@ -9938,7 +11839,7 @@
               <a:buNone/>
             </a:pPr>
             <a:r>
-              <a:rPr lang="en-US" sz="1350" dirty="0">
+              <a:rPr lang="en-US" sz="1800" dirty="0">
                 <a:solidFill>
                   <a:srgbClr val="1F2429"/>
                 </a:solidFill>
@@ -9948,7 +11849,7 @@
               </a:rPr>
               <a:t>A naive single table repeats the student's name and course's title on every row — the update-anomaly risk normalization exists to eliminate. Decomposing it into 1NF → 2NF → 3NF form removes the redundancy entirely.</a:t>
             </a:r>
-            <a:endParaRPr lang="en-US" sz="1350" dirty="0"/>
+            <a:endParaRPr lang="en-US" sz="1800" dirty="0"/>
           </a:p>
         </p:txBody>
       </p:sp>
@@ -9960,8 +11861,8 @@
         </p:nvSpPr>
         <p:spPr>
           <a:xfrm>
-            <a:off x="548640" y="2286000"/>
-            <a:ext cx="5394960" cy="292608"/>
+            <a:off x="548640" y="2721960"/>
+            <a:ext cx="11064240" cy="338328"/>
           </a:xfrm>
           <a:prstGeom prst="rect">
             <a:avLst/>
@@ -9977,7 +11878,7 @@
               <a:buNone/>
             </a:pPr>
             <a:r>
-              <a:rPr lang="en-US" sz="1250" b="1" dirty="0">
+              <a:rPr lang="en-US" sz="2000" b="1" dirty="0">
                 <a:solidFill>
                   <a:srgbClr val="E8A33D"/>
                 </a:solidFill>
@@ -9987,7 +11888,7 @@
               </a:rPr>
               <a:t>Unnormalized — repeats name and title</a:t>
             </a:r>
-            <a:endParaRPr lang="en-US" sz="1250" dirty="0"/>
+            <a:endParaRPr lang="en-US" sz="2000" dirty="0"/>
           </a:p>
         </p:txBody>
       </p:sp>
@@ -10006,21 +11907,21 @@
           </p:nvPr>
         </p:nvGraphicFramePr>
         <p:xfrm>
-          <a:off x="548640" y="2651760"/>
-          <a:ext cx="5394960" cy="1554480"/>
+          <a:off x="548640" y="3203064"/>
+          <a:ext cx="11064240" cy="2800000"/>
         </p:xfrm>
         <a:graphic>
           <a:graphicData uri="http://schemas.openxmlformats.org/drawingml/2006/table">
             <a:tbl>
               <a:tblPr/>
               <a:tblGrid>
-                <a:gridCol w="960120"/>
-                <a:gridCol w="1280160"/>
-                <a:gridCol w="868680"/>
-                <a:gridCol w="1554480"/>
-                <a:gridCol w="731520"/>
+                <a:gridCol w="1969060"/>
+                <a:gridCol w="2625413"/>
+                <a:gridCol w="1781530"/>
+                <a:gridCol w="3188001"/>
+                <a:gridCol w="1500236"/>
               </a:tblGrid>
-              <a:tr h="518160">
+              <a:tr h="933333">
                 <a:tc>
                   <a:txBody>
                     <a:bodyPr/>
@@ -10030,7 +11931,7 @@
                         <a:buNone/>
                       </a:pPr>
                       <a:r>
-                        <a:rPr lang="en-US" sz="900" b="1" dirty="0">
+                        <a:rPr lang="en-US" sz="1400" b="1" dirty="0">
                           <a:solidFill>
                             <a:srgbClr val="FFFFFF"/>
                           </a:solidFill>
@@ -10040,7 +11941,7 @@
                         </a:rPr>
                         <a:t>studentId</a:t>
                       </a:r>
-                      <a:endParaRPr lang="en-US" sz="900" dirty="0">
+                      <a:endParaRPr lang="en-US" sz="1400" dirty="0">
                         <a:latin typeface="Calibri" charset="0"/>
                         <a:ea typeface="Calibri" charset="0"/>
                         <a:cs typeface="Calibri" charset="0"/>
@@ -10098,7 +11999,7 @@
                         <a:buNone/>
                       </a:pPr>
                       <a:r>
-                        <a:rPr lang="en-US" sz="900" b="1" dirty="0">
+                        <a:rPr lang="en-US" sz="1400" b="1" dirty="0">
                           <a:solidFill>
                             <a:srgbClr val="FFFFFF"/>
                           </a:solidFill>
@@ -10108,7 +12009,7 @@
                         </a:rPr>
                         <a:t>name</a:t>
                       </a:r>
-                      <a:endParaRPr lang="en-US" sz="900" dirty="0">
+                      <a:endParaRPr lang="en-US" sz="1400" dirty="0">
                         <a:latin typeface="Calibri" charset="0"/>
                         <a:ea typeface="Calibri" charset="0"/>
                         <a:cs typeface="Calibri" charset="0"/>
@@ -10166,7 +12067,7 @@
                         <a:buNone/>
                       </a:pPr>
                       <a:r>
-                        <a:rPr lang="en-US" sz="900" b="1" dirty="0">
+                        <a:rPr lang="en-US" sz="1400" b="1" dirty="0">
                           <a:solidFill>
                             <a:srgbClr val="FFFFFF"/>
                           </a:solidFill>
@@ -10176,7 +12077,7 @@
                         </a:rPr>
                         <a:t>courseId</a:t>
                       </a:r>
-                      <a:endParaRPr lang="en-US" sz="900" dirty="0">
+                      <a:endParaRPr lang="en-US" sz="1400" dirty="0">
                         <a:latin typeface="Calibri" charset="0"/>
                         <a:ea typeface="Calibri" charset="0"/>
                         <a:cs typeface="Calibri" charset="0"/>
@@ -10234,7 +12135,7 @@
                         <a:buNone/>
                       </a:pPr>
                       <a:r>
-                        <a:rPr lang="en-US" sz="900" b="1" dirty="0">
+                        <a:rPr lang="en-US" sz="1400" b="1" dirty="0">
                           <a:solidFill>
                             <a:srgbClr val="FFFFFF"/>
                           </a:solidFill>
@@ -10244,7 +12145,7 @@
                         </a:rPr>
                         <a:t>title</a:t>
                       </a:r>
-                      <a:endParaRPr lang="en-US" sz="900" dirty="0">
+                      <a:endParaRPr lang="en-US" sz="1400" dirty="0">
                         <a:latin typeface="Calibri" charset="0"/>
                         <a:ea typeface="Calibri" charset="0"/>
                         <a:cs typeface="Calibri" charset="0"/>
@@ -10302,7 +12203,7 @@
                         <a:buNone/>
                       </a:pPr>
                       <a:r>
-                        <a:rPr lang="en-US" sz="900" b="1" dirty="0">
+                        <a:rPr lang="en-US" sz="1400" b="1" dirty="0">
                           <a:solidFill>
                             <a:srgbClr val="FFFFFF"/>
                           </a:solidFill>
@@ -10312,7 +12213,7 @@
                         </a:rPr>
                         <a:t>grade</a:t>
                       </a:r>
-                      <a:endParaRPr lang="en-US" sz="900" dirty="0">
+                      <a:endParaRPr lang="en-US" sz="1400" dirty="0">
                         <a:latin typeface="Calibri" charset="0"/>
                         <a:ea typeface="Calibri" charset="0"/>
                         <a:cs typeface="Calibri" charset="0"/>
@@ -10362,7 +12263,7 @@
                   </a:tcPr>
                 </a:tc>
               </a:tr>
-              <a:tr h="518160">
+              <a:tr h="933333">
                 <a:tc>
                   <a:txBody>
                     <a:bodyPr/>
@@ -10372,7 +12273,7 @@
                         <a:buNone/>
                       </a:pPr>
                       <a:r>
-                        <a:rPr lang="en-US" sz="900" dirty="0">
+                        <a:rPr lang="en-US" sz="1400" dirty="0">
                           <a:solidFill>
                             <a:srgbClr val="1F2429"/>
                           </a:solidFill>
@@ -10382,7 +12283,7 @@
                         </a:rPr>
                         <a:t>S001</a:t>
                       </a:r>
-                      <a:endParaRPr lang="en-US" sz="900" dirty="0">
+                      <a:endParaRPr lang="en-US" sz="1400" dirty="0">
                         <a:latin typeface="Calibri" charset="0"/>
                         <a:ea typeface="Calibri" charset="0"/>
                         <a:cs typeface="Calibri" charset="0"/>
@@ -10440,7 +12341,7 @@
                         <a:buNone/>
                       </a:pPr>
                       <a:r>
-                        <a:rPr lang="en-US" sz="900" dirty="0">
+                        <a:rPr lang="en-US" sz="1400" dirty="0">
                           <a:solidFill>
                             <a:srgbClr val="1F2429"/>
                           </a:solidFill>
@@ -10450,7 +12351,7 @@
                         </a:rPr>
                         <a:t>Amina Raza</a:t>
                       </a:r>
-                      <a:endParaRPr lang="en-US" sz="900" dirty="0">
+                      <a:endParaRPr lang="en-US" sz="1400" dirty="0">
                         <a:latin typeface="Calibri" charset="0"/>
                         <a:ea typeface="Calibri" charset="0"/>
                         <a:cs typeface="Calibri" charset="0"/>
@@ -10508,7 +12409,7 @@
                         <a:buNone/>
                       </a:pPr>
                       <a:r>
-                        <a:rPr lang="en-US" sz="900" dirty="0">
+                        <a:rPr lang="en-US" sz="1400" dirty="0">
                           <a:solidFill>
                             <a:srgbClr val="1F2429"/>
                           </a:solidFill>
@@ -10518,7 +12419,7 @@
                         </a:rPr>
                         <a:t>CS270</a:t>
                       </a:r>
-                      <a:endParaRPr lang="en-US" sz="900" dirty="0">
+                      <a:endParaRPr lang="en-US" sz="1400" dirty="0">
                         <a:latin typeface="Calibri" charset="0"/>
                         <a:ea typeface="Calibri" charset="0"/>
                         <a:cs typeface="Calibri" charset="0"/>
@@ -10576,7 +12477,7 @@
                         <a:buNone/>
                       </a:pPr>
                       <a:r>
-                        <a:rPr lang="en-US" sz="900" dirty="0">
+                        <a:rPr lang="en-US" sz="1400" dirty="0">
                           <a:solidFill>
                             <a:srgbClr val="1F2429"/>
                           </a:solidFill>
@@ -10586,7 +12487,7 @@
                         </a:rPr>
                         <a:t>Database Systems</a:t>
                       </a:r>
-                      <a:endParaRPr lang="en-US" sz="900" dirty="0">
+                      <a:endParaRPr lang="en-US" sz="1400" dirty="0">
                         <a:latin typeface="Calibri" charset="0"/>
                         <a:ea typeface="Calibri" charset="0"/>
                         <a:cs typeface="Calibri" charset="0"/>
@@ -10644,7 +12545,7 @@
                         <a:buNone/>
                       </a:pPr>
                       <a:r>
-                        <a:rPr lang="en-US" sz="900" dirty="0">
+                        <a:rPr lang="en-US" sz="1400" dirty="0">
                           <a:solidFill>
                             <a:srgbClr val="1F2429"/>
                           </a:solidFill>
@@ -10654,7 +12555,7 @@
                         </a:rPr>
                         <a:t>A</a:t>
                       </a:r>
-                      <a:endParaRPr lang="en-US" sz="900" dirty="0">
+                      <a:endParaRPr lang="en-US" sz="1400" dirty="0">
                         <a:latin typeface="Calibri" charset="0"/>
                         <a:ea typeface="Calibri" charset="0"/>
                         <a:cs typeface="Calibri" charset="0"/>
@@ -10704,7 +12605,7 @@
                   </a:tcPr>
                 </a:tc>
               </a:tr>
-              <a:tr h="518160">
+              <a:tr h="933333">
                 <a:tc>
                   <a:txBody>
                     <a:bodyPr/>
@@ -10714,7 +12615,7 @@
                         <a:buNone/>
                       </a:pPr>
                       <a:r>
-                        <a:rPr lang="en-US" sz="900" dirty="0">
+                        <a:rPr lang="en-US" sz="1400" dirty="0">
                           <a:solidFill>
                             <a:srgbClr val="1F2429"/>
                           </a:solidFill>
@@ -10724,7 +12625,7 @@
                         </a:rPr>
                         <a:t>S001</a:t>
                       </a:r>
-                      <a:endParaRPr lang="en-US" sz="900" dirty="0">
+                      <a:endParaRPr lang="en-US" sz="1400" dirty="0">
                         <a:latin typeface="Calibri" charset="0"/>
                         <a:ea typeface="Calibri" charset="0"/>
                         <a:cs typeface="Calibri" charset="0"/>
@@ -10782,7 +12683,7 @@
                         <a:buNone/>
                       </a:pPr>
                       <a:r>
-                        <a:rPr lang="en-US" sz="900" dirty="0">
+                        <a:rPr lang="en-US" sz="1400" dirty="0">
                           <a:solidFill>
                             <a:srgbClr val="1F2429"/>
                           </a:solidFill>
@@ -10792,7 +12693,7 @@
                         </a:rPr>
                         <a:t>Amina Raza</a:t>
                       </a:r>
-                      <a:endParaRPr lang="en-US" sz="900" dirty="0">
+                      <a:endParaRPr lang="en-US" sz="1400" dirty="0">
                         <a:latin typeface="Calibri" charset="0"/>
                         <a:ea typeface="Calibri" charset="0"/>
                         <a:cs typeface="Calibri" charset="0"/>
@@ -10850,7 +12751,7 @@
                         <a:buNone/>
                       </a:pPr>
                       <a:r>
-                        <a:rPr lang="en-US" sz="900" dirty="0">
+                        <a:rPr lang="en-US" sz="1400" dirty="0">
                           <a:solidFill>
                             <a:srgbClr val="1F2429"/>
                           </a:solidFill>
@@ -10860,7 +12761,7 @@
                         </a:rPr>
                         <a:t>CS211</a:t>
                       </a:r>
-                      <a:endParaRPr lang="en-US" sz="900" dirty="0">
+                      <a:endParaRPr lang="en-US" sz="1400" dirty="0">
                         <a:latin typeface="Calibri" charset="0"/>
                         <a:ea typeface="Calibri" charset="0"/>
                         <a:cs typeface="Calibri" charset="0"/>
@@ -10918,7 +12819,7 @@
                         <a:buNone/>
                       </a:pPr>
                       <a:r>
-                        <a:rPr lang="en-US" sz="900" dirty="0">
+                        <a:rPr lang="en-US" sz="1400" dirty="0">
                           <a:solidFill>
                             <a:srgbClr val="1F2429"/>
                           </a:solidFill>
@@ -10928,7 +12829,7 @@
                         </a:rPr>
                         <a:t>Algorithms</a:t>
                       </a:r>
-                      <a:endParaRPr lang="en-US" sz="900" dirty="0">
+                      <a:endParaRPr lang="en-US" sz="1400" dirty="0">
                         <a:latin typeface="Calibri" charset="0"/>
                         <a:ea typeface="Calibri" charset="0"/>
                         <a:cs typeface="Calibri" charset="0"/>
@@ -10986,7 +12887,7 @@
                         <a:buNone/>
                       </a:pPr>
                       <a:r>
-                        <a:rPr lang="en-US" sz="900" dirty="0">
+                        <a:rPr lang="en-US" sz="1400" dirty="0">
                           <a:solidFill>
                             <a:srgbClr val="1F2429"/>
                           </a:solidFill>
@@ -10996,7 +12897,7 @@
                         </a:rPr>
                         <a:t>B+</a:t>
                       </a:r>
-                      <a:endParaRPr lang="en-US" sz="900" dirty="0">
+                      <a:endParaRPr lang="en-US" sz="1400" dirty="0">
                         <a:latin typeface="Calibri" charset="0"/>
                         <a:ea typeface="Calibri" charset="0"/>
                         <a:cs typeface="Calibri" charset="0"/>
@@ -11050,758 +12951,6 @@
           </a:graphicData>
         </a:graphic>
       </p:graphicFrame>
-      <p:sp>
-        <p:nvSpPr>
-          <p:cNvPr id="8" name="Text 5"/>
-          <p:cNvSpPr txBox="1"/>
-          <p:nvPr/>
-        </p:nvSpPr>
-        <p:spPr>
-          <a:xfrm>
-            <a:off x="6263640" y="2286000"/>
-            <a:ext cx="5394960" cy="292608"/>
-          </a:xfrm>
-          <a:prstGeom prst="rect">
-            <a:avLst/>
-          </a:prstGeom>
-          <a:noFill/>
-          <a:ln/>
-        </p:spPr>
-        <p:txBody>
-          <a:bodyPr wrap="square" rtlCol="0" anchor="ctr"/>
-          <a:lstStyle/>
-          <a:p>
-            <a:pPr indent="0" marL="0">
-              <a:buNone/>
-            </a:pPr>
-            <a:r>
-              <a:rPr lang="en-US" sz="1250" b="1" dirty="0">
-                <a:solidFill>
-                  <a:srgbClr val="2FE6C4"/>
-                </a:solidFill>
-                <a:latin typeface="Calibri" pitchFamily="34" charset="0"/>
-                <a:ea typeface="Calibri" pitchFamily="34" charset="-122"/>
-                <a:cs typeface="Calibri" pitchFamily="34" charset="-120"/>
-              </a:rPr>
-              <a:t>3NF — Enrollment references, doesn't repeat</a:t>
-            </a:r>
-            <a:endParaRPr lang="en-US" sz="1250" dirty="0"/>
-          </a:p>
-        </p:txBody>
-      </p:sp>
-      <p:graphicFrame>
-        <p:nvGraphicFramePr>
-          <p:cNvPr id="17" name="Table 1"/>
-          <p:cNvGraphicFramePr>
-            <a:graphicFrameLocks noGrp="1"/>
-          </p:cNvGraphicFramePr>
-          <p:nvPr>
-            <p:extLst>
-              <p:ext uri="{D42A27DB-BD31-4B8C-83A1-F6EECF244321}">
-                <p14:modId xmlns:p14="http://schemas.microsoft.com/office/powerpoint/2010/main" val="1579011935"/>
-              </p:ext>
-            </p:extLst>
-          </p:nvPr>
-        </p:nvGraphicFramePr>
-        <p:xfrm>
-          <a:off x="6263640" y="2651760"/>
-          <a:ext cx="5394960" cy="1554480"/>
-        </p:xfrm>
-        <a:graphic>
-          <a:graphicData uri="http://schemas.openxmlformats.org/drawingml/2006/table">
-            <a:tbl>
-              <a:tblPr/>
-              <a:tblGrid>
-                <a:gridCol w="2011680"/>
-                <a:gridCol w="2011680"/>
-                <a:gridCol w="1371600"/>
-              </a:tblGrid>
-              <a:tr h="518160">
-                <a:tc>
-                  <a:txBody>
-                    <a:bodyPr/>
-                    <a:lstStyle/>
-                    <a:p>
-                      <a:pPr algn="l" indent="0" marL="0">
-                        <a:buNone/>
-                      </a:pPr>
-                      <a:r>
-                        <a:rPr lang="en-US" sz="1100" b="1" dirty="0">
-                          <a:solidFill>
-                            <a:srgbClr val="FFFFFF"/>
-                          </a:solidFill>
-                          <a:latin typeface="Calibri" pitchFamily="34" charset="0"/>
-                          <a:ea typeface="Calibri" pitchFamily="34" charset="-122"/>
-                          <a:cs typeface="Calibri" pitchFamily="34" charset="-120"/>
-                        </a:rPr>
-                        <a:t>studentId</a:t>
-                      </a:r>
-                      <a:endParaRPr lang="en-US" sz="1100" dirty="0">
-                        <a:latin typeface="Calibri" charset="0"/>
-                        <a:ea typeface="Calibri" charset="0"/>
-                        <a:cs typeface="Calibri" charset="0"/>
-                      </a:endParaRPr>
-                    </a:p>
-                  </a:txBody>
-                  <a:tcPr marL="91440" marR="91440" marT="45720" marB="45720" anchor="ctr">
-                    <a:lnL w="9525" cap="flat" cmpd="sng" algn="ctr">
-                      <a:solidFill>
-                        <a:srgbClr val="E1E4E8"/>
-                      </a:solidFill>
-                      <a:prstDash val="solid"/>
-                      <a:round/>
-                      <a:headEnd type="none" w="med" len="med"/>
-                      <a:tailEnd type="none" w="med" len="med"/>
-                    </a:lnL>
-                    <a:lnR w="9525" cap="flat" cmpd="sng" algn="ctr">
-                      <a:solidFill>
-                        <a:srgbClr val="E1E4E8"/>
-                      </a:solidFill>
-                      <a:prstDash val="solid"/>
-                      <a:round/>
-                      <a:headEnd type="none" w="med" len="med"/>
-                      <a:tailEnd type="none" w="med" len="med"/>
-                    </a:lnR>
-                    <a:lnT w="9525" cap="flat" cmpd="sng" algn="ctr">
-                      <a:solidFill>
-                        <a:srgbClr val="E1E4E8"/>
-                      </a:solidFill>
-                      <a:prstDash val="solid"/>
-                      <a:round/>
-                      <a:headEnd type="none" w="med" len="med"/>
-                      <a:tailEnd type="none" w="med" len="med"/>
-                    </a:lnT>
-                    <a:lnB w="9525" cap="flat" cmpd="sng" algn="ctr">
-                      <a:solidFill>
-                        <a:srgbClr val="E1E4E8"/>
-                      </a:solidFill>
-                      <a:prstDash val="solid"/>
-                      <a:round/>
-                      <a:headEnd type="none" w="med" len="med"/>
-                      <a:tailEnd type="none" w="med" len="med"/>
-                    </a:lnB>
-                    <a:solidFill>
-                      <a:srgbClr val="0E9E85"/>
-                    </a:solidFill>
-                  </a:tcPr>
-                </a:tc>
-                <a:tc>
-                  <a:txBody>
-                    <a:bodyPr/>
-                    <a:lstStyle/>
-                    <a:p>
-                      <a:pPr algn="l" indent="0" marL="0">
-                        <a:buNone/>
-                      </a:pPr>
-                      <a:r>
-                        <a:rPr lang="en-US" sz="1100" b="1" dirty="0">
-                          <a:solidFill>
-                            <a:srgbClr val="FFFFFF"/>
-                          </a:solidFill>
-                          <a:latin typeface="Calibri" pitchFamily="34" charset="0"/>
-                          <a:ea typeface="Calibri" pitchFamily="34" charset="-122"/>
-                          <a:cs typeface="Calibri" pitchFamily="34" charset="-120"/>
-                        </a:rPr>
-                        <a:t>courseId</a:t>
-                      </a:r>
-                      <a:endParaRPr lang="en-US" sz="1100" dirty="0">
-                        <a:latin typeface="Calibri" charset="0"/>
-                        <a:ea typeface="Calibri" charset="0"/>
-                        <a:cs typeface="Calibri" charset="0"/>
-                      </a:endParaRPr>
-                    </a:p>
-                  </a:txBody>
-                  <a:tcPr marL="91440" marR="91440" marT="45720" marB="45720" anchor="ctr">
-                    <a:lnL w="9525" cap="flat" cmpd="sng" algn="ctr">
-                      <a:solidFill>
-                        <a:srgbClr val="E1E4E8"/>
-                      </a:solidFill>
-                      <a:prstDash val="solid"/>
-                      <a:round/>
-                      <a:headEnd type="none" w="med" len="med"/>
-                      <a:tailEnd type="none" w="med" len="med"/>
-                    </a:lnL>
-                    <a:lnR w="9525" cap="flat" cmpd="sng" algn="ctr">
-                      <a:solidFill>
-                        <a:srgbClr val="E1E4E8"/>
-                      </a:solidFill>
-                      <a:prstDash val="solid"/>
-                      <a:round/>
-                      <a:headEnd type="none" w="med" len="med"/>
-                      <a:tailEnd type="none" w="med" len="med"/>
-                    </a:lnR>
-                    <a:lnT w="9525" cap="flat" cmpd="sng" algn="ctr">
-                      <a:solidFill>
-                        <a:srgbClr val="E1E4E8"/>
-                      </a:solidFill>
-                      <a:prstDash val="solid"/>
-                      <a:round/>
-                      <a:headEnd type="none" w="med" len="med"/>
-                      <a:tailEnd type="none" w="med" len="med"/>
-                    </a:lnT>
-                    <a:lnB w="9525" cap="flat" cmpd="sng" algn="ctr">
-                      <a:solidFill>
-                        <a:srgbClr val="E1E4E8"/>
-                      </a:solidFill>
-                      <a:prstDash val="solid"/>
-                      <a:round/>
-                      <a:headEnd type="none" w="med" len="med"/>
-                      <a:tailEnd type="none" w="med" len="med"/>
-                    </a:lnB>
-                    <a:solidFill>
-                      <a:srgbClr val="0E9E85"/>
-                    </a:solidFill>
-                  </a:tcPr>
-                </a:tc>
-                <a:tc>
-                  <a:txBody>
-                    <a:bodyPr/>
-                    <a:lstStyle/>
-                    <a:p>
-                      <a:pPr algn="l" indent="0" marL="0">
-                        <a:buNone/>
-                      </a:pPr>
-                      <a:r>
-                        <a:rPr lang="en-US" sz="1100" b="1" dirty="0">
-                          <a:solidFill>
-                            <a:srgbClr val="FFFFFF"/>
-                          </a:solidFill>
-                          <a:latin typeface="Calibri" pitchFamily="34" charset="0"/>
-                          <a:ea typeface="Calibri" pitchFamily="34" charset="-122"/>
-                          <a:cs typeface="Calibri" pitchFamily="34" charset="-120"/>
-                        </a:rPr>
-                        <a:t>grade</a:t>
-                      </a:r>
-                      <a:endParaRPr lang="en-US" sz="1100" dirty="0">
-                        <a:latin typeface="Calibri" charset="0"/>
-                        <a:ea typeface="Calibri" charset="0"/>
-                        <a:cs typeface="Calibri" charset="0"/>
-                      </a:endParaRPr>
-                    </a:p>
-                  </a:txBody>
-                  <a:tcPr marL="91440" marR="91440" marT="45720" marB="45720" anchor="ctr">
-                    <a:lnL w="9525" cap="flat" cmpd="sng" algn="ctr">
-                      <a:solidFill>
-                        <a:srgbClr val="E1E4E8"/>
-                      </a:solidFill>
-                      <a:prstDash val="solid"/>
-                      <a:round/>
-                      <a:headEnd type="none" w="med" len="med"/>
-                      <a:tailEnd type="none" w="med" len="med"/>
-                    </a:lnL>
-                    <a:lnR w="9525" cap="flat" cmpd="sng" algn="ctr">
-                      <a:solidFill>
-                        <a:srgbClr val="E1E4E8"/>
-                      </a:solidFill>
-                      <a:prstDash val="solid"/>
-                      <a:round/>
-                      <a:headEnd type="none" w="med" len="med"/>
-                      <a:tailEnd type="none" w="med" len="med"/>
-                    </a:lnR>
-                    <a:lnT w="9525" cap="flat" cmpd="sng" algn="ctr">
-                      <a:solidFill>
-                        <a:srgbClr val="E1E4E8"/>
-                      </a:solidFill>
-                      <a:prstDash val="solid"/>
-                      <a:round/>
-                      <a:headEnd type="none" w="med" len="med"/>
-                      <a:tailEnd type="none" w="med" len="med"/>
-                    </a:lnT>
-                    <a:lnB w="9525" cap="flat" cmpd="sng" algn="ctr">
-                      <a:solidFill>
-                        <a:srgbClr val="E1E4E8"/>
-                      </a:solidFill>
-                      <a:prstDash val="solid"/>
-                      <a:round/>
-                      <a:headEnd type="none" w="med" len="med"/>
-                      <a:tailEnd type="none" w="med" len="med"/>
-                    </a:lnB>
-                    <a:solidFill>
-                      <a:srgbClr val="0E9E85"/>
-                    </a:solidFill>
-                  </a:tcPr>
-                </a:tc>
-              </a:tr>
-              <a:tr h="518160">
-                <a:tc>
-                  <a:txBody>
-                    <a:bodyPr/>
-                    <a:lstStyle/>
-                    <a:p>
-                      <a:pPr algn="l" indent="0" marL="0">
-                        <a:buNone/>
-                      </a:pPr>
-                      <a:r>
-                        <a:rPr lang="en-US" sz="1100" dirty="0">
-                          <a:solidFill>
-                            <a:srgbClr val="1F2429"/>
-                          </a:solidFill>
-                          <a:latin typeface="Calibri" pitchFamily="34" charset="0"/>
-                          <a:ea typeface="Calibri" pitchFamily="34" charset="-122"/>
-                          <a:cs typeface="Calibri" pitchFamily="34" charset="-120"/>
-                        </a:rPr>
-                        <a:t>S001</a:t>
-                      </a:r>
-                      <a:endParaRPr lang="en-US" sz="1100" dirty="0">
-                        <a:latin typeface="Calibri" charset="0"/>
-                        <a:ea typeface="Calibri" charset="0"/>
-                        <a:cs typeface="Calibri" charset="0"/>
-                      </a:endParaRPr>
-                    </a:p>
-                  </a:txBody>
-                  <a:tcPr marL="91440" marR="91440" marT="45720" marB="45720" anchor="ctr">
-                    <a:lnL w="9525" cap="flat" cmpd="sng" algn="ctr">
-                      <a:solidFill>
-                        <a:srgbClr val="E1E4E8"/>
-                      </a:solidFill>
-                      <a:prstDash val="solid"/>
-                      <a:round/>
-                      <a:headEnd type="none" w="med" len="med"/>
-                      <a:tailEnd type="none" w="med" len="med"/>
-                    </a:lnL>
-                    <a:lnR w="9525" cap="flat" cmpd="sng" algn="ctr">
-                      <a:solidFill>
-                        <a:srgbClr val="E1E4E8"/>
-                      </a:solidFill>
-                      <a:prstDash val="solid"/>
-                      <a:round/>
-                      <a:headEnd type="none" w="med" len="med"/>
-                      <a:tailEnd type="none" w="med" len="med"/>
-                    </a:lnR>
-                    <a:lnT w="9525" cap="flat" cmpd="sng" algn="ctr">
-                      <a:solidFill>
-                        <a:srgbClr val="E1E4E8"/>
-                      </a:solidFill>
-                      <a:prstDash val="solid"/>
-                      <a:round/>
-                      <a:headEnd type="none" w="med" len="med"/>
-                      <a:tailEnd type="none" w="med" len="med"/>
-                    </a:lnT>
-                    <a:lnB w="9525" cap="flat" cmpd="sng" algn="ctr">
-                      <a:solidFill>
-                        <a:srgbClr val="E1E4E8"/>
-                      </a:solidFill>
-                      <a:prstDash val="solid"/>
-                      <a:round/>
-                      <a:headEnd type="none" w="med" len="med"/>
-                      <a:tailEnd type="none" w="med" len="med"/>
-                    </a:lnB>
-                    <a:solidFill>
-                      <a:srgbClr val="FFFFFF"/>
-                    </a:solidFill>
-                  </a:tcPr>
-                </a:tc>
-                <a:tc>
-                  <a:txBody>
-                    <a:bodyPr/>
-                    <a:lstStyle/>
-                    <a:p>
-                      <a:pPr algn="l" indent="0" marL="0">
-                        <a:buNone/>
-                      </a:pPr>
-                      <a:r>
-                        <a:rPr lang="en-US" sz="1100" dirty="0">
-                          <a:solidFill>
-                            <a:srgbClr val="1F2429"/>
-                          </a:solidFill>
-                          <a:latin typeface="Calibri" pitchFamily="34" charset="0"/>
-                          <a:ea typeface="Calibri" pitchFamily="34" charset="-122"/>
-                          <a:cs typeface="Calibri" pitchFamily="34" charset="-120"/>
-                        </a:rPr>
-                        <a:t>CS270</a:t>
-                      </a:r>
-                      <a:endParaRPr lang="en-US" sz="1100" dirty="0">
-                        <a:latin typeface="Calibri" charset="0"/>
-                        <a:ea typeface="Calibri" charset="0"/>
-                        <a:cs typeface="Calibri" charset="0"/>
-                      </a:endParaRPr>
-                    </a:p>
-                  </a:txBody>
-                  <a:tcPr marL="91440" marR="91440" marT="45720" marB="45720" anchor="ctr">
-                    <a:lnL w="9525" cap="flat" cmpd="sng" algn="ctr">
-                      <a:solidFill>
-                        <a:srgbClr val="E1E4E8"/>
-                      </a:solidFill>
-                      <a:prstDash val="solid"/>
-                      <a:round/>
-                      <a:headEnd type="none" w="med" len="med"/>
-                      <a:tailEnd type="none" w="med" len="med"/>
-                    </a:lnL>
-                    <a:lnR w="9525" cap="flat" cmpd="sng" algn="ctr">
-                      <a:solidFill>
-                        <a:srgbClr val="E1E4E8"/>
-                      </a:solidFill>
-                      <a:prstDash val="solid"/>
-                      <a:round/>
-                      <a:headEnd type="none" w="med" len="med"/>
-                      <a:tailEnd type="none" w="med" len="med"/>
-                    </a:lnR>
-                    <a:lnT w="9525" cap="flat" cmpd="sng" algn="ctr">
-                      <a:solidFill>
-                        <a:srgbClr val="E1E4E8"/>
-                      </a:solidFill>
-                      <a:prstDash val="solid"/>
-                      <a:round/>
-                      <a:headEnd type="none" w="med" len="med"/>
-                      <a:tailEnd type="none" w="med" len="med"/>
-                    </a:lnT>
-                    <a:lnB w="9525" cap="flat" cmpd="sng" algn="ctr">
-                      <a:solidFill>
-                        <a:srgbClr val="E1E4E8"/>
-                      </a:solidFill>
-                      <a:prstDash val="solid"/>
-                      <a:round/>
-                      <a:headEnd type="none" w="med" len="med"/>
-                      <a:tailEnd type="none" w="med" len="med"/>
-                    </a:lnB>
-                    <a:solidFill>
-                      <a:srgbClr val="FFFFFF"/>
-                    </a:solidFill>
-                  </a:tcPr>
-                </a:tc>
-                <a:tc>
-                  <a:txBody>
-                    <a:bodyPr/>
-                    <a:lstStyle/>
-                    <a:p>
-                      <a:pPr algn="l" indent="0" marL="0">
-                        <a:buNone/>
-                      </a:pPr>
-                      <a:r>
-                        <a:rPr lang="en-US" sz="1100" dirty="0">
-                          <a:solidFill>
-                            <a:srgbClr val="1F2429"/>
-                          </a:solidFill>
-                          <a:latin typeface="Calibri" pitchFamily="34" charset="0"/>
-                          <a:ea typeface="Calibri" pitchFamily="34" charset="-122"/>
-                          <a:cs typeface="Calibri" pitchFamily="34" charset="-120"/>
-                        </a:rPr>
-                        <a:t>A</a:t>
-                      </a:r>
-                      <a:endParaRPr lang="en-US" sz="1100" dirty="0">
-                        <a:latin typeface="Calibri" charset="0"/>
-                        <a:ea typeface="Calibri" charset="0"/>
-                        <a:cs typeface="Calibri" charset="0"/>
-                      </a:endParaRPr>
-                    </a:p>
-                  </a:txBody>
-                  <a:tcPr marL="91440" marR="91440" marT="45720" marB="45720" anchor="ctr">
-                    <a:lnL w="9525" cap="flat" cmpd="sng" algn="ctr">
-                      <a:solidFill>
-                        <a:srgbClr val="E1E4E8"/>
-                      </a:solidFill>
-                      <a:prstDash val="solid"/>
-                      <a:round/>
-                      <a:headEnd type="none" w="med" len="med"/>
-                      <a:tailEnd type="none" w="med" len="med"/>
-                    </a:lnL>
-                    <a:lnR w="9525" cap="flat" cmpd="sng" algn="ctr">
-                      <a:solidFill>
-                        <a:srgbClr val="E1E4E8"/>
-                      </a:solidFill>
-                      <a:prstDash val="solid"/>
-                      <a:round/>
-                      <a:headEnd type="none" w="med" len="med"/>
-                      <a:tailEnd type="none" w="med" len="med"/>
-                    </a:lnR>
-                    <a:lnT w="9525" cap="flat" cmpd="sng" algn="ctr">
-                      <a:solidFill>
-                        <a:srgbClr val="E1E4E8"/>
-                      </a:solidFill>
-                      <a:prstDash val="solid"/>
-                      <a:round/>
-                      <a:headEnd type="none" w="med" len="med"/>
-                      <a:tailEnd type="none" w="med" len="med"/>
-                    </a:lnT>
-                    <a:lnB w="9525" cap="flat" cmpd="sng" algn="ctr">
-                      <a:solidFill>
-                        <a:srgbClr val="E1E4E8"/>
-                      </a:solidFill>
-                      <a:prstDash val="solid"/>
-                      <a:round/>
-                      <a:headEnd type="none" w="med" len="med"/>
-                      <a:tailEnd type="none" w="med" len="med"/>
-                    </a:lnB>
-                    <a:solidFill>
-                      <a:srgbClr val="FFFFFF"/>
-                    </a:solidFill>
-                  </a:tcPr>
-                </a:tc>
-              </a:tr>
-              <a:tr h="518160">
-                <a:tc>
-                  <a:txBody>
-                    <a:bodyPr/>
-                    <a:lstStyle/>
-                    <a:p>
-                      <a:pPr algn="l" indent="0" marL="0">
-                        <a:buNone/>
-                      </a:pPr>
-                      <a:r>
-                        <a:rPr lang="en-US" sz="1100" dirty="0">
-                          <a:solidFill>
-                            <a:srgbClr val="1F2429"/>
-                          </a:solidFill>
-                          <a:latin typeface="Calibri" pitchFamily="34" charset="0"/>
-                          <a:ea typeface="Calibri" pitchFamily="34" charset="-122"/>
-                          <a:cs typeface="Calibri" pitchFamily="34" charset="-120"/>
-                        </a:rPr>
-                        <a:t>S001</a:t>
-                      </a:r>
-                      <a:endParaRPr lang="en-US" sz="1100" dirty="0">
-                        <a:latin typeface="Calibri" charset="0"/>
-                        <a:ea typeface="Calibri" charset="0"/>
-                        <a:cs typeface="Calibri" charset="0"/>
-                      </a:endParaRPr>
-                    </a:p>
-                  </a:txBody>
-                  <a:tcPr marL="91440" marR="91440" marT="45720" marB="45720" anchor="ctr">
-                    <a:lnL w="9525" cap="flat" cmpd="sng" algn="ctr">
-                      <a:solidFill>
-                        <a:srgbClr val="E1E4E8"/>
-                      </a:solidFill>
-                      <a:prstDash val="solid"/>
-                      <a:round/>
-                      <a:headEnd type="none" w="med" len="med"/>
-                      <a:tailEnd type="none" w="med" len="med"/>
-                    </a:lnL>
-                    <a:lnR w="9525" cap="flat" cmpd="sng" algn="ctr">
-                      <a:solidFill>
-                        <a:srgbClr val="E1E4E8"/>
-                      </a:solidFill>
-                      <a:prstDash val="solid"/>
-                      <a:round/>
-                      <a:headEnd type="none" w="med" len="med"/>
-                      <a:tailEnd type="none" w="med" len="med"/>
-                    </a:lnR>
-                    <a:lnT w="9525" cap="flat" cmpd="sng" algn="ctr">
-                      <a:solidFill>
-                        <a:srgbClr val="E1E4E8"/>
-                      </a:solidFill>
-                      <a:prstDash val="solid"/>
-                      <a:round/>
-                      <a:headEnd type="none" w="med" len="med"/>
-                      <a:tailEnd type="none" w="med" len="med"/>
-                    </a:lnT>
-                    <a:lnB w="9525" cap="flat" cmpd="sng" algn="ctr">
-                      <a:solidFill>
-                        <a:srgbClr val="E1E4E8"/>
-                      </a:solidFill>
-                      <a:prstDash val="solid"/>
-                      <a:round/>
-                      <a:headEnd type="none" w="med" len="med"/>
-                      <a:tailEnd type="none" w="med" len="med"/>
-                    </a:lnB>
-                    <a:solidFill>
-                      <a:srgbClr val="EEF1F3"/>
-                    </a:solidFill>
-                  </a:tcPr>
-                </a:tc>
-                <a:tc>
-                  <a:txBody>
-                    <a:bodyPr/>
-                    <a:lstStyle/>
-                    <a:p>
-                      <a:pPr algn="l" indent="0" marL="0">
-                        <a:buNone/>
-                      </a:pPr>
-                      <a:r>
-                        <a:rPr lang="en-US" sz="1100" dirty="0">
-                          <a:solidFill>
-                            <a:srgbClr val="1F2429"/>
-                          </a:solidFill>
-                          <a:latin typeface="Calibri" pitchFamily="34" charset="0"/>
-                          <a:ea typeface="Calibri" pitchFamily="34" charset="-122"/>
-                          <a:cs typeface="Calibri" pitchFamily="34" charset="-120"/>
-                        </a:rPr>
-                        <a:t>CS211</a:t>
-                      </a:r>
-                      <a:endParaRPr lang="en-US" sz="1100" dirty="0">
-                        <a:latin typeface="Calibri" charset="0"/>
-                        <a:ea typeface="Calibri" charset="0"/>
-                        <a:cs typeface="Calibri" charset="0"/>
-                      </a:endParaRPr>
-                    </a:p>
-                  </a:txBody>
-                  <a:tcPr marL="91440" marR="91440" marT="45720" marB="45720" anchor="ctr">
-                    <a:lnL w="9525" cap="flat" cmpd="sng" algn="ctr">
-                      <a:solidFill>
-                        <a:srgbClr val="E1E4E8"/>
-                      </a:solidFill>
-                      <a:prstDash val="solid"/>
-                      <a:round/>
-                      <a:headEnd type="none" w="med" len="med"/>
-                      <a:tailEnd type="none" w="med" len="med"/>
-                    </a:lnL>
-                    <a:lnR w="9525" cap="flat" cmpd="sng" algn="ctr">
-                      <a:solidFill>
-                        <a:srgbClr val="E1E4E8"/>
-                      </a:solidFill>
-                      <a:prstDash val="solid"/>
-                      <a:round/>
-                      <a:headEnd type="none" w="med" len="med"/>
-                      <a:tailEnd type="none" w="med" len="med"/>
-                    </a:lnR>
-                    <a:lnT w="9525" cap="flat" cmpd="sng" algn="ctr">
-                      <a:solidFill>
-                        <a:srgbClr val="E1E4E8"/>
-                      </a:solidFill>
-                      <a:prstDash val="solid"/>
-                      <a:round/>
-                      <a:headEnd type="none" w="med" len="med"/>
-                      <a:tailEnd type="none" w="med" len="med"/>
-                    </a:lnT>
-                    <a:lnB w="9525" cap="flat" cmpd="sng" algn="ctr">
-                      <a:solidFill>
-                        <a:srgbClr val="E1E4E8"/>
-                      </a:solidFill>
-                      <a:prstDash val="solid"/>
-                      <a:round/>
-                      <a:headEnd type="none" w="med" len="med"/>
-                      <a:tailEnd type="none" w="med" len="med"/>
-                    </a:lnB>
-                    <a:solidFill>
-                      <a:srgbClr val="EEF1F3"/>
-                    </a:solidFill>
-                  </a:tcPr>
-                </a:tc>
-                <a:tc>
-                  <a:txBody>
-                    <a:bodyPr/>
-                    <a:lstStyle/>
-                    <a:p>
-                      <a:pPr algn="l" indent="0" marL="0">
-                        <a:buNone/>
-                      </a:pPr>
-                      <a:r>
-                        <a:rPr lang="en-US" sz="1100" dirty="0">
-                          <a:solidFill>
-                            <a:srgbClr val="1F2429"/>
-                          </a:solidFill>
-                          <a:latin typeface="Calibri" pitchFamily="34" charset="0"/>
-                          <a:ea typeface="Calibri" pitchFamily="34" charset="-122"/>
-                          <a:cs typeface="Calibri" pitchFamily="34" charset="-120"/>
-                        </a:rPr>
-                        <a:t>B+</a:t>
-                      </a:r>
-                      <a:endParaRPr lang="en-US" sz="1100" dirty="0">
-                        <a:latin typeface="Calibri" charset="0"/>
-                        <a:ea typeface="Calibri" charset="0"/>
-                        <a:cs typeface="Calibri" charset="0"/>
-                      </a:endParaRPr>
-                    </a:p>
-                  </a:txBody>
-                  <a:tcPr marL="91440" marR="91440" marT="45720" marB="45720" anchor="ctr">
-                    <a:lnL w="9525" cap="flat" cmpd="sng" algn="ctr">
-                      <a:solidFill>
-                        <a:srgbClr val="E1E4E8"/>
-                      </a:solidFill>
-                      <a:prstDash val="solid"/>
-                      <a:round/>
-                      <a:headEnd type="none" w="med" len="med"/>
-                      <a:tailEnd type="none" w="med" len="med"/>
-                    </a:lnL>
-                    <a:lnR w="9525" cap="flat" cmpd="sng" algn="ctr">
-                      <a:solidFill>
-                        <a:srgbClr val="E1E4E8"/>
-                      </a:solidFill>
-                      <a:prstDash val="solid"/>
-                      <a:round/>
-                      <a:headEnd type="none" w="med" len="med"/>
-                      <a:tailEnd type="none" w="med" len="med"/>
-                    </a:lnR>
-                    <a:lnT w="9525" cap="flat" cmpd="sng" algn="ctr">
-                      <a:solidFill>
-                        <a:srgbClr val="E1E4E8"/>
-                      </a:solidFill>
-                      <a:prstDash val="solid"/>
-                      <a:round/>
-                      <a:headEnd type="none" w="med" len="med"/>
-                      <a:tailEnd type="none" w="med" len="med"/>
-                    </a:lnT>
-                    <a:lnB w="9525" cap="flat" cmpd="sng" algn="ctr">
-                      <a:solidFill>
-                        <a:srgbClr val="E1E4E8"/>
-                      </a:solidFill>
-                      <a:prstDash val="solid"/>
-                      <a:round/>
-                      <a:headEnd type="none" w="med" len="med"/>
-                      <a:tailEnd type="none" w="med" len="med"/>
-                    </a:lnB>
-                    <a:solidFill>
-                      <a:srgbClr val="EEF1F3"/>
-                    </a:solidFill>
-                  </a:tcPr>
-                </a:tc>
-              </a:tr>
-            </a:tbl>
-          </a:graphicData>
-        </a:graphic>
-      </p:graphicFrame>
-      <p:sp>
-        <p:nvSpPr>
-          <p:cNvPr id="10" name="Shape 6"/>
-          <p:cNvSpPr/>
-          <p:nvPr/>
-        </p:nvSpPr>
-        <p:spPr>
-          <a:xfrm>
-            <a:off x="548640" y="4526280"/>
-            <a:ext cx="11064240" cy="1417320"/>
-          </a:xfrm>
-          <a:prstGeom prst="roundRect">
-            <a:avLst>
-              <a:gd name="adj" fmla="val 5161"/>
-            </a:avLst>
-          </a:prstGeom>
-          <a:solidFill>
-            <a:srgbClr val="F1F2F6"/>
-          </a:solidFill>
-          <a:ln/>
-        </p:spPr>
-      </p:sp>
-      <p:sp>
-        <p:nvSpPr>
-          <p:cNvPr id="11" name="Text 7"/>
-          <p:cNvSpPr txBox="1"/>
-          <p:nvPr/>
-        </p:nvSpPr>
-        <p:spPr>
-          <a:xfrm>
-            <a:off x="822960" y="4681728"/>
-            <a:ext cx="10515600" cy="1143000"/>
-          </a:xfrm>
-          <a:prstGeom prst="rect">
-            <a:avLst/>
-          </a:prstGeom>
-          <a:noFill/>
-          <a:ln/>
-        </p:spPr>
-        <p:txBody>
-          <a:bodyPr wrap="square" rtlCol="0" anchor="t"/>
-          <a:lstStyle/>
-          <a:p>
-            <a:pPr indent="0" marL="0">
-              <a:lnSpc>
-                <a:spcPct val="122000"/>
-              </a:lnSpc>
-              <a:buNone/>
-            </a:pPr>
-            <a:r>
-              <a:rPr lang="en-US" sz="1250" dirty="0">
-                <a:solidFill>
-                  <a:srgbClr val="1F2429"/>
-                </a:solidFill>
-                <a:latin typeface="Calibri" pitchFamily="34" charset="0"/>
-                <a:ea typeface="Calibri" pitchFamily="34" charset="-122"/>
-                <a:cs typeface="Calibri" pitchFamily="34" charset="-120"/>
-              </a:rPr>
-              <a:t>A fresh Enrollment table — holding only the foreign keys and any enrollment-specific attribute, like the grade — matches the ER diagram's M:N relationship as its own relation, exactly as Unit 4's modeling anticipated.</a:t>
-            </a:r>
-            <a:endParaRPr lang="en-US" sz="1250" dirty="0"/>
-          </a:p>
-        </p:txBody>
-      </p:sp>
     </p:spTree>
   </p:cSld>
   <p:clrMapOvr>
@@ -11906,7 +13055,7 @@
                 <a:ea typeface="Calibri" pitchFamily="34" charset="-122"/>
                 <a:cs typeface="Calibri" pitchFamily="34" charset="-120"/>
               </a:rPr>
-              <a:t>Unit 6 — Views, Security, and Indexing</a:t>
+              <a:t>Unit 6 — Views &amp; Security (Part 1 of 2)</a:t>
             </a:r>
             <a:endParaRPr lang="en-US" sz="2500" dirty="0"/>
           </a:p>
@@ -11937,7 +13086,7 @@
               <a:buNone/>
             </a:pPr>
             <a:r>
-              <a:rPr lang="en-US" sz="1000" u="sng" dirty="0">
+              <a:rPr lang="en-US" sz="1200" u="sng" dirty="0">
                 <a:solidFill>
                   <a:srgbClr val="8A939B"/>
                 </a:solidFill>
@@ -11958,7 +13107,7 @@
               <a:buNone/>
             </a:pPr>
             <a:r>
-              <a:rPr lang="en-US" sz="1000" dirty="0">
+              <a:rPr lang="en-US" sz="1200" dirty="0">
                 <a:solidFill>
                   <a:srgbClr val="8A939B"/>
                 </a:solidFill>
@@ -11966,9 +13115,9 @@
                 <a:ea typeface="Calibri" pitchFamily="34" charset="-122"/>
                 <a:cs typeface="Calibri" pitchFamily="34" charset="-120"/>
               </a:rPr>
-              <a:t>  ·  9</a:t>
-            </a:r>
-            <a:endParaRPr lang="en-US" sz="1000" dirty="0"/>
+              <a:t>  ·  10</a:t>
+            </a:r>
+            <a:endParaRPr lang="en-US" sz="1200" dirty="0"/>
           </a:p>
         </p:txBody>
       </p:sp>
@@ -11997,7 +13146,7 @@
               <a:buNone/>
             </a:pPr>
             <a:r>
-              <a:rPr lang="en-US" sz="1450" dirty="0">
+              <a:rPr lang="en-US" sz="1800" dirty="0">
                 <a:solidFill>
                   <a:srgbClr val="1F2429"/>
                 </a:solidFill>
@@ -12007,7 +13156,7 @@
               </a:rPr>
               <a:t>Operationalizing the normalized schema for real applications.</a:t>
             </a:r>
-            <a:endParaRPr lang="en-US" sz="1450" dirty="0"/>
+            <a:endParaRPr lang="en-US" sz="1800" dirty="0"/>
           </a:p>
         </p:txBody>
       </p:sp>
@@ -12039,7 +13188,7 @@
               <a:buNone/>
             </a:pPr>
             <a:r>
-              <a:rPr lang="en-US" sz="1300" dirty="0">
+              <a:rPr lang="en-US" sz="1800" dirty="0">
                 <a:solidFill>
                   <a:srgbClr val="1F2429"/>
                 </a:solidFill>
@@ -12047,9 +13196,9 @@
                 <a:ea typeface="Calibri" pitchFamily="34" charset="-122"/>
                 <a:cs typeface="Calibri" pitchFamily="34" charset="-120"/>
               </a:rPr>
-              <a:t>A view exposes a student's transcript (Student ⋈ Enrollment ⋈ Course — the same join from Unit 3) as one queryable object; a GRANT limits who can read it; an index on Enrollment.studentId turns “find this student's enrollments” from a full scan into a direct lookup.</a:t>
-            </a:r>
-            <a:endParaRPr lang="en-US" sz="1300" dirty="0"/>
+              <a:t>A view exposes a student's transcript (Student ⋈ Enrollment ⋈ Course — the same join from Unit 3) as one queryable object; a GRANT limits who can read it.</a:t>
+            </a:r>
+            <a:endParaRPr lang="en-US" sz="1800" dirty="0"/>
           </a:p>
         </p:txBody>
       </p:sp>
@@ -12132,7 +13281,7 @@
               <a:buNone/>
             </a:pPr>
             <a:r>
-              <a:rPr lang="en-US" sz="1400" b="1" dirty="0">
+              <a:rPr lang="en-US" sz="2000" b="1" dirty="0">
                 <a:solidFill>
                   <a:srgbClr val="1F2429"/>
                 </a:solidFill>
@@ -12142,7 +13291,7 @@
               </a:rPr>
               <a:t>VIEW StudentTranscript</a:t>
             </a:r>
-            <a:endParaRPr lang="en-US" sz="1400" dirty="0"/>
+            <a:endParaRPr lang="en-US" sz="2000" dirty="0"/>
           </a:p>
         </p:txBody>
       </p:sp>
@@ -12174,7 +13323,7 @@
               <a:buNone/>
             </a:pPr>
             <a:r>
-              <a:rPr lang="en-US" sz="1100" dirty="0">
+              <a:rPr lang="en-US" sz="1800" dirty="0">
                 <a:solidFill>
                   <a:srgbClr val="6B7480"/>
                 </a:solidFill>
@@ -12184,7 +13333,7 @@
               </a:rPr>
               <a:t>Student ⋈ Enrollment ⋈ Course, exposed as one queryable object.</a:t>
             </a:r>
-            <a:endParaRPr lang="en-US" sz="1100" dirty="0"/>
+            <a:endParaRPr lang="en-US" sz="1800" dirty="0"/>
           </a:p>
         </p:txBody>
       </p:sp>
@@ -12291,7 +13440,7 @@
               <a:buNone/>
             </a:pPr>
             <a:r>
-              <a:rPr lang="en-US" sz="1400" b="1" dirty="0">
+              <a:rPr lang="en-US" sz="2000" b="1" dirty="0">
                 <a:solidFill>
                   <a:srgbClr val="1F2429"/>
                 </a:solidFill>
@@ -12301,7 +13450,7 @@
               </a:rPr>
               <a:t>GRANT SELECT ... TO registrar_staff</a:t>
             </a:r>
-            <a:endParaRPr lang="en-US" sz="1400" dirty="0"/>
+            <a:endParaRPr lang="en-US" sz="2000" dirty="0"/>
           </a:p>
         </p:txBody>
       </p:sp>
@@ -12333,7 +13482,7 @@
               <a:buNone/>
             </a:pPr>
             <a:r>
-              <a:rPr lang="en-US" sz="1100" dirty="0">
+              <a:rPr lang="en-US" sz="1800" dirty="0">
                 <a:solidFill>
                   <a:srgbClr val="6B7480"/>
                 </a:solidFill>
@@ -12343,166 +13492,7 @@
               </a:rPr>
               <a:t>Restricts who can read the view.</a:t>
             </a:r>
-            <a:endParaRPr lang="en-US" sz="1100" dirty="0"/>
-          </a:p>
-        </p:txBody>
-      </p:sp>
-      <p:sp>
-        <p:nvSpPr>
-          <p:cNvPr id="16" name="Shape 14"/>
-          <p:cNvSpPr/>
-          <p:nvPr/>
-        </p:nvSpPr>
-        <p:spPr>
-          <a:xfrm>
-            <a:off x="8915400" y="4623816"/>
-            <a:ext cx="0" cy="256032"/>
-          </a:xfrm>
-          <a:prstGeom prst="line">
-            <a:avLst/>
-          </a:prstGeom>
-          <a:noFill/>
-          <a:ln w="25400">
-            <a:solidFill>
-              <a:srgbClr val="8A939B"/>
-            </a:solidFill>
-            <a:prstDash val="solid"/>
-            <a:tailEnd type="triangle"/>
-          </a:ln>
-        </p:spPr>
-      </p:sp>
-      <p:sp>
-        <p:nvSpPr>
-          <p:cNvPr id="17" name="Shape 15"/>
-          <p:cNvSpPr/>
-          <p:nvPr/>
-        </p:nvSpPr>
-        <p:spPr>
-          <a:xfrm>
-            <a:off x="6172200" y="4879848"/>
-            <a:ext cx="5486400" cy="1520952"/>
-          </a:xfrm>
-          <a:prstGeom prst="roundRect">
-            <a:avLst>
-              <a:gd name="adj" fmla="val 4810"/>
-            </a:avLst>
-          </a:prstGeom>
-          <a:solidFill>
-            <a:srgbClr val="FFFFFF"/>
-          </a:solidFill>
-          <a:ln w="22225">
-            <a:solidFill>
-              <a:srgbClr val="E8A33D"/>
-            </a:solidFill>
-            <a:prstDash val="solid"/>
-          </a:ln>
-          <a:effectLst>
-            <a:outerShdw sx="100000" sy="100000" kx="0" ky="0" algn="bl" rotWithShape="0" blurRad="76200" dist="25400" dir="5400000">
-              <a:srgbClr val="1F2429">
-                <a:alpha val="16000"/>
-              </a:srgbClr>
-            </a:outerShdw>
-          </a:effectLst>
-        </p:spPr>
-      </p:sp>
-      <p:sp>
-        <p:nvSpPr>
-          <p:cNvPr id="18" name="Shape 16"/>
-          <p:cNvSpPr/>
-          <p:nvPr/>
-        </p:nvSpPr>
-        <p:spPr>
-          <a:xfrm>
-            <a:off x="6318504" y="5439156"/>
-            <a:ext cx="91440" cy="310896"/>
-          </a:xfrm>
-          <a:prstGeom prst="rect">
-            <a:avLst/>
-          </a:prstGeom>
-          <a:solidFill>
-            <a:srgbClr val="E8A33D"/>
-          </a:solidFill>
-          <a:ln/>
-        </p:spPr>
-      </p:sp>
-      <p:sp>
-        <p:nvSpPr>
-          <p:cNvPr id="19" name="Text 17"/>
-          <p:cNvSpPr txBox="1"/>
-          <p:nvPr/>
-        </p:nvSpPr>
-        <p:spPr>
-          <a:xfrm>
-            <a:off x="6537960" y="4953000"/>
-            <a:ext cx="4937760" cy="684428"/>
-          </a:xfrm>
-          <a:prstGeom prst="rect">
-            <a:avLst/>
-          </a:prstGeom>
-          <a:noFill/>
-          <a:ln/>
-        </p:spPr>
-        <p:txBody>
-          <a:bodyPr wrap="square" rtlCol="0" anchor="t"/>
-          <a:lstStyle/>
-          <a:p>
-            <a:pPr indent="0" marL="0">
-              <a:buNone/>
-            </a:pPr>
-            <a:r>
-              <a:rPr lang="en-US" sz="1400" b="1" dirty="0">
-                <a:solidFill>
-                  <a:srgbClr val="1F2429"/>
-                </a:solidFill>
-                <a:latin typeface="Calibri" pitchFamily="34" charset="0"/>
-                <a:ea typeface="Calibri" pitchFamily="34" charset="-122"/>
-                <a:cs typeface="Calibri" pitchFamily="34" charset="-120"/>
-              </a:rPr>
-              <a:t>INDEX ON Enrollment(studentId)</a:t>
-            </a:r>
-            <a:endParaRPr lang="en-US" sz="1400" dirty="0"/>
-          </a:p>
-        </p:txBody>
-      </p:sp>
-      <p:sp>
-        <p:nvSpPr>
-          <p:cNvPr id="20" name="Text 18"/>
-          <p:cNvSpPr txBox="1"/>
-          <p:nvPr/>
-        </p:nvSpPr>
-        <p:spPr>
-          <a:xfrm>
-            <a:off x="6537960" y="5518648"/>
-            <a:ext cx="4937760" cy="836524"/>
-          </a:xfrm>
-          <a:prstGeom prst="rect">
-            <a:avLst/>
-          </a:prstGeom>
-          <a:noFill/>
-          <a:ln/>
-        </p:spPr>
-        <p:txBody>
-          <a:bodyPr wrap="square" rtlCol="0" anchor="t"/>
-          <a:lstStyle/>
-          <a:p>
-            <a:pPr indent="0" marL="0">
-              <a:lnSpc>
-                <a:spcPct val="110000"/>
-              </a:lnSpc>
-              <a:buNone/>
-            </a:pPr>
-            <a:r>
-              <a:rPr lang="en-US" sz="1100" dirty="0">
-                <a:solidFill>
-                  <a:srgbClr val="6B7480"/>
-                </a:solidFill>
-                <a:latin typeface="Calibri" pitchFamily="34" charset="0"/>
-                <a:ea typeface="Calibri" pitchFamily="34" charset="-122"/>
-                <a:cs typeface="Calibri" pitchFamily="34" charset="-120"/>
-              </a:rPr>
-              <a:t>Makes “find this student's enrollments” fast.</a:t>
-            </a:r>
-            <a:endParaRPr lang="en-US" sz="1100" dirty="0"/>
+            <a:endParaRPr lang="en-US" sz="1800" dirty="0"/>
           </a:p>
         </p:txBody>
       </p:sp>
